--- a/docs/presentations/case-17-lokalny-chat-i-ierarhiya-katalogov.pptx
+++ b/docs/presentations/case-17-lokalny-chat-i-ierarhiya-katalogov.pptx
@@ -695,7 +695,7 @@
           <a:p>
             <a:r>
               <a:rPr lang="en-US" dirty="0"/>
-              <a:t>Новый слайд — прямой ответ на замечание пользователя после просмотра дерева: каталог может по смыслу принадлежать больше чем одному домену. Точная формулировка, которую важно не смазать: это НЕ исключение из правила «видимость течёт только вниз» — правило продолжает действовать независимо и полностью внутри каждого домена (персона на корне «Кадры» видит «Список сотрудников» по обычному нисходящему наследованию, точно так же персона в «Продажи»). Новое — только то, что один и тот же узел может быть нисходяще достижимым сразу в двух разных деревьях одновременно, то есть иметь двух родителей, а не одного. Это зеркальный случай вопросу 4 из case-11 (там — доступ персоны к нескольким несмежным узлам ОДНОГО домена; здесь — членство каталога сразу в НЕСКОЛЬКИХ доменах) и прямая иллюстрация вывода case-19 §5: ни одна из проверенных зрелых систем (SharePoint, Google Drive, Purview, Databricks) не обошлась без отдельного механизма для похожего кросс-веточного/кросс-доменного случая — это стоит поднять с вендором как открытый архитектурный вопрос, а не решать самим деревом.</a:t>
+              <a:t>Новый слайд — прямой ответ на замечание пользователя после просмотра дерева: каталог может по смыслу принадлежать больше чем одному домену. Точная формулировка, которую важно не смазать: это НЕ исключение из правила «видимость течёт только вниз» — правило продолжает действовать независимо и полностью внутри каждого домена (персона на корне «Кадры» видит «Список сотрудников» по обычному нисходящему наследованию, точно так же персона в «Продажи»). Новое — только то, что один и тот же узел может быть нисходяще достижимым сразу в двух разных деревьях одновременно, то есть иметь двух родителей, а не одного. Это зеркальный случай вопросу 4 из case-11 (там — доступ персоны к нескольким несмежным узлам ОДНОГО домена; здесь — членство каталога сразу в НЕСКОЛЬКИХ доменах) и прямая иллюстрация вывода case-19 §5: ни одна из проверенных зрелых систем (SharePoint, Google Drive, Purview, Databricks) не обошлась без отдельного механизма для похожего кросс-веточного/кросс-доменного случая. Это не повод сомневаться в самом предложении дерева — это конкретная реализационная деталь, которую честнее поднять сейчас и решить вместе с вендором, чем сделать вид, что её не существует.</a:t>
             </a:r>
             <a:endParaRPr lang="en-US" dirty="0"/>
           </a:p>
@@ -959,7 +959,7 @@
           <a:p>
             <a:r>
               <a:rPr lang="en-US" dirty="0"/>
-              <a:t>Обновлено по итогам case-19/case-20: раньше средний пункт был непроверенным утверждением «давно стандартно в DMS/DAM-системах» без единого названного продукта (справедливо раскритиковано в case-20, §3). Теперь — конкретные, названные прецеденты из case-19: Microsoft Purview (самый близкий — есть буквально функция «Restrict inherited permissions» и тот же инвариант «корень нельзя ограничить»), Google Drive («Limited access»/«Expansive access»), SharePoint («break inheritance»), Databricks Unity Catalog (наследование по catalog.schema.table). Первый пункт также уточнён: предложение решает 2b (организация доменов), а не 2a (гранулярность внутри документа) — это два разных вопроса вендору, разница объяснена на предыдущем слайде.</a:t>
+              <a:t>Обновлено по итогам case-19/case-20: раньше средний пункт был непроверенным утверждением «давно стандартно в DMS/DAM-системах» без единого названного продукта (справедливо раскритиковано в case-20, §3). Теперь — конкретные, названные прецеденты из case-19: Microsoft Purview (самый близкий — есть буквально функция «Restrict inherited permissions» и тот же инвариант «корень нельзя ограничить»), Google Drive («Limited access»/«Expansive access»), SharePoint («break inheritance»), Databricks Unity Catalog (наследование по catalog.schema.table). Первый пункт также уточнён: предложение решает 2b (организация доменов), а не 2a (гранулярность внутри документа) — это два разных вопроса вендору, разница объяснена на предыдущем слайде. Это опора для уверенного тона части 2: мы предлагаем не гипотезу, а модель, чьё поведение по умолчанию уже проверено в нескольких независимо развивавшихся системах.</a:t>
             </a:r>
             <a:endParaRPr lang="en-US" dirty="0"/>
           </a:p>
@@ -1047,7 +1047,7 @@
           <a:p>
             <a:r>
               <a:rPr lang="en-US" dirty="0"/>
-              <a:t>Важно подчеркнуть: это предложение — не блокер для текущего пилота Д8. Сегодняшний обходной путь (несколько коллекций с отдельными доменами вместо одного дерева) полностью рабочий, просто требует больше ручного планирования на старте и создаёт риск, что несколько независимых коллекций/доменов со временем разъедутся по составу прав.</a:t>
+              <a:t>Важно подчеркнуть: предложение не блокер для текущего пилота Д8 и не повод откладывать его до реализации дерева. Сегодняшний обходной путь (несколько коллекций с отдельными доменами вместо одного дерева) полностью рабочий, просто требует больше ручного планирования на старте и создаёт риск, что несколько независимых коллекций/доменов со временем разъедутся по составу прав — именно это неудобство и снимает предложенное дерево.</a:t>
             </a:r>
             <a:endParaRPr lang="en-US" dirty="0"/>
           </a:p>
@@ -1135,7 +1135,7 @@
           <a:p>
             <a:r>
               <a:rPr lang="en-US" dirty="0"/>
-              <a:t>Формулировка статуса намеренная: это предложение для дорожной карты, поданное в сторону вендора как готовая для обсуждения модель, а не жалоба на текущую функциональность. В case-11 пункт явно не привязан к конкретному коду роадмапа — предполагаем линию «Каталог» (КАТ-) или «Надзор» (НАД-) как наиболее вероятных кандидатов.</a:t>
+              <a:t>Формулировка статуса намеренная и увереннее, чем раньше: это готовое предложение к реализации, поданное вендору как модель, которую мы предлагаем включить в дорожную карту, а не жалоба на текущую функциональность и не гипотеза для обсуждения «стоит ли вообще». Открытые детали (двойное членство каталогов, реструктуризация дерева, множественная привязка персон) остаются реальными и честно названы на предыдущих слайдах — но как то, что дорабатывается вместе с вендором в процессе реализации, а не как причины сомневаться в самом предложении. В case-11 пункт явно не привязан к конкретному коду роадмапа — предполагаем линию «Каталог» (КАТ-) или «Надзор» (НАД-) как наиболее вероятных кандидатов.</a:t>
             </a:r>
             <a:endParaRPr lang="en-US" dirty="0"/>
           </a:p>
@@ -1223,7 +1223,7 @@
           <a:p>
             <a:r>
               <a:rPr lang="en-US" dirty="0"/>
-              <a:t>Слайд-синтез, связывающий обе части: и локальный чат, и иерархия каталогов — про одну и ту же границу между тем, что платформа уже гарантирует документированно, и тем, что нужно уточнить по мере роста поверхности платформы (новое место исполнения; более тонкая гранулярность доступа). Оба вопроса поднимаются заранее, пока ни один не стал контрактным обязательством.</a:t>
+              <a:t>Слайд-синтез, связывающий обе части и явно называющий две разные позиции по ним: и локальный чат, и иерархия каталогов — про одну и ту же границу между тем, что платформа уже гарантирует документированно, и тем, что нужно решить по мере роста поверхности платформы. Но решаются они по-разному: Часть 1 (новое место исполнения) — это открытый вопрос вендору, наше сомнение в необходимости; Часть 2 (более тонкая гранулярность доступа) — это наше предложение к реализации, которое мы считаем готовым. Оба поднимаются заранее, пока ни один не стал контрактным обязательством.</a:t>
             </a:r>
             <a:endParaRPr lang="en-US" dirty="0"/>
           </a:p>
@@ -1311,7 +1311,7 @@
           <a:p>
             <a:r>
               <a:rPr lang="en-US" dirty="0"/>
-              <a:t>Закрывающий слайд. Единственный источник фактов для обеих тем этой колоды — case-11-voprosy-vendoru-roadmap.md; он же станет местом, куда будут добавлены ответы вендора по мере их получения, и куда попадут следующие вопросы по дорожной карте по мере разбора остальных пунктов.</a:t>
+              <a:t>Закрывающий слайд, явно фиксирующий две разные позиции колоды: Часть 1 — открытый вопрос вендору о необходимости РМ-1 в заявленном виде, ответа пока нет; Часть 2 — наше предложение к реализации, которое мы считаем проработанным и готовы обсуждать детали. Единственный источник фактов для обеих тем — case-11-voprosy-vendoru-roadmap.md; он же станет местом, куда будут добавлены ответы вендора по мере их получения, и куда попадут следующие вопросы по дорожной карте по мере разбора остальных пунктов.</a:t>
             </a:r>
             <a:endParaRPr lang="en-US" dirty="0"/>
           </a:p>
@@ -1399,7 +1399,7 @@
           <a:p>
             <a:r>
               <a:rPr lang="en-US" dirty="0"/>
-              <a:t>Смысл слайда — объяснить, зачем два, на первый взгляд, разных вопроса объединены в одну колоду. Общий знаменатель: оба — про расширение границ контроля доступа за пределы того, что сегодня документировано. Часть 1 — новое МЕСТО исполнения (компьютер сотрудника вместо сервера). Часть 2 — новая ГРАНУЛЯРНОСТЬ (узел дерева вместо целой коллекции). Оба вопроса уже вошли в пакет вопросов вендору (case-11).</a:t>
+              <a:t>Смысл слайда — сразу задать две разные позиции по двум темам, а не подавать обе как одинаково открытые вопросы. Часть 1 (локальный чат / агент рабочей станции, РМ-1): у нас есть сомнения, нужно ли это расширение в заявленном виде, пока не решён вопрос о защите данных на компьютере сотрудника — это диалог с вендором, а не отказ от функции. Часть 2 (иерархия каталогов): у нас есть проработанная модель (дерево каталогов), которую мы считаем достаточно зрелой, чтобы предлагать её в дорожную карту и обсуждать детали реализации, а не решать, стоит ли вообще что-то делать. Оба уже зафиксированы в пакете вопросов вендору (case-11).</a:t>
             </a:r>
             <a:endParaRPr lang="en-US" dirty="0"/>
           </a:p>
@@ -1487,7 +1487,7 @@
           <a:p>
             <a:r>
               <a:rPr lang="en-US" dirty="0"/>
-              <a:t>Раздел-разделитель. Дальше — три плотных слайда о линии «Раб. места» дорожной карты (сознательно сокращено с восьми — часть 1 не должна разворачиваться дольше, чем нужно для передачи технического запроса): что это и какие четыре пункта в неё входят, четыре уточняющих вопроса вендору, и почему это важно с закрывающим статусом.</a:t>
+              <a:t>Раздел-разделитель. Дальше — три плотных слайда о линии «Раб. места» дорожной карты (сознательно сокращено с восьми — часть 1 не должна разворачиваться дольше, чем нужно для передачи технического запроса): что это и какие четыре пункта в неё входят, четыре вопроса вендору, ответы на которые снимут или подтвердят сомнение, и почему сомнение вообще возникло — с закрывающим статусом. Тон намеренно мягкий: это не рекомендация отказаться от РМ-1, а вопрос, который вендор может закрыть ответом.</a:t>
             </a:r>
             <a:endParaRPr lang="en-US" dirty="0"/>
           </a:p>
@@ -1575,7 +1575,7 @@
           <a:p>
             <a:r>
               <a:rPr lang="en-US" dirty="0"/>
-              <a:t>Слайд объединяет «что это» и «четыре пункта роадмапа» в одну плотную карточку — раньше это были два отдельных слайда с большим количеством повторяющегося текста. Ключевая мысль сохранена: новое место исполнения — не улучшение серверного чата, а второй контур обработки данных (компьютер сотрудника). РМ-1 и РМ-2 — оба Q1 2027, уровень C (направление подтверждено, состав уточняется, не обязательство со сроками). РМ-3 — Q2 2027, C. РМ-4 — H2 2027, уровень D, пустая формулировка без состава — не читать в это ничего конкретного.</a:t>
+              <a:t>Слайд объединяет «что это» и «четыре пункта роадмапа» в одну плотную карточку — раньше это были два отдельных слайда с большим количеством повторяющегося текста. Ключевая мысль сохранена: новое место исполнения — не улучшение серверного чата, а второй контур обработки данных (компьютер сотрудника). РМ-1 и РМ-2 — оба Q1 2027, уровень C (направление подтверждено, состав уточняется, не обязательство со сроками). РМ-3 — Q2 2027, C. РМ-4 — H2 2027, уровень D, пустая формулировка без состава — не читать в это ничего конкретного. Наши сомнения сосредоточены именно в РМ-1 (модель запретов и судьба разрешённого содержимого) — не в самой идее агента рабочей станции как таковой.</a:t>
             </a:r>
             <a:endParaRPr lang="en-US" dirty="0"/>
           </a:p>
@@ -1663,7 +1663,7 @@
           <a:p>
             <a:r>
               <a:rPr lang="en-US" dirty="0"/>
-              <a:t>Все четыре формулировки — дословно из Вопроса 1 в case-11-voprosy-vendoru-roadmap.md, содержание не сокращалось. Порядок сохранён: (1) применяется ли то же маскирование, (2) действует ли то же правило про внешние/облачные модели, (3) кто задаёт запреты — админ или сам пользователь, (4) единый ли журнал аудита. Это основной содержательный слайд части 1 — вокруг него специально убраны декоративные слайды-подводки.</a:t>
+              <a:t>Все четыре формулировки — дословно из Вопроса 1 в case-11-voprosy-vendoru-roadmap.md, содержание не сокращалось и не смягчалось. Порядок сохранён: (1) применяется ли то же маскирование, (2) действует ли то же правило про внешние/облачные модели, (3) кто задаёт запреты — админ или сам пользователь, (4) единый ли журнал аудита. Это основной содержательный слайд части 1: раньше подавался как «уточняющие вопросы к уже принятому пункту», теперь — как условия, при выполнении которых наше сомнение в необходимости РМ-1 снимается. Вокруг него специально убраны декоративные слайды-подводки.</a:t>
             </a:r>
             <a:endParaRPr lang="en-US" dirty="0"/>
           </a:p>
@@ -1751,7 +1751,7 @@
           <a:p>
             <a:r>
               <a:rPr lang="en-US" dirty="0"/>
-              <a:t>Это наша внутренняя оценка (не для передачи вендору как есть, только для собственной подготовки) — из всех 35 пунктов дорожной карты это единственный, где рядом с новой функцией явно не упомянута уже заявленная модель защиты данных. Слайд объединяет аргумент «почему важно» с закрывающим статусом части 1 — отдельного слайда-итога больше нет, статус дан одной строкой внизу: вопрос сформулирован, ответа вендора пока нет, уровень C — не обязательство по срокам.</a:t>
+              <a:t>Это наша внутренняя оценка (не для передачи вендору как есть, только для собственной подготовки) — из всех 35 пунктов дорожной карты это единственный, где рядом с новой функцией явно не упомянута уже заявленная модель защиты данных, и это главная опора нашего сомнения в необходимости РМ-1 в текущем виде. Слайд объединяет аргумент «почему сомнение возникло» с закрывающим статусом части 1 — отдельного слайда-итога больше нет, статус дан одной строкой внизу: это открытый вопрос вендору, а не рекомендация отказаться от пункта; уровень C — не обязательство по срокам, так что сейчас подходящий момент спросить.</a:t>
             </a:r>
             <a:endParaRPr lang="en-US" dirty="0"/>
           </a:p>
@@ -1839,7 +1839,7 @@
           <a:p>
             <a:r>
               <a:rPr lang="en-US" dirty="0"/>
-              <a:t>Раздел-разделитель. Дальше — десять слайдов: сегодняшняя плоская модель доменов/коллекций, где она упирается в реальный сценарий (с явным разделением на два разных вопроса — 2a и 2b, по пересмотру case-11/case-20), дерево каталогов как предложение по 2b с ключевой диаграммой, отдельный слайд про кросс-доменное пересечение коллекций (случай, который дерево не решает само по себе), правило наследования, три персоны на новом дереве, почему предложение реалистично — с прецедентами из case-19, и что остаётся в силе, пока предложение не реализовано.</a:t>
+              <a:t>Раздел-разделитель. Дальше — десять слайдов: сегодняшняя плоская модель доменов/коллекций, где она упирается в реальный сценарий (с явным разделением на два разных вопроса — 2a и 2b, по пересмотру case-11/case-20), дерево каталогов как готовое предложение по 2b с ключевой диаграммой, отдельный слайд про кросс-доменное пересечение коллекций (деталь, которую доработаем вместе с вендором при реализации), правило наследования, три персоны на новом дереве, почему предложение реалистично — с прецедентами из case-19, и что остаётся в силе, пока идём к реализации. Тон части 2 — увереннее, чем части 1: это не вопрос «стоит ли», а предложение «вот модель, готовы прорабатывать детали».</a:t>
             </a:r>
             <a:endParaRPr lang="en-US" dirty="0"/>
           </a:p>
@@ -4643,7 +4643,7 @@
                 <a:ea typeface="Calibri" pitchFamily="34" charset="-122"/>
                 <a:cs typeface="Calibri" pitchFamily="34" charset="-120"/>
               </a:rPr>
-              <a:t>ЧАСТЬ 2 · ОТКРЫТЫЙ МОМЕНТ</a:t>
+              <a:t>ЧАСТЬ 2 · УТОЧНИМ ВМЕСТЕ ПРИ РЕАЛИЗАЦИИ</a:t>
             </a:r>
             <a:endParaRPr lang="en-US" sz="1150" dirty="0"/>
           </a:p>
@@ -5332,12 +5332,12 @@
           <a:p>
             <a:pPr indent="0" marL="0">
               <a:lnSpc>
-                <a:spcPct val="126000"/>
+                <a:spcPct val="124000"/>
               </a:lnSpc>
               <a:buNone/>
             </a:pPr>
             <a:r>
-              <a:rPr lang="en-US" sz="1150" b="1" dirty="0">
+              <a:rPr lang="en-US" sz="1100" b="1" dirty="0">
                 <a:solidFill>
                   <a:srgbClr val="B87A1E"/>
                 </a:solidFill>
@@ -5345,16 +5345,16 @@
                 <a:ea typeface="Calibri" pitchFamily="34" charset="-122"/>
                 <a:cs typeface="Calibri" pitchFamily="34" charset="-120"/>
               </a:rPr>
-              <a:t>Открытый момент для вендора: </a:t>
+              <a:t>Деталь для совместной проработки при реализации: </a:t>
             </a:r>
             <a:pPr indent="0" marL="0">
               <a:lnSpc>
-                <a:spcPct val="126000"/>
+                <a:spcPct val="124000"/>
               </a:lnSpc>
               <a:buNone/>
             </a:pPr>
             <a:r>
-              <a:rPr lang="en-US" sz="1150" dirty="0">
+              <a:rPr lang="en-US" sz="1100" dirty="0">
                 <a:solidFill>
                   <a:srgbClr val="1B1E27"/>
                 </a:solidFill>
@@ -5366,12 +5366,12 @@
             </a:r>
             <a:pPr indent="0" marL="0">
               <a:lnSpc>
-                <a:spcPct val="126000"/>
+                <a:spcPct val="124000"/>
               </a:lnSpc>
               <a:buNone/>
             </a:pPr>
             <a:r>
-              <a:rPr lang="en-US" sz="1150" b="1" dirty="0">
+              <a:rPr lang="en-US" sz="1100" b="1" dirty="0">
                 <a:solidFill>
                   <a:srgbClr val="1B1E27"/>
                 </a:solidFill>
@@ -5383,12 +5383,12 @@
             </a:r>
             <a:pPr indent="0" marL="0">
               <a:lnSpc>
-                <a:spcPct val="126000"/>
+                <a:spcPct val="124000"/>
               </a:lnSpc>
               <a:buNone/>
             </a:pPr>
             <a:r>
-              <a:rPr lang="en-US" sz="1150" dirty="0">
+              <a:rPr lang="en-US" sz="1100" dirty="0">
                 <a:solidFill>
                   <a:srgbClr val="1B1E27"/>
                 </a:solidFill>
@@ -5396,9 +5396,9 @@
                 <a:ea typeface="Calibri" pitchFamily="34" charset="-122"/>
                 <a:cs typeface="Calibri" pitchFamily="34" charset="-120"/>
               </a:rPr>
-              <a:t> — см. case-19, §5.</a:t>
-            </a:r>
-            <a:endParaRPr lang="en-US" sz="1150" dirty="0"/>
+              <a:t> — см. case-19, §5. Предложение дерева от этого не меняется, только это конкретное решение стоит выбрать вместе с вендором.</a:t>
+            </a:r>
+            <a:endParaRPr lang="en-US" sz="1100" dirty="0"/>
           </a:p>
         </p:txBody>
       </p:sp>
@@ -7690,7 +7690,7 @@
                 <a:ea typeface="Calibri" pitchFamily="34" charset="-122"/>
                 <a:cs typeface="Calibri" pitchFamily="34" charset="-120"/>
               </a:rPr>
-              <a:t>ЧАСТЬ 2 · ПОЧЕМУ ЭТО РЕАЛИСТИЧНЫЙ ЗАПРОС</a:t>
+              <a:t>ЧАСТЬ 2 · ПОЧЕМУ ЭТО РЕАЛИСТИЧНОЕ ПРЕДЛОЖЕНИЕ</a:t>
             </a:r>
             <a:endParaRPr lang="en-US" sz="1150" dirty="0"/>
           </a:p>
@@ -7732,7 +7732,7 @@
                 <a:ea typeface="Cambria" pitchFamily="34" charset="-122"/>
                 <a:cs typeface="Cambria" pitchFamily="34" charset="-120"/>
               </a:rPr>
-              <a:t>Не просто идея — подкреплена проверенными прецедентами</a:t>
+              <a:t>Не просто идея — предложение подкреплено проверенными прецедентами</a:t>
             </a:r>
             <a:endParaRPr lang="en-US" sz="2900" dirty="0"/>
           </a:p>
@@ -8367,7 +8367,7 @@
                 <a:ea typeface="Calibri" pitchFamily="34" charset="-122"/>
                 <a:cs typeface="Calibri" pitchFamily="34" charset="-120"/>
               </a:rPr>
-              <a:t>ЧАСТЬ 2 · ПОКА НЕ РЕАЛИЗОВАНО</a:t>
+              <a:t>ЧАСТЬ 2 · ДО РЕАЛИЗАЦИИ</a:t>
             </a:r>
             <a:endParaRPr lang="en-US" sz="1150" dirty="0"/>
           </a:p>
@@ -8409,7 +8409,7 @@
                 <a:ea typeface="Cambria" pitchFamily="34" charset="-122"/>
                 <a:cs typeface="Cambria" pitchFamily="34" charset="-120"/>
               </a:rPr>
-              <a:t>Что остаётся в силе сегодня, пока предложение не принято</a:t>
+              <a:t>Что остаётся в силе сегодня, пока предложение не реализовано</a:t>
             </a:r>
             <a:endParaRPr lang="en-US" sz="2900" dirty="0"/>
           </a:p>
@@ -8999,7 +8999,7 @@
                 <a:ea typeface="Cambria" pitchFamily="34" charset="-122"/>
                 <a:cs typeface="Cambria" pitchFamily="34" charset="-120"/>
               </a:rPr>
-              <a:t>Статус: предложение для roadmap, а не отчёт о дефекте</a:t>
+              <a:t>Статус: предложение к реализации, а не отчёт о дефекте</a:t>
             </a:r>
             <a:endParaRPr lang="en-US" sz="2900" dirty="0"/>
           </a:p>
@@ -9048,7 +9048,7 @@
         <p:spPr>
           <a:xfrm>
             <a:off x="914400" y="2103120"/>
-            <a:ext cx="2651760" cy="457200"/>
+            <a:ext cx="3063240" cy="457200"/>
           </a:xfrm>
           <a:prstGeom prst="roundRect">
             <a:avLst>
@@ -9070,7 +9070,7 @@
         <p:spPr>
           <a:xfrm>
             <a:off x="960120" y="2103120"/>
-            <a:ext cx="2560320" cy="457200"/>
+            <a:ext cx="2971800" cy="457200"/>
           </a:xfrm>
           <a:prstGeom prst="rect">
             <a:avLst/>
@@ -9094,7 +9094,7 @@
                 <a:ea typeface="Calibri" pitchFamily="34" charset="-122"/>
                 <a:cs typeface="Calibri" pitchFamily="34" charset="-120"/>
               </a:rPr>
-              <a:t>Roadmap-предложение</a:t>
+              <a:t>Предложение к реализации</a:t>
             </a:r>
             <a:endParaRPr lang="en-US" sz="1300" dirty="0"/>
           </a:p>
@@ -9123,12 +9123,12 @@
           <a:p>
             <a:pPr indent="0" marL="0">
               <a:lnSpc>
-                <a:spcPct val="126000"/>
+                <a:spcPct val="124000"/>
               </a:lnSpc>
               <a:buNone/>
             </a:pPr>
             <a:r>
-              <a:rPr lang="en-US" sz="1300" dirty="0">
+              <a:rPr lang="en-US" sz="1250" dirty="0">
                 <a:solidFill>
                   <a:srgbClr val="1B1E27"/>
                 </a:solidFill>
@@ -9136,9 +9136,9 @@
                 <a:ea typeface="Calibri" pitchFamily="34" charset="-122"/>
                 <a:cs typeface="Calibri" pitchFamily="34" charset="-120"/>
               </a:rPr>
-              <a:t>Это не найденный баг и не пробел в тестировании — а естественное расширение сегодняшней модели «домен = тематическая область», подкреплённое конкретными прецедентами (case-19), которое предлагается обсудить с вендором предметно.</a:t>
-            </a:r>
-            <a:endParaRPr lang="en-US" sz="1300" dirty="0"/>
+              <a:t>Это не найденный баг и не пробел в тестировании — а естественное расширение сегодняшней модели «домен = тематическая область», подкреплённое конкретными прецедентами (case-19). Мы предлагаем включить его в дорожную карту и готовы прорабатывать детали реализации вместе с вендором.</a:t>
+            </a:r>
+            <a:endParaRPr lang="en-US" sz="1250" dirty="0"/>
           </a:p>
         </p:txBody>
       </p:sp>
@@ -9361,7 +9361,7 @@
               <a:buNone/>
             </a:pPr>
             <a:r>
-              <a:rPr lang="en-US" sz="2900" b="1" dirty="0">
+              <a:rPr lang="en-US" sz="2700" b="1" dirty="0">
                 <a:solidFill>
                   <a:srgbClr val="1B1E27"/>
                 </a:solidFill>
@@ -9369,9 +9369,9 @@
                 <a:ea typeface="Cambria" pitchFamily="34" charset="-122"/>
                 <a:cs typeface="Cambria" pitchFamily="34" charset="-120"/>
               </a:rPr>
-              <a:t>Одна и та же граница: что уже гарантировано, и что требует уточнения по мере роста платформы</a:t>
-            </a:r>
-            <a:endParaRPr lang="en-US" sz="2900" dirty="0"/>
+              <a:t>Одна и та же граница контроля доступа — два разных ответа: сомнение и предложение</a:t>
+            </a:r>
+            <a:endParaRPr lang="en-US" sz="2700" dirty="0"/>
           </a:p>
         </p:txBody>
       </p:sp>
@@ -9665,7 +9665,7 @@
                 <a:ea typeface="Cambria" pitchFamily="34" charset="-122"/>
                 <a:cs typeface="Cambria" pitchFamily="34" charset="-120"/>
               </a:rPr>
-              <a:t>Требует уточнения по мере роста</a:t>
+              <a:t>Две разные позиции</a:t>
             </a:r>
             <a:endParaRPr lang="en-US" sz="1550" dirty="0"/>
           </a:p>
@@ -9694,12 +9694,12 @@
           <a:p>
             <a:pPr indent="0" marL="0">
               <a:lnSpc>
-                <a:spcPct val="140000"/>
+                <a:spcPct val="132000"/>
               </a:lnSpc>
               <a:buNone/>
             </a:pPr>
             <a:r>
-              <a:rPr lang="en-US" sz="1300" dirty="0">
+              <a:rPr lang="en-US" sz="1200" dirty="0">
                 <a:solidFill>
                   <a:srgbClr val="1B1E27"/>
                 </a:solidFill>
@@ -9707,19 +9707,19 @@
                 <a:ea typeface="Calibri" pitchFamily="34" charset="-122"/>
                 <a:cs typeface="Calibri" pitchFamily="34" charset="-120"/>
               </a:rPr>
-              <a:t>• Новое место исполнения — компьютер сотрудника (Часть 1)</a:t>
-            </a:r>
-            <a:endParaRPr lang="en-US" sz="1300" dirty="0"/>
+              <a:t>• Часть 1 — сомнение в необходимости нового места исполнения (компьютер сотрудника); ждём ответа вендора</a:t>
+            </a:r>
+            <a:endParaRPr lang="en-US" sz="1200" dirty="0"/>
           </a:p>
           <a:p>
             <a:pPr indent="0" marL="0">
               <a:lnSpc>
-                <a:spcPct val="140000"/>
+                <a:spcPct val="132000"/>
               </a:lnSpc>
               <a:buNone/>
             </a:pPr>
             <a:r>
-              <a:rPr lang="en-US" sz="1300" dirty="0">
+              <a:rPr lang="en-US" sz="1200" dirty="0">
                 <a:solidFill>
                   <a:srgbClr val="1B1E27"/>
                 </a:solidFill>
@@ -9727,9 +9727,9 @@
                 <a:ea typeface="Calibri" pitchFamily="34" charset="-122"/>
                 <a:cs typeface="Calibri" pitchFamily="34" charset="-120"/>
               </a:rPr>
-              <a:t>• Более тонкая гранулярность доступа, чем плоский домен способен выразить (Часть 2)</a:t>
-            </a:r>
-            <a:endParaRPr lang="en-US" sz="1300" dirty="0"/>
+              <a:t>• Часть 2 — предложение к реализации, снимающее ограничение плоского домена; готовы дорабатывать вместе</a:t>
+            </a:r>
+            <a:endParaRPr lang="en-US" sz="1200" dirty="0"/>
           </a:p>
         </p:txBody>
       </p:sp>
@@ -9755,10 +9755,13 @@
           <a:lstStyle/>
           <a:p>
             <a:pPr algn="ctr" indent="0" marL="0">
-              <a:buNone/>
-            </a:pPr>
-            <a:r>
-              <a:rPr lang="en-US" sz="1350" b="1" i="1" dirty="0">
+              <a:lnSpc>
+                <a:spcPct val="120000"/>
+              </a:lnSpc>
+              <a:buNone/>
+            </a:pPr>
+            <a:r>
+              <a:rPr lang="en-US" sz="1300" b="1" i="1" dirty="0">
                 <a:solidFill>
                   <a:srgbClr val="1B1E27"/>
                 </a:solidFill>
@@ -9766,9 +9769,9 @@
                 <a:ea typeface="Calibri" pitchFamily="34" charset="-122"/>
                 <a:cs typeface="Calibri" pitchFamily="34" charset="-120"/>
               </a:rPr>
-              <a:t>Оба вопроса поднимаются проактивно — до того, как любой из них станет жёстким обязательством в договоре.</a:t>
-            </a:r>
-            <a:endParaRPr lang="en-US" sz="1350" dirty="0"/>
+              <a:t>Часть 1 остаётся открытым вопросом для вендора, Часть 2 — предложением к реализации. Обе позиции поднимаются проактивно, до того как РМ-1 или «Каталог»/«Надзор» станут обязательством в договоре.</a:t>
+            </a:r>
+            <a:endParaRPr lang="en-US" sz="1300" dirty="0"/>
           </a:p>
         </p:txBody>
       </p:sp>
@@ -10001,7 +10004,7 @@
                 <a:ea typeface="Cambria" pitchFamily="34" charset="-122"/>
                 <a:cs typeface="Cambria" pitchFamily="34" charset="-120"/>
               </a:rPr>
-              <a:t>Оба вопроса отслеживаются в одном файле</a:t>
+              <a:t>Сомнение и предложение — в одном файле</a:t>
             </a:r>
             <a:endParaRPr lang="en-US" sz="3000" dirty="0"/>
           </a:p>
@@ -10016,7 +10019,7 @@
         <p:spPr>
           <a:xfrm>
             <a:off x="548640" y="3246120"/>
-            <a:ext cx="7863840" cy="1005840"/>
+            <a:ext cx="7863840" cy="1051560"/>
           </a:xfrm>
           <a:prstGeom prst="rect">
             <a:avLst/>
@@ -10030,12 +10033,12 @@
           <a:p>
             <a:pPr indent="0" marL="0">
               <a:lnSpc>
-                <a:spcPct val="135000"/>
+                <a:spcPct val="130000"/>
               </a:lnSpc>
               <a:buNone/>
             </a:pPr>
             <a:r>
-              <a:rPr lang="en-US" sz="1500" dirty="0">
+              <a:rPr lang="en-US" sz="1450" dirty="0">
                 <a:solidFill>
                   <a:srgbClr val="AEB4C4"/>
                 </a:solidFill>
@@ -10043,9 +10046,9 @@
                 <a:ea typeface="Calibri" pitchFamily="34" charset="-122"/>
                 <a:cs typeface="Calibri" pitchFamily="34" charset="-120"/>
               </a:rPr>
-              <a:t>case-11-voprosy-vendoru-roadmap.md — источник обеих формулировок в этой колоде. Туда же лягут ответы вендора по мере поступления, и обсуждение продолжится в этом же файле.</a:t>
-            </a:r>
-            <a:endParaRPr lang="en-US" sz="1500" dirty="0"/>
+              <a:t>Часть 1 остаётся открытым вопросом о необходимости — ждём точку зрения вендора. Часть 2 — наше предложение к реализации, готовое дорабатывать вместе. Обе позиции зафиксированы в case-11-voprosy-vendoru-roadmap.md, куда лягут ответы вендора и шаги к реализации.</a:t>
+            </a:r>
+            <a:endParaRPr lang="en-US" sz="1450" dirty="0"/>
           </a:p>
         </p:txBody>
       </p:sp>
@@ -10287,7 +10290,7 @@
               <a:buNone/>
             </a:pPr>
             <a:r>
-              <a:rPr lang="en-US" sz="2900" b="1" dirty="0">
+              <a:rPr lang="en-US" sz="2600" b="1" dirty="0">
                 <a:solidFill>
                   <a:srgbClr val="1B1E27"/>
                 </a:solidFill>
@@ -10295,9 +10298,9 @@
                 <a:ea typeface="Cambria" pitchFamily="34" charset="-122"/>
                 <a:cs typeface="Cambria" pitchFamily="34" charset="-120"/>
               </a:rPr>
-              <a:t>Обе темы — об одном и том же: где именно и насколько точно работает контроль доступа</a:t>
-            </a:r>
-            <a:endParaRPr lang="en-US" sz="2900" dirty="0"/>
+              <a:t>Одна дорожная карта, две разные позиции: сомнение в необходимости и предложение к реализации</a:t>
+            </a:r>
+            <a:endParaRPr lang="en-US" sz="2600" dirty="0"/>
           </a:p>
         </p:txBody>
       </p:sp>
@@ -10324,12 +10327,12 @@
           <a:p>
             <a:pPr indent="0" marL="0">
               <a:lnSpc>
-                <a:spcPct val="130000"/>
+                <a:spcPct val="128000"/>
               </a:lnSpc>
               <a:buNone/>
             </a:pPr>
             <a:r>
-              <a:rPr lang="en-US" sz="1450" dirty="0">
+              <a:rPr lang="en-US" sz="1400" dirty="0">
                 <a:solidFill>
                   <a:srgbClr val="5B6472"/>
                 </a:solidFill>
@@ -10337,9 +10340,9 @@
                 <a:ea typeface="Calibri" pitchFamily="34" charset="-122"/>
                 <a:cs typeface="Calibri" pitchFamily="34" charset="-120"/>
               </a:rPr>
-              <a:t>Платформа документирует контроль доступа для серверной части и на уровне целой коллекции документов. Обе темы ниже — про то, что происходит на границах этой модели: там, где право читать данные не описано архитектурно, либо не может быть выражено достаточно точно.</a:t>
-            </a:r>
-            <a:endParaRPr lang="en-US" sz="1450" dirty="0"/>
+              <a:t>Платформа документирует контроль доступа для серверной части и на уровне целой коллекции документов. Но из этого не следует, что любое расширение этой границы стоит принимать как есть: по локальному чату у нас остаются сомнения, нужно ли расширение в заявленном виде; по иерархии каталогов — наоборот, есть проработанное предложение, которое мы считаем готовым двигать в реализацию.</a:t>
+            </a:r>
+            <a:endParaRPr lang="en-US" sz="1400" dirty="0"/>
           </a:p>
         </p:txBody>
       </p:sp>
@@ -10429,8 +10432,8 @@
         </p:nvSpPr>
         <p:spPr>
           <a:xfrm>
-            <a:off x="1783080" y="2898648"/>
-            <a:ext cx="3703320" cy="274320"/>
+            <a:off x="1755648" y="2880360"/>
+            <a:ext cx="3776472" cy="329184"/>
           </a:xfrm>
           <a:prstGeom prst="rect">
             <a:avLst/>
@@ -10443,10 +10446,13 @@
           <a:lstStyle/>
           <a:p>
             <a:pPr indent="0" marL="0">
-              <a:buNone/>
-            </a:pPr>
-            <a:r>
-              <a:rPr lang="en-US" sz="1100" b="1" spc="120" kern="0" dirty="0">
+              <a:lnSpc>
+                <a:spcPct val="100000"/>
+              </a:lnSpc>
+              <a:buNone/>
+            </a:pPr>
+            <a:r>
+              <a:rPr lang="en-US" sz="1000" b="1" spc="80" kern="0" dirty="0">
                 <a:solidFill>
                   <a:srgbClr val="2F6FED"/>
                 </a:solidFill>
@@ -10454,9 +10460,9 @@
                 <a:ea typeface="Calibri" pitchFamily="34" charset="-122"/>
                 <a:cs typeface="Calibri" pitchFamily="34" charset="-120"/>
               </a:rPr>
-              <a:t>ГДЕ</a:t>
-            </a:r>
-            <a:endParaRPr lang="en-US" sz="1100" dirty="0"/>
+              <a:t>ЕСТЬ СОМНЕНИЯ В НЕОБХОДИМОСТИ</a:t>
+            </a:r>
+            <a:endParaRPr lang="en-US" sz="1000" dirty="0"/>
           </a:p>
         </p:txBody>
       </p:sp>
@@ -10468,8 +10474,8 @@
         </p:nvSpPr>
         <p:spPr>
           <a:xfrm>
-            <a:off x="1783080" y="3154680"/>
-            <a:ext cx="3703320" cy="502920"/>
+            <a:off x="1755648" y="3209544"/>
+            <a:ext cx="3776472" cy="457200"/>
           </a:xfrm>
           <a:prstGeom prst="rect">
             <a:avLst/>
@@ -10485,7 +10491,7 @@
               <a:buNone/>
             </a:pPr>
             <a:r>
-              <a:rPr lang="en-US" sz="1650" b="1" dirty="0">
+              <a:rPr lang="en-US" sz="1600" b="1" dirty="0">
                 <a:solidFill>
                   <a:srgbClr val="1B1E27"/>
                 </a:solidFill>
@@ -10495,7 +10501,7 @@
               </a:rPr>
               <a:t>Часть 1 — локальный чат</a:t>
             </a:r>
-            <a:endParaRPr lang="en-US" sz="1650" dirty="0"/>
+            <a:endParaRPr lang="en-US" sz="1600" dirty="0"/>
           </a:p>
         </p:txBody>
       </p:sp>
@@ -10522,12 +10528,12 @@
           <a:p>
             <a:pPr indent="0" marL="0">
               <a:lnSpc>
-                <a:spcPct val="128000"/>
+                <a:spcPct val="126000"/>
               </a:lnSpc>
               <a:buNone/>
             </a:pPr>
             <a:r>
-              <a:rPr lang="en-US" sz="1300" dirty="0">
+              <a:rPr lang="en-US" sz="1250" dirty="0">
                 <a:solidFill>
                   <a:srgbClr val="5B6472"/>
                 </a:solidFill>
@@ -10535,9 +10541,9 @@
                 <a:ea typeface="Calibri" pitchFamily="34" charset="-122"/>
                 <a:cs typeface="Calibri" pitchFamily="34" charset="-120"/>
               </a:rPr>
-              <a:t>Сегодня защита данных (маскирование PII/DLP) описана для серверной части. Роадмап добавляет второе место исполнения — компьютер сотрудника. Работает ли там та же защита — не описано.</a:t>
-            </a:r>
-            <a:endParaRPr lang="en-US" sz="1300" dirty="0"/>
+              <a:t>Сегодня защита данных (маскирование PII/DLP) описана для серверной части. Роадмап добавляет второе место исполнения — компьютер сотрудника, — и работает ли там та же защита, не описано. Пока это не прояснится, необходимость этого расширения в заявленном виде для нас под вопросом.</a:t>
+            </a:r>
+            <a:endParaRPr lang="en-US" sz="1250" dirty="0"/>
           </a:p>
         </p:txBody>
       </p:sp>
@@ -10627,8 +10633,8 @@
         </p:nvSpPr>
         <p:spPr>
           <a:xfrm>
-            <a:off x="7452360" y="2898648"/>
-            <a:ext cx="3703320" cy="274320"/>
+            <a:off x="7424928" y="2880360"/>
+            <a:ext cx="3776472" cy="329184"/>
           </a:xfrm>
           <a:prstGeom prst="rect">
             <a:avLst/>
@@ -10641,10 +10647,13 @@
           <a:lstStyle/>
           <a:p>
             <a:pPr indent="0" marL="0">
-              <a:buNone/>
-            </a:pPr>
-            <a:r>
-              <a:rPr lang="en-US" sz="1100" b="1" spc="120" kern="0" dirty="0">
+              <a:lnSpc>
+                <a:spcPct val="100000"/>
+              </a:lnSpc>
+              <a:buNone/>
+            </a:pPr>
+            <a:r>
+              <a:rPr lang="en-US" sz="1000" b="1" spc="80" kern="0" dirty="0">
                 <a:solidFill>
                   <a:srgbClr val="B87A1E"/>
                 </a:solidFill>
@@ -10652,9 +10661,9 @@
                 <a:ea typeface="Calibri" pitchFamily="34" charset="-122"/>
                 <a:cs typeface="Calibri" pitchFamily="34" charset="-120"/>
               </a:rPr>
-              <a:t>НАСКОЛЬКО ТОЧНО</a:t>
-            </a:r>
-            <a:endParaRPr lang="en-US" sz="1100" dirty="0"/>
+              <a:t>ПРЕДЛОЖЕНИЕ К РЕАЛИЗАЦИИ</a:t>
+            </a:r>
+            <a:endParaRPr lang="en-US" sz="1000" dirty="0"/>
           </a:p>
         </p:txBody>
       </p:sp>
@@ -10666,8 +10675,8 @@
         </p:nvSpPr>
         <p:spPr>
           <a:xfrm>
-            <a:off x="7452360" y="3154680"/>
-            <a:ext cx="3703320" cy="502920"/>
+            <a:off x="7424928" y="3209544"/>
+            <a:ext cx="3776472" cy="457200"/>
           </a:xfrm>
           <a:prstGeom prst="rect">
             <a:avLst/>
@@ -10683,7 +10692,7 @@
               <a:buNone/>
             </a:pPr>
             <a:r>
-              <a:rPr lang="en-US" sz="1650" b="1" dirty="0">
+              <a:rPr lang="en-US" sz="1600" b="1" dirty="0">
                 <a:solidFill>
                   <a:srgbClr val="1B1E27"/>
                 </a:solidFill>
@@ -10693,7 +10702,7 @@
               </a:rPr>
               <a:t>Часть 2 — иерархия каталогов</a:t>
             </a:r>
-            <a:endParaRPr lang="en-US" sz="1650" dirty="0"/>
+            <a:endParaRPr lang="en-US" sz="1600" dirty="0"/>
           </a:p>
         </p:txBody>
       </p:sp>
@@ -10720,12 +10729,12 @@
           <a:p>
             <a:pPr indent="0" marL="0">
               <a:lnSpc>
-                <a:spcPct val="128000"/>
+                <a:spcPct val="126000"/>
               </a:lnSpc>
               <a:buNone/>
             </a:pPr>
             <a:r>
-              <a:rPr lang="en-US" sz="1300" dirty="0">
+              <a:rPr lang="en-US" sz="1250" dirty="0">
                 <a:solidFill>
                   <a:srgbClr val="5B6472"/>
                 </a:solidFill>
@@ -10733,9 +10742,9 @@
                 <a:ea typeface="Calibri" pitchFamily="34" charset="-122"/>
                 <a:cs typeface="Calibri" pitchFamily="34" charset="-120"/>
               </a:rPr>
-              <a:t>Сегодня доступ к документам делится по целой коллекции. Внутри одной темы разная чувствительность данных выразить нельзя — только дробить на новые, никак не связанные коллекции.</a:t>
-            </a:r>
-            <a:endParaRPr lang="en-US" sz="1300" dirty="0"/>
+              <a:t>Сегодня доступ к документам делится по целой коллекции — внутри одной темы разную чувствительность данных не выразить. У нас есть проработанная модель дерева каталогов, которую мы предлагаем двигать в реализацию.</a:t>
+            </a:r>
+            <a:endParaRPr lang="en-US" sz="1250" dirty="0"/>
           </a:p>
         </p:txBody>
       </p:sp>
@@ -10838,7 +10847,7 @@
               <a:buNone/>
             </a:pPr>
             <a:r>
-              <a:rPr lang="en-US" sz="1250" dirty="0">
+              <a:rPr lang="en-US" sz="1200" dirty="0">
                 <a:solidFill>
                   <a:srgbClr val="1B1E27"/>
                 </a:solidFill>
@@ -10846,7 +10855,7 @@
                 <a:ea typeface="Calibri" pitchFamily="34" charset="-122"/>
                 <a:cs typeface="Calibri" pitchFamily="34" charset="-120"/>
               </a:rPr>
-              <a:t>Обе темы уже зафиксированы как вопросы к вендору в </a:t>
+              <a:t>Обе позиции уже зафиксированы в </a:t>
             </a:r>
             <a:pPr indent="0" marL="0">
               <a:lnSpc>
@@ -10855,7 +10864,7 @@
               <a:buNone/>
             </a:pPr>
             <a:r>
-              <a:rPr lang="en-US" sz="1250" b="1" dirty="0">
+              <a:rPr lang="en-US" sz="1200" b="1" dirty="0">
                 <a:solidFill>
                   <a:srgbClr val="1E4FB8"/>
                 </a:solidFill>
@@ -10872,7 +10881,7 @@
               <a:buNone/>
             </a:pPr>
             <a:r>
-              <a:rPr lang="en-US" sz="1250" dirty="0">
+              <a:rPr lang="en-US" sz="1200" dirty="0">
                 <a:solidFill>
                   <a:srgbClr val="1B1E27"/>
                 </a:solidFill>
@@ -10880,9 +10889,9 @@
                 <a:ea typeface="Calibri" pitchFamily="34" charset="-122"/>
                 <a:cs typeface="Calibri" pitchFamily="34" charset="-120"/>
               </a:rPr>
-              <a:t> — этот файл — источник фактов для всей колоды и живой документ, куда лягут ответы.</a:t>
-            </a:r>
-            <a:endParaRPr lang="en-US" sz="1250" dirty="0"/>
+              <a:t> — Часть 1 как открытый вопрос вендору, Часть 2 как предложение к обсуждению; файл остаётся живым документом, куда лягут ответы и детали реализации.</a:t>
+            </a:r>
+            <a:endParaRPr lang="en-US" sz="1200" dirty="0"/>
           </a:p>
         </p:txBody>
       </p:sp>
@@ -11106,7 +11115,7 @@
         <p:spPr>
           <a:xfrm>
             <a:off x="548640" y="4114800"/>
-            <a:ext cx="8229600" cy="457200"/>
+            <a:ext cx="8686800" cy="640080"/>
           </a:xfrm>
           <a:prstGeom prst="rect">
             <a:avLst/>
@@ -11119,6 +11128,9 @@
           <a:lstStyle/>
           <a:p>
             <a:pPr indent="0" marL="0">
+              <a:lnSpc>
+                <a:spcPct val="125000"/>
+              </a:lnSpc>
               <a:buNone/>
             </a:pPr>
             <a:r>
@@ -11130,7 +11142,7 @@
                 <a:ea typeface="Calibri" pitchFamily="34" charset="-122"/>
                 <a:cs typeface="Calibri" pitchFamily="34" charset="-120"/>
               </a:rPr>
-              <a:t>Агент рабочей станции — линия «Раб. места» (РМ-1—РМ-4), Q1 2027 – H2 2027</a:t>
+              <a:t>Линия «Раб. места» (РМ-1—РМ-4) — прежде чем это станет обязательством, у нас есть сомнения в необходимости</a:t>
             </a:r>
             <a:endParaRPr lang="en-US" sz="1500" dirty="0"/>
           </a:p>
@@ -11394,12 +11406,12 @@
           <a:p>
             <a:pPr indent="0" marL="0">
               <a:lnSpc>
-                <a:spcPct val="128000"/>
+                <a:spcPct val="126000"/>
               </a:lnSpc>
               <a:buNone/>
             </a:pPr>
             <a:r>
-              <a:rPr lang="en-US" sz="1350" dirty="0">
+              <a:rPr lang="en-US" sz="1300" dirty="0">
                 <a:solidFill>
                   <a:srgbClr val="5B6472"/>
                 </a:solidFill>
@@ -11407,9 +11419,9 @@
                 <a:ea typeface="Calibri" pitchFamily="34" charset="-122"/>
                 <a:cs typeface="Calibri" pitchFamily="34" charset="-120"/>
               </a:rPr>
-              <a:t>Сегодня платформа обрабатывает данные только на сервере. Дорожная карта добавляет агент, который выполняется прямо на компьютере сотрудника (Windows, macOS) и читает локальные файлы этой машины как контекст запроса.</a:t>
-            </a:r>
-            <a:endParaRPr lang="en-US" sz="1350" dirty="0"/>
+              <a:t>Сегодня платформа обрабатывает данные только на сервере. Дорожная карта добавляет агент, который выполняется прямо на компьютере сотрудника (Windows, macOS) и читает локальные файлы этой машины как контекст запроса — именно здесь у нас есть сомнения, нужно ли это расширение в заявленном виде (подробнее — на следующих слайдах).</a:t>
+            </a:r>
+            <a:endParaRPr lang="en-US" sz="1300" dirty="0"/>
           </a:p>
         </p:txBody>
       </p:sp>
@@ -12429,7 +12441,7 @@
                 <a:ea typeface="Calibri" pitchFamily="34" charset="-122"/>
                 <a:cs typeface="Calibri" pitchFamily="34" charset="-120"/>
               </a:rPr>
-              <a:t>РМ-1 и РМ-2 идут в один квартал (Q1 2027) не случайно — установка и служба чтения запускаются вместе. РМ-4 — уровень D, честно заявленная заглушка без состава.</a:t>
+              <a:t>РМ-1 — то, где сосредоточены наши сомнения (следующий слайд). РМ-2 идёт с ним в один квартал технически, но сам по себе вопросов не поднимает. РМ-4 — уровень D, честно заявленная заглушка без состава.</a:t>
             </a:r>
             <a:endParaRPr lang="en-US" sz="1150" dirty="0"/>
           </a:p>
@@ -12612,7 +12624,7 @@
               <a:buNone/>
             </a:pPr>
             <a:r>
-              <a:rPr lang="en-US" sz="2900" b="1" dirty="0">
+              <a:rPr lang="en-US" sz="2700" b="1" dirty="0">
                 <a:solidFill>
                   <a:srgbClr val="1B1E27"/>
                 </a:solidFill>
@@ -12620,9 +12632,9 @@
                 <a:ea typeface="Cambria" pitchFamily="34" charset="-122"/>
                 <a:cs typeface="Cambria" pitchFamily="34" charset="-120"/>
               </a:rPr>
-              <a:t>РМ-1 определяет, что нельзя читать. Что с тем, что можно, — предстоит уточнить</a:t>
-            </a:r>
-            <a:endParaRPr lang="en-US" sz="2900" dirty="0"/>
+              <a:t>Что нужно узнать, чтобы сомнение по РМ-1 снялось</a:t>
+            </a:r>
+            <a:endParaRPr lang="en-US" sz="2700" dirty="0"/>
           </a:p>
         </p:txBody>
       </p:sp>
@@ -12634,8 +12646,8 @@
         </p:nvSpPr>
         <p:spPr>
           <a:xfrm>
-            <a:off x="548640" y="1517904"/>
-            <a:ext cx="11094415" cy="548640"/>
+            <a:off x="548640" y="1691640"/>
+            <a:ext cx="11094415" cy="502920"/>
           </a:xfrm>
           <a:prstGeom prst="rect">
             <a:avLst/>
@@ -12649,12 +12661,12 @@
           <a:p>
             <a:pPr indent="0" marL="0">
               <a:lnSpc>
-                <a:spcPct val="126000"/>
+                <a:spcPct val="122000"/>
               </a:lnSpc>
               <a:buNone/>
             </a:pPr>
             <a:r>
-              <a:rPr lang="en-US" sz="1350" dirty="0">
+              <a:rPr lang="en-US" sz="1250" dirty="0">
                 <a:solidFill>
                   <a:srgbClr val="5B6472"/>
                 </a:solidFill>
@@ -12662,9 +12674,9 @@
                 <a:ea typeface="Calibri" pitchFamily="34" charset="-122"/>
                 <a:cs typeface="Calibri" pitchFamily="34" charset="-120"/>
               </a:rPr>
-              <a:t>«Явная модель запретов» РМ-1 задаёт, какие папки и файлы агенту трогать нельзя. Судьба содержимого разрешённых файлов на пути к LLM не описана. Четыре уточняющих вопроса вендору:</a:t>
-            </a:r>
-            <a:endParaRPr lang="en-US" sz="1350" dirty="0"/>
+              <a:t>«Явная модель запретов» РМ-1 задаёт, какие папки и файлы агенту трогать нельзя, но не описывает, что происходит с содержимым разрешённых файлов на пути к LLM. Наше сомнение в необходимости РМ-1 в текущем виде снимается или подтверждается четырьмя ответами вендора:</a:t>
+            </a:r>
+            <a:endParaRPr lang="en-US" sz="1250" dirty="0"/>
           </a:p>
         </p:txBody>
       </p:sp>
@@ -12676,12 +12688,12 @@
         </p:nvSpPr>
         <p:spPr>
           <a:xfrm>
-            <a:off x="548640" y="2212848"/>
-            <a:ext cx="5257800" cy="1691640"/>
+            <a:off x="548640" y="2331720"/>
+            <a:ext cx="5257800" cy="1627632"/>
           </a:xfrm>
           <a:prstGeom prst="roundRect">
             <a:avLst>
-              <a:gd name="adj" fmla="val 4865"/>
+              <a:gd name="adj" fmla="val 5056"/>
             </a:avLst>
           </a:prstGeom>
           <a:solidFill>
@@ -12710,7 +12722,7 @@
         </p:nvSpPr>
         <p:spPr>
           <a:xfrm>
-            <a:off x="804672" y="2450592"/>
+            <a:off x="804672" y="2569464"/>
             <a:ext cx="384048" cy="384048"/>
           </a:xfrm>
           <a:prstGeom prst="roundRect">
@@ -12732,7 +12744,7 @@
         </p:nvSpPr>
         <p:spPr>
           <a:xfrm>
-            <a:off x="850392" y="2450592"/>
+            <a:off x="850392" y="2569464"/>
             <a:ext cx="292608" cy="384048"/>
           </a:xfrm>
           <a:prstGeom prst="rect">
@@ -12771,7 +12783,7 @@
         </p:nvSpPr>
         <p:spPr>
           <a:xfrm>
-            <a:off x="5029200" y="2377440"/>
+            <a:off x="5029200" y="2496312"/>
             <a:ext cx="548640" cy="548640"/>
           </a:xfrm>
           <a:prstGeom prst="ellipse">
@@ -12799,7 +12811,7 @@
         </p:blipFill>
         <p:spPr>
           <a:xfrm>
-            <a:off x="5160874" y="2509114"/>
+            <a:off x="5160874" y="2627986"/>
             <a:ext cx="285293" cy="285293"/>
           </a:xfrm>
           <a:prstGeom prst="rect">
@@ -12815,7 +12827,7 @@
         </p:nvSpPr>
         <p:spPr>
           <a:xfrm>
-            <a:off x="1325880" y="2395728"/>
+            <a:off x="1325880" y="2514600"/>
             <a:ext cx="3886200" cy="365760"/>
           </a:xfrm>
           <a:prstGeom prst="rect">
@@ -12854,8 +12866,8 @@
         </p:nvSpPr>
         <p:spPr>
           <a:xfrm>
-            <a:off x="804672" y="2889504"/>
-            <a:ext cx="4745736" cy="868680"/>
+            <a:off x="804672" y="3008376"/>
+            <a:ext cx="4745736" cy="804672"/>
           </a:xfrm>
           <a:prstGeom prst="rect">
             <a:avLst/>
@@ -12896,12 +12908,12 @@
         </p:nvSpPr>
         <p:spPr>
           <a:xfrm>
-            <a:off x="6217920" y="2212848"/>
-            <a:ext cx="5257800" cy="1691640"/>
+            <a:off x="6217920" y="2331720"/>
+            <a:ext cx="5257800" cy="1627632"/>
           </a:xfrm>
           <a:prstGeom prst="roundRect">
             <a:avLst>
-              <a:gd name="adj" fmla="val 4865"/>
+              <a:gd name="adj" fmla="val 5056"/>
             </a:avLst>
           </a:prstGeom>
           <a:solidFill>
@@ -12930,7 +12942,7 @@
         </p:nvSpPr>
         <p:spPr>
           <a:xfrm>
-            <a:off x="6473952" y="2450592"/>
+            <a:off x="6473952" y="2569464"/>
             <a:ext cx="384048" cy="384048"/>
           </a:xfrm>
           <a:prstGeom prst="roundRect">
@@ -12952,7 +12964,7 @@
         </p:nvSpPr>
         <p:spPr>
           <a:xfrm>
-            <a:off x="6519672" y="2450592"/>
+            <a:off x="6519672" y="2569464"/>
             <a:ext cx="292608" cy="384048"/>
           </a:xfrm>
           <a:prstGeom prst="rect">
@@ -12991,7 +13003,7 @@
         </p:nvSpPr>
         <p:spPr>
           <a:xfrm>
-            <a:off x="10698480" y="2377440"/>
+            <a:off x="10698480" y="2496312"/>
             <a:ext cx="548640" cy="548640"/>
           </a:xfrm>
           <a:prstGeom prst="ellipse">
@@ -13019,7 +13031,7 @@
         </p:blipFill>
         <p:spPr>
           <a:xfrm>
-            <a:off x="10830154" y="2509114"/>
+            <a:off x="10830154" y="2627986"/>
             <a:ext cx="285293" cy="285293"/>
           </a:xfrm>
           <a:prstGeom prst="rect">
@@ -13035,7 +13047,7 @@
         </p:nvSpPr>
         <p:spPr>
           <a:xfrm>
-            <a:off x="6995160" y="2395728"/>
+            <a:off x="6995160" y="2514600"/>
             <a:ext cx="3886200" cy="365760"/>
           </a:xfrm>
           <a:prstGeom prst="rect">
@@ -13074,8 +13086,8 @@
         </p:nvSpPr>
         <p:spPr>
           <a:xfrm>
-            <a:off x="6473952" y="2889504"/>
-            <a:ext cx="4745736" cy="868680"/>
+            <a:off x="6473952" y="3008376"/>
+            <a:ext cx="4745736" cy="804672"/>
           </a:xfrm>
           <a:prstGeom prst="rect">
             <a:avLst/>
@@ -13116,12 +13128,12 @@
         </p:nvSpPr>
         <p:spPr>
           <a:xfrm>
-            <a:off x="548640" y="4133088"/>
-            <a:ext cx="5257800" cy="1691640"/>
+            <a:off x="548640" y="4187952"/>
+            <a:ext cx="5257800" cy="1627632"/>
           </a:xfrm>
           <a:prstGeom prst="roundRect">
             <a:avLst>
-              <a:gd name="adj" fmla="val 4865"/>
+              <a:gd name="adj" fmla="val 5056"/>
             </a:avLst>
           </a:prstGeom>
           <a:solidFill>
@@ -13150,7 +13162,7 @@
         </p:nvSpPr>
         <p:spPr>
           <a:xfrm>
-            <a:off x="804672" y="4370832"/>
+            <a:off x="804672" y="4425696"/>
             <a:ext cx="384048" cy="384048"/>
           </a:xfrm>
           <a:prstGeom prst="roundRect">
@@ -13172,7 +13184,7 @@
         </p:nvSpPr>
         <p:spPr>
           <a:xfrm>
-            <a:off x="850392" y="4370832"/>
+            <a:off x="850392" y="4425696"/>
             <a:ext cx="292608" cy="384048"/>
           </a:xfrm>
           <a:prstGeom prst="rect">
@@ -13211,7 +13223,7 @@
         </p:nvSpPr>
         <p:spPr>
           <a:xfrm>
-            <a:off x="5029200" y="4297680"/>
+            <a:off x="5029200" y="4352544"/>
             <a:ext cx="548640" cy="548640"/>
           </a:xfrm>
           <a:prstGeom prst="ellipse">
@@ -13239,7 +13251,7 @@
         </p:blipFill>
         <p:spPr>
           <a:xfrm>
-            <a:off x="5160874" y="4429354"/>
+            <a:off x="5160874" y="4484218"/>
             <a:ext cx="285293" cy="285293"/>
           </a:xfrm>
           <a:prstGeom prst="rect">
@@ -13255,7 +13267,7 @@
         </p:nvSpPr>
         <p:spPr>
           <a:xfrm>
-            <a:off x="1325880" y="4315968"/>
+            <a:off x="1325880" y="4370832"/>
             <a:ext cx="3886200" cy="365760"/>
           </a:xfrm>
           <a:prstGeom prst="rect">
@@ -13294,8 +13306,8 @@
         </p:nvSpPr>
         <p:spPr>
           <a:xfrm>
-            <a:off x="804672" y="4809744"/>
-            <a:ext cx="4745736" cy="868680"/>
+            <a:off x="804672" y="4864608"/>
+            <a:ext cx="4745736" cy="804672"/>
           </a:xfrm>
           <a:prstGeom prst="rect">
             <a:avLst/>
@@ -13336,12 +13348,12 @@
         </p:nvSpPr>
         <p:spPr>
           <a:xfrm>
-            <a:off x="6217920" y="4133088"/>
-            <a:ext cx="5257800" cy="1691640"/>
+            <a:off x="6217920" y="4187952"/>
+            <a:ext cx="5257800" cy="1627632"/>
           </a:xfrm>
           <a:prstGeom prst="roundRect">
             <a:avLst>
-              <a:gd name="adj" fmla="val 4865"/>
+              <a:gd name="adj" fmla="val 5056"/>
             </a:avLst>
           </a:prstGeom>
           <a:solidFill>
@@ -13370,7 +13382,7 @@
         </p:nvSpPr>
         <p:spPr>
           <a:xfrm>
-            <a:off x="6473952" y="4370832"/>
+            <a:off x="6473952" y="4425696"/>
             <a:ext cx="384048" cy="384048"/>
           </a:xfrm>
           <a:prstGeom prst="roundRect">
@@ -13392,7 +13404,7 @@
         </p:nvSpPr>
         <p:spPr>
           <a:xfrm>
-            <a:off x="6519672" y="4370832"/>
+            <a:off x="6519672" y="4425696"/>
             <a:ext cx="292608" cy="384048"/>
           </a:xfrm>
           <a:prstGeom prst="rect">
@@ -13431,7 +13443,7 @@
         </p:nvSpPr>
         <p:spPr>
           <a:xfrm>
-            <a:off x="10698480" y="4297680"/>
+            <a:off x="10698480" y="4352544"/>
             <a:ext cx="548640" cy="548640"/>
           </a:xfrm>
           <a:prstGeom prst="ellipse">
@@ -13459,7 +13471,7 @@
         </p:blipFill>
         <p:spPr>
           <a:xfrm>
-            <a:off x="10830154" y="4429354"/>
+            <a:off x="10830154" y="4484218"/>
             <a:ext cx="285293" cy="285293"/>
           </a:xfrm>
           <a:prstGeom prst="rect">
@@ -13475,7 +13487,7 @@
         </p:nvSpPr>
         <p:spPr>
           <a:xfrm>
-            <a:off x="6995160" y="4315968"/>
+            <a:off x="6995160" y="4370832"/>
             <a:ext cx="3886200" cy="365760"/>
           </a:xfrm>
           <a:prstGeom prst="rect">
@@ -13514,8 +13526,8 @@
         </p:nvSpPr>
         <p:spPr>
           <a:xfrm>
-            <a:off x="6473952" y="4809744"/>
-            <a:ext cx="4745736" cy="868680"/>
+            <a:off x="6473952" y="4864608"/>
+            <a:ext cx="4745736" cy="804672"/>
           </a:xfrm>
           <a:prstGeom prst="rect">
             <a:avLst/>
@@ -13691,7 +13703,7 @@
                 <a:ea typeface="Calibri" pitchFamily="34" charset="-122"/>
                 <a:cs typeface="Calibri" pitchFamily="34" charset="-120"/>
               </a:rPr>
-              <a:t>ЧАСТЬ 1 · ПОЧЕМУ ЭТО ВАЖНО</a:t>
+              <a:t>ЧАСТЬ 1 · ПОЧЕМУ ОСТАЮТСЯ СОМНЕНИЯ</a:t>
             </a:r>
             <a:endParaRPr lang="en-US" sz="1150" dirty="0"/>
           </a:p>
@@ -13725,7 +13737,7 @@
               <a:buNone/>
             </a:pPr>
             <a:r>
-              <a:rPr lang="en-US" sz="2900" b="1" dirty="0">
+              <a:rPr lang="en-US" sz="2700" b="1" dirty="0">
                 <a:solidFill>
                   <a:srgbClr val="1B1E27"/>
                 </a:solidFill>
@@ -13733,9 +13745,9 @@
                 <a:ea typeface="Cambria" pitchFamily="34" charset="-122"/>
                 <a:cs typeface="Cambria" pitchFamily="34" charset="-120"/>
               </a:rPr>
-              <a:t>Единственный пункт всей дорожной карты с явным потенциальным пробелом в безопасности</a:t>
-            </a:r>
-            <a:endParaRPr lang="en-US" sz="2900" dirty="0"/>
+              <a:t>Единственный пункт дорожной карты, где защита данных пока не описана</a:t>
+            </a:r>
+            <a:endParaRPr lang="en-US" sz="2700" dirty="0"/>
           </a:p>
         </p:txBody>
       </p:sp>
@@ -13843,7 +13855,7 @@
                 <a:ea typeface="Calibri" pitchFamily="34" charset="-122"/>
                 <a:cs typeface="Calibri" pitchFamily="34" charset="-120"/>
               </a:rPr>
-              <a:t>пунктов дорожной карты — с очевидным потенциальным пробелом в защите данных</a:t>
+              <a:t>пунктов дорожной карты — с пока не описанной защитой данных</a:t>
             </a:r>
             <a:endParaRPr lang="en-US" sz="1300" dirty="0"/>
           </a:p>
@@ -13858,7 +13870,7 @@
         <p:spPr>
           <a:xfrm>
             <a:off x="4297680" y="1691640"/>
-            <a:ext cx="7345375" cy="914400"/>
+            <a:ext cx="7345375" cy="1051560"/>
           </a:xfrm>
           <a:prstGeom prst="rect">
             <a:avLst/>
@@ -13872,12 +13884,12 @@
           <a:p>
             <a:pPr indent="0" marL="0">
               <a:lnSpc>
-                <a:spcPct val="128000"/>
+                <a:spcPct val="126000"/>
               </a:lnSpc>
               <a:buNone/>
             </a:pPr>
             <a:r>
-              <a:rPr lang="en-US" sz="1350" dirty="0">
+              <a:rPr lang="en-US" sz="1250" dirty="0">
                 <a:solidFill>
                   <a:srgbClr val="1B1E27"/>
                 </a:solidFill>
@@ -13885,9 +13897,9 @@
                 <a:ea typeface="Calibri" pitchFamily="34" charset="-122"/>
                 <a:cs typeface="Calibri" pitchFamily="34" charset="-120"/>
               </a:rPr>
-              <a:t>Если маскирование не гарантировано архитектурно для локально читаемых файлов, агент рабочей станции становится новым каналом утечки — в обход периметра AI Guard, выстроенного для серверной части.</a:t>
-            </a:r>
-            <a:endParaRPr lang="en-US" sz="1350" dirty="0"/>
+              <a:t>Если маскирование архитектурно не распространяется на локально читаемые файлы, агент рабочей станции рискует стать новым каналом в обход периметра AI Guard, выстроенного для серверной части. Это и есть та неопределённость, из-за которой у нас остаются сомнения в необходимости РМ-1 в текущем виде.</a:t>
+            </a:r>
+            <a:endParaRPr lang="en-US" sz="1250" dirty="0"/>
           </a:p>
         </p:txBody>
       </p:sp>
@@ -14147,12 +14159,12 @@
           <a:p>
             <a:pPr indent="0" marL="0">
               <a:lnSpc>
-                <a:spcPct val="125000"/>
+                <a:spcPct val="122000"/>
               </a:lnSpc>
               <a:buNone/>
             </a:pPr>
             <a:r>
-              <a:rPr lang="en-US" sz="1250" i="1" dirty="0">
+              <a:rPr lang="en-US" sz="1200" i="1" dirty="0">
                 <a:solidFill>
                   <a:srgbClr val="5B6472"/>
                 </a:solidFill>
@@ -14160,9 +14172,9 @@
                 <a:ea typeface="Calibri" pitchFamily="34" charset="-122"/>
                 <a:cs typeface="Calibri" pitchFamily="34" charset="-120"/>
               </a:rPr>
-              <a:t>Статус: вопрос сформулирован в case-11 и ждёт ответа вендора. Уровень C у РМ-1/РМ-2 означает подтверждённое направление, но не обязательство по срокам — задать вопрос стоит до того, как оба пункта закрепятся в договоре, а не после.</a:t>
-            </a:r>
-            <a:endParaRPr lang="en-US" sz="1250" dirty="0"/>
+              <a:t>Статус: это не рекомендация отказаться от РМ-1 — необходимость этого расширения в заявленном виде для нас пока не доказана, и ответы вендора на предыдущем слайде её снимут или подтвердят. Уровень C означает подтверждённое направление, но не обязательство по срокам — самое время спросить, пока пункт не закрепился в договоре.</a:t>
+            </a:r>
+            <a:endParaRPr lang="en-US" sz="1200" dirty="0"/>
           </a:p>
         </p:txBody>
       </p:sp>
@@ -14413,7 +14425,7 @@
                 <a:ea typeface="Calibri" pitchFamily="34" charset="-122"/>
                 <a:cs typeface="Calibri" pitchFamily="34" charset="-120"/>
               </a:rPr>
-              <a:t>Гранулярный доступ к документам — предложение для дорожной карты, не найденный дефект</a:t>
+              <a:t>Гранулярный доступ к документам — готовое предложение к реализации, а не открытый вопрос без ответа</a:t>
             </a:r>
             <a:endParaRPr lang="en-US" sz="1500" dirty="0"/>
           </a:p>
@@ -15476,7 +15488,7 @@
                 <a:ea typeface="Calibri" pitchFamily="34" charset="-122"/>
                 <a:cs typeface="Calibri" pitchFamily="34" charset="-120"/>
               </a:rPr>
-              <a:t>ЧАСТЬ 2 · ГДЕ НЕ ХВАТАЕТ</a:t>
+              <a:t>ЧАСТЬ 2 · ГДЕ НУЖНО РЕШЕНИЕ</a:t>
             </a:r>
             <a:endParaRPr lang="en-US" sz="1150" dirty="0"/>
           </a:p>

--- a/docs/presentations/case-17-lokalny-chat-i-ierarhiya-katalogov.pptx
+++ b/docs/presentations/case-17-lokalny-chat-i-ierarhiya-katalogov.pptx
@@ -519,7 +519,7 @@
           <a:p>
             <a:r>
               <a:rPr lang="en-US" dirty="0"/>
-              <a:t>Титульный слайд. Обе темы этой колоды — не готовые функции платформы, а вопросы и предложения, которые команда планирует поднять на ближайшем разговоре с вендором «Камераты» по дорожной карте. Полный текст обоих вопросов уже зафиксирован в docs/analysis/case-11-voprosy-vendoru-roadmap.md — эта колода делает их презентационно понятными коллеге, который не читал исходники.</a:t>
+              <a:t>Титульный слайд. Обе темы этой колоды — не готовые функции платформы, а находки и предложения, которые я как аналитик планирую поднять на ближайшем разговоре с разработчиком «Камераты» по дорожной карте. Полный текст обоих вопросов уже зафиксирован во внутренних материалах для разработчика — эта колода делает их презентационно понятными коллеге, который не читал исходники.</a:t>
             </a:r>
             <a:endParaRPr lang="en-US" dirty="0"/>
           </a:p>
@@ -607,7 +607,7 @@
           <a:p>
             <a:r>
               <a:rPr lang="en-US" dirty="0"/>
-              <a:t>Самая важная диаграмма всей колоды, обновлена после переименования примера (см. слайд-заметки о коллизии с зарезервированными именами доменов платформы «Логистика»/«Персонал»/«Продажи» — kamerata-overview-review.md, строки 118/452/968 — новый пример использует «Отдел маркетинга», «Юридический отдел», «Бухгалтерия»). Домен «Кадры» — корень. Три независимые ветки первого уровня: «Общее» (видна персоне «Сотрудник», делится на «Больничные»/«Отпускные»), «Оклады» (делится по отделам — маркетинг, юротдел, бухгалтерия) и «Личные дела» (третья, отдельная ветка — не потомок ни «Общее», ни «Оклады» — с ещё более узким подузлом «Топ-менеджмент», демонстрирующим, что дерево не ограничено двумя уровнями). Директор по персоналу привязан к корню и наследует всё дерево — это не частная удобная деталь примера, а закреплённый во всех проверенных аналогах инвариант корня (case-19, §4.3: в Purview права default-домена в принципе нельзя ограничить).</a:t>
+              <a:t>Самая важная диаграмма всей колоды, обновлена после переименования примера (коллизия с зарезервированными именами доменов платформы «Логистика»/«Персонал»/«Продажи», уже встречающимися в документации платформы как примеры доменов, — новый пример использует «Отдел маркетинга», «Юридический отдел», «Бухгалтерия»). Домен «Кадры» — корень. Три независимые ветки первого уровня: «Общее» (видна персоне «Сотрудник», делится на «Больничные»/«Отпускные»), «Оклады» (делится по отделам — маркетинг, юротдел, бухгалтерия) и «Личные дела» (третья, отдельная ветка — не потомок ни «Общее», ни «Оклады» — с ещё более узким подузлом «Топ-менеджмент», демонстрирующим, что дерево не ограничено двумя уровнями). Директор по персоналу привязан к корню и наследует всё дерево — это не частная удобная деталь примера, а закреплённый во всех проверенных индустриальных аналогах инвариант корня (в Microsoft Purview права default-домена в принципе нельзя ограничить).</a:t>
             </a:r>
             <a:endParaRPr lang="en-US" dirty="0"/>
           </a:p>
@@ -695,7 +695,7 @@
           <a:p>
             <a:r>
               <a:rPr lang="en-US" dirty="0"/>
-              <a:t>Новый слайд — прямой ответ на замечание пользователя после просмотра дерева: каталог может по смыслу принадлежать больше чем одному домену. Точная формулировка, которую важно не смазать: это НЕ исключение из правила «видимость течёт только вниз» — правило продолжает действовать независимо и полностью внутри каждого домена (персона на корне «Кадры» видит «Список сотрудников» по обычному нисходящему наследованию, точно так же персона в «Продажи»). Новое — только то, что один и тот же узел может быть нисходяще достижимым сразу в двух разных деревьях одновременно, то есть иметь двух родителей, а не одного. Это зеркальный случай вопросу 4 из case-11 (там — доступ персоны к нескольким несмежным узлам ОДНОГО домена; здесь — членство каталога сразу в НЕСКОЛЬКИХ доменах) и прямая иллюстрация вывода case-19 §5: ни одна из проверенных зрелых систем (SharePoint, Google Drive, Purview, Databricks) не обошлась без отдельного механизма для похожего кросс-веточного/кросс-доменного случая. Это не повод сомневаться в самом предложении дерева — это конкретная реализационная деталь, которую честнее поднять сейчас и решить вместе с вендором, чем сделать вид, что её не существует.</a:t>
+              <a:t>Новый слайд — прямой ответ на замечание пользователя после просмотра дерева: каталог может по смыслу принадлежать больше чем одному домену. Точная формулировка, которую важно не смазать: это НЕ исключение из правила «видимость течёт только вниз» — правило продолжает действовать независимо и полностью внутри каждого домена (персона на корне «Кадры» видит «Список сотрудников» по обычному нисходящему наследованию, точно так же персона в «Продажи»). Новое — только то, что один и тот же узел может быть нисходяще достижимым сразу в двух разных деревьях одновременно, то есть иметь двух родителей, а не одного. Это зеркальный случай моему вопросу к разработчику о доступе персоны к нескольким несмежным узлам ОДНОГО домена — здесь, наоборот, членство каталога сразу в НЕСКОЛЬКИХ доменах — и прямая иллюстрация вывода моего исследования прецедентов: ни одна из проверенных зрелых систем (SharePoint, Google Drive, Purview, Databricks) не обошлась без отдельного механизма для похожего кросс-веточного/кросс-доменного случая. Это не повод сомневаться в самом предложении дерева — это конкретная реализационная деталь, которую честнее поднять сейчас и решить вместе с разработчиком, чем сделать вид, что её не существует.</a:t>
             </a:r>
             <a:endParaRPr lang="en-US" dirty="0"/>
           </a:p>
@@ -783,7 +783,7 @@
           <a:p>
             <a:r>
               <a:rPr lang="en-US" dirty="0"/>
-              <a:t>Формулировка правила дословно из case-11: «видимость течёт вниз по дереву от узла привязки, вбок и вверх — не течёт». Схема показывает все три направления сразу: вниз (потомки) — разрешено сплошной зелёной линией, вверх (предки) и вбок (соседние ветки) — запрещено, показано пунктирной красной линией. Это правило целиком заменяет собой сегодняшнюю бинарную модель «у коллекции есть домен / домена нет».</a:t>
+              <a:t>Формулировка правила дословно из моего предложения разработчику: «видимость течёт вниз по дереву от узла привязки, вбок и вверх — не течёт». Схема показывает все три направления сразу: вниз (потомки) — разрешено сплошной зелёной линией, вверх (предки) и вбок (соседние ветки) — запрещено, показано пунктирной красной линией. Это правило целиком заменяет собой сегодняшнюю бинарную модель «у коллекции есть домен / домена нет».</a:t>
             </a:r>
             <a:endParaRPr lang="en-US" dirty="0"/>
           </a:p>
@@ -871,7 +871,7 @@
           <a:p>
             <a:r>
               <a:rPr lang="en-US" dirty="0"/>
-              <a:t>Три строки — три персоны на переименованном дереве «Кадры» (переименовано после коллизии с зарезервированными платформенными именами доменов «Логистика»/«Персонал»/«Продажи», см. заметки к слайду с деревом). Средняя строка — исправленный после критики case-20 составной пример: «Начальник отдела маркетинга» — не единственная персона, привязанная к одному узлу, а явная множественная привязка сразу к двум узлам («Общее» и «Оклады/Отдел маркетинга»). Это прямое продолжение того, как многодоменность уже работает сегодня без всякого дерева («выбрать домен(ы) из списка» — множественное число, instrukciya-domeny-i-dostup.md), а не костыль поверх дерева. Директор по персоналу — на корне, поэтому видит всё дерево автоматически; это задокументированный во всех проверенных аналогах инвариант корня (case-19, §4.3), а не удобная деталь примера.</a:t>
+              <a:t>Три строки — три персоны на переименованном дереве «Кадры» (переименовано после коллизии с зарезервированными платформенными именами доменов «Логистика»/«Персонал»/«Продажи», см. заметки к слайду с деревом). Средняя строка — исправленный после внутренней критики составной пример: «Начальник отдела маркетинга» — не единственная персона, привязанная к одному узлу, а явная множественная привязка сразу к двум узлам («Общее» и «Оклады/Отдел маркетинга»). Это прямое продолжение того, как многодоменность уже работает сегодня без всякого дерева (в рабочей инструкции платформы — «выбрать домен(ы) из списка», множественное число), а не костыль поверх дерева. Директор по персоналу — на корне, поэтому видит всё дерево автоматически; это задокументированный во всех проверенных индустриальных аналогах инвариант корня, а не удобная деталь примера.</a:t>
             </a:r>
             <a:endParaRPr lang="en-US" dirty="0"/>
           </a:p>
@@ -959,7 +959,7 @@
           <a:p>
             <a:r>
               <a:rPr lang="en-US" dirty="0"/>
-              <a:t>Обновлено по итогам case-19/case-20: раньше средний пункт был непроверенным утверждением «давно стандартно в DMS/DAM-системах» без единого названного продукта (справедливо раскритиковано в case-20, §3). Теперь — конкретные, названные прецеденты из case-19: Microsoft Purview (самый близкий — есть буквально функция «Restrict inherited permissions» и тот же инвариант «корень нельзя ограничить»), Google Drive («Limited access»/«Expansive access»), SharePoint («break inheritance»), Databricks Unity Catalog (наследование по catalog.schema.table). Первый пункт также уточнён: предложение решает 2b (организация доменов), а не 2a (гранулярность внутри документа) — это два разных вопроса вендору, разница объяснена на предыдущем слайде. Это опора для уверенного тона части 2: мы предлагаем не гипотезу, а модель, чьё поведение по умолчанию уже проверено в нескольких независимо развивавшихся системах.</a:t>
+              <a:t>Обновлено по итогам внутренней критики и исследования прецедентов: раньше средний пункт был непроверенным утверждением «давно стандартно в DMS/DAM-системах» без единого названного продукта (справедливо раскритиковано внутри команды). Теперь — конкретные, названные прецеденты: Microsoft Purview (самый близкий — есть буквально функция «Restrict inherited permissions» и тот же инвариант «корень нельзя ограничить»), Google Drive («Limited access»/«Expansive access»), SharePoint («break inheritance»), Databricks Unity Catalog (наследование по catalog.schema.table). Первый пункт также уточнён: предложение решает 2b (организация доменов), а не 2a (гранулярность внутри документа) — это два разных вопроса к разработчику, разница объяснена на предыдущем слайде. Это опора для уверенного тона части 2: я предлагаю разработчику не гипотезу, а модель, чьё поведение по умолчанию уже проверено в нескольких независимо развивавшихся системах.</a:t>
             </a:r>
             <a:endParaRPr lang="en-US" dirty="0"/>
           </a:p>
@@ -1135,7 +1135,7 @@
           <a:p>
             <a:r>
               <a:rPr lang="en-US" dirty="0"/>
-              <a:t>Формулировка статуса намеренная и увереннее, чем раньше: это готовое предложение к реализации, поданное вендору как модель, которую мы предлагаем включить в дорожную карту, а не жалоба на текущую функциональность и не гипотеза для обсуждения «стоит ли вообще». Открытые детали (двойное членство каталогов, реструктуризация дерева, множественная привязка персон) остаются реальными и честно названы на предыдущих слайдах — но как то, что дорабатывается вместе с вендором в процессе реализации, а не как причины сомневаться в самом предложении. В case-11 пункт явно не привязан к конкретному коду роадмапа — предполагаем линию «Каталог» (КАТ-) или «Надзор» (НАД-) как наиболее вероятных кандидатов.</a:t>
+              <a:t>Формулировка статуса намеренная и увереннее, чем раньше: это готовое предложение к реализации, которое я как аналитик приношу разработчику как модель, предлагаемую в дорожную карту, а не жалоба на текущую функциональность и не гипотеза для обсуждения «стоит ли вообще». Открытые детали (двойное членство каталогов, реструктуризация дерева, множественная привязка персон) остаются реальными и честно названы на предыдущих слайдах — но как то, что дорабатывается вместе с разработчиком в процессе реализации, а не как причины сомневаться в самом предложении. Пункт явно не привязан к конкретному коду роадмапа — предполагаю линию «Каталог» (КАТ-) или «Надзор» (НАД-) как наиболее вероятных кандидатов.</a:t>
             </a:r>
             <a:endParaRPr lang="en-US" dirty="0"/>
           </a:p>
@@ -1223,7 +1223,7 @@
           <a:p>
             <a:r>
               <a:rPr lang="en-US" dirty="0"/>
-              <a:t>Слайд-синтез, связывающий обе части и явно называющий две разные позиции по ним: и локальный чат, и иерархия каталогов — про одну и ту же границу между тем, что платформа уже гарантирует документированно, и тем, что нужно решить по мере роста поверхности платформы. Но решаются они по-разному: Часть 1 (новое место исполнения) — это открытый вопрос вендору, наше сомнение в необходимости; Часть 2 (более тонкая гранулярность доступа) — это наше предложение к реализации, которое мы считаем готовым. Оба поднимаются заранее, пока ни один не стал контрактным обязательством.</a:t>
+              <a:t>Слайд-синтез, связывающий обе части и явно называющий две разные позиции по ним: и локальный чат, и иерархия каталогов — про одну и ту же границу между тем, что платформа уже гарантирует документированно, и тем, что нужно решить по мере роста поверхности платформы. Но решаются они по-разному: Часть 1 (новое место исполнения) — это открытый вопрос к разработчику, моё сомнение в необходимости; Часть 2 (более тонкая гранулярность доступа) — это моё предложение к реализации, которое я считаю готовым. Оба поднимаются заранее, пока ни один не стал контрактным обязательством.</a:t>
             </a:r>
             <a:endParaRPr lang="en-US" dirty="0"/>
           </a:p>
@@ -1311,7 +1311,7 @@
           <a:p>
             <a:r>
               <a:rPr lang="en-US" dirty="0"/>
-              <a:t>Закрывающий слайд, явно фиксирующий две разные позиции колоды: Часть 1 — открытый вопрос вендору о необходимости РМ-1 в заявленном виде, ответа пока нет; Часть 2 — наше предложение к реализации, которое мы считаем проработанным и готовы обсуждать детали. Единственный источник фактов для обеих тем — case-11-voprosy-vendoru-roadmap.md; он же станет местом, куда будут добавлены ответы вендора по мере их получения, и куда попадут следующие вопросы по дорожной карте по мере разбора остальных пунктов.</a:t>
+              <a:t>Закрывающий слайд, явно фиксирующий две разные позиции колоды: Часть 1 — открытый вопрос к разработчику о необходимости РМ-1 в заявленном виде, ответа пока нет; Часть 2 — моё предложение к реализации, которое я считаю проработанным и готов обсуждать детали. Единственный источник фактов для обеих тем — материалы, которые я как аналитик подготовил для разговора с разработчиком; они же станут местом, куда будут добавлены его ответы по мере их получения, и куда попадут следующие вопросы по дорожной карте по мере разбора остальных пунктов.</a:t>
             </a:r>
             <a:endParaRPr lang="en-US" dirty="0"/>
           </a:p>
@@ -1399,7 +1399,7 @@
           <a:p>
             <a:r>
               <a:rPr lang="en-US" dirty="0"/>
-              <a:t>Смысл слайда — сразу задать две разные позиции по двум темам, а не подавать обе как одинаково открытые вопросы. Часть 1 (локальный чат / агент рабочей станции, РМ-1): у нас есть сомнения, нужно ли это расширение в заявленном виде, пока не решён вопрос о защите данных на компьютере сотрудника — это диалог с вендором, а не отказ от функции. Часть 2 (иерархия каталогов): у нас есть проработанная модель (дерево каталогов), которую мы считаем достаточно зрелой, чтобы предлагать её в дорожную карту и обсуждать детали реализации, а не решать, стоит ли вообще что-то делать. Оба уже зафиксированы в пакете вопросов вендору (case-11).</a:t>
+              <a:t>Смысл слайда — сразу задать две разные позиции по двум темам, а не подавать обе как одинаково открытые вопросы. Часть 1 (локальный чат / агент рабочей станции, РМ-1): у меня как у аналитика есть сомнения, нужно ли это расширение в заявленном виде, пока не решён вопрос о защите данных на компьютере сотрудника — это диалог с разработчиком, а не отказ от функции. Часть 2 (иерархия каталогов): есть проработанная модель (дерево каталогов), которую я считаю достаточно зрелой, чтобы предлагать её в дорожную карту и обсуждать детали реализации с разработчиком, а не решать, стоит ли вообще что-то делать. Обе темы уже оформлены в материалах, которые я готовил для этого разговора с разработчиком.</a:t>
             </a:r>
             <a:endParaRPr lang="en-US" dirty="0"/>
           </a:p>
@@ -1487,7 +1487,7 @@
           <a:p>
             <a:r>
               <a:rPr lang="en-US" dirty="0"/>
-              <a:t>Раздел-разделитель. Дальше — три плотных слайда о линии «Раб. места» дорожной карты (сознательно сокращено с восьми — часть 1 не должна разворачиваться дольше, чем нужно для передачи технического запроса): что это и какие четыре пункта в неё входят, четыре вопроса вендору, ответы на которые снимут или подтвердят сомнение, и почему сомнение вообще возникло — с закрывающим статусом. Тон намеренно мягкий: это не рекомендация отказаться от РМ-1, а вопрос, который вендор может закрыть ответом.</a:t>
+              <a:t>Раздел-разделитель. Дальше — три плотных слайда о линии «Раб. места» дорожной карты (сознательно сокращено с восьми — часть 1 не должна разворачиваться дольше, чем нужно для передачи технического запроса): что это и какие четыре пункта в неё входят, четыре вопроса к разработчику, ответы на которые снимут или подтвердят сомнение, и почему сомнение вообще возникло — с закрывающим статусом. Тон намеренно мягкий: это не рекомендация отказаться от РМ-1, а вопрос, который разработчик может закрыть ответом.</a:t>
             </a:r>
             <a:endParaRPr lang="en-US" dirty="0"/>
           </a:p>
@@ -1663,7 +1663,7 @@
           <a:p>
             <a:r>
               <a:rPr lang="en-US" dirty="0"/>
-              <a:t>Все четыре формулировки — дословно из Вопроса 1 в case-11-voprosy-vendoru-roadmap.md, содержание не сокращалось и не смягчалось. Порядок сохранён: (1) применяется ли то же маскирование, (2) действует ли то же правило про внешние/облачные модели, (3) кто задаёт запреты — админ или сам пользователь, (4) единый ли журнал аудита. Это основной содержательный слайд части 1: раньше подавался как «уточняющие вопросы к уже принятому пункту», теперь — как условия, при выполнении которых наше сомнение в необходимости РМ-1 снимается. Вокруг него специально убраны декоративные слайды-подводки.</a:t>
+              <a:t>Все четыре формулировки — дословно из вопроса, который я готовлю к разработчику, содержание не сокращалось и не смягчалось. Порядок сохранён: (1) применяется ли то же маскирование, (2) действует ли то же правило про внешние/облачные модели, (3) кто задаёт запреты — админ или сам пользователь, (4) единый ли журнал аудита. Это основной содержательный слайд части 1: раньше подавался как «уточняющие вопросы к уже принятому пункту», теперь — как условия, при выполнении которых моё сомнение в необходимости РМ-1 снимается. Вокруг него специально убраны декоративные слайды-подводки.</a:t>
             </a:r>
             <a:endParaRPr lang="en-US" dirty="0"/>
           </a:p>
@@ -1751,7 +1751,7 @@
           <a:p>
             <a:r>
               <a:rPr lang="en-US" dirty="0"/>
-              <a:t>Это наша внутренняя оценка (не для передачи вендору как есть, только для собственной подготовки) — из всех 35 пунктов дорожной карты это единственный, где рядом с новой функцией явно не упомянута уже заявленная модель защиты данных, и это главная опора нашего сомнения в необходимости РМ-1 в текущем виде. Слайд объединяет аргумент «почему сомнение возникло» с закрывающим статусом части 1 — отдельного слайда-итога больше нет, статус дан одной строкой внизу: это открытый вопрос вендору, а не рекомендация отказаться от пункта; уровень C — не обязательство по срокам, так что сейчас подходящий момент спросить.</a:t>
+              <a:t>Это моя внутренняя оценка как аналитика (не для передачи разработчику как есть, только для собственной подготовки к разговору) — из всех 35 пунктов дорожной карты это единственный, где рядом с новой функцией явно не упомянута уже заявленная модель защиты данных, и это главная опора моего сомнения в необходимости РМ-1 в текущем виде. Слайд объединяет аргумент «почему сомнение возникло» с закрывающим статусом части 1 — отдельного слайда-итога больше нет, статус дан одной строкой внизу: это открытый вопрос к разработчику, а не рекомендация отказаться от пункта; уровень C — не обязательство по срокам, так что сейчас подходящий момент спросить.</a:t>
             </a:r>
             <a:endParaRPr lang="en-US" dirty="0"/>
           </a:p>
@@ -1839,7 +1839,7 @@
           <a:p>
             <a:r>
               <a:rPr lang="en-US" dirty="0"/>
-              <a:t>Раздел-разделитель. Дальше — десять слайдов: сегодняшняя плоская модель доменов/коллекций, где она упирается в реальный сценарий (с явным разделением на два разных вопроса — 2a и 2b, по пересмотру case-11/case-20), дерево каталогов как готовое предложение по 2b с ключевой диаграммой, отдельный слайд про кросс-доменное пересечение коллекций (деталь, которую доработаем вместе с вендором при реализации), правило наследования, три персоны на новом дереве, почему предложение реалистично — с прецедентами из case-19, и что остаётся в силе, пока идём к реализации. Тон части 2 — увереннее, чем части 1: это не вопрос «стоит ли», а предложение «вот модель, готовы прорабатывать детали».</a:t>
+              <a:t>Раздел-разделитель. Дальше — десять слайдов: сегодняшняя плоская модель доменов/коллекций, где она упирается в реальный сценарий (с явным разделением на два разных вопроса — 2a и 2b, по итогам внутреннего пересмотра), дерево каталогов как готовое предложение по 2b с ключевой диаграммой, отдельный слайд про кросс-доменное пересечение коллекций (деталь, которую доработаем вместе с разработчиком при реализации), правило наследования, три персоны на новом дереве, почему предложение реалистично — с прецедентами из индустрии, и что остаётся в силе, пока идём к реализации. Тон части 2 — увереннее, чем части 1: это не вопрос «стоит ли», а предложение «вот модель, готов прорабатывать детали с разработчиком».</a:t>
             </a:r>
             <a:endParaRPr lang="en-US" dirty="0"/>
           </a:p>
@@ -2015,7 +2015,7 @@
           <a:p>
             <a:r>
               <a:rPr lang="en-US" dirty="0"/>
-              <a:t>Прямое сопоставление: RLS уже решает задачу «разная аудитория внутри одной сущности» для таблиц. Для документов эквивалента нет — единственный путь сегодня: дробление на новые коллекции/домены. Важное уточнение после независимой критики (case-20) и исследования прецедентов (case-19): это на самом деле два разных вопроса, которые легко перепутать — 2a (гранулярность внутри одной коллекции, до уровня документа/раздела/тега — предложение дерева её НЕ решает, потому что домен по документированной сегодня архитектуре — неизменяемое после создания поле коллекции, значит любой узел дерева технически реализуем только как отдельная коллекция) и 2b (организация множества плоских доменов в управляемую иерархию — вот что дерево действительно даёт). Раньше колода не разделяла их явно — это исправлено по итогам пересмотра case-11.</a:t>
+              <a:t>Прямое сопоставление: RLS уже решает задачу «разная аудитория внутри одной сущности» для таблиц. Для документов эквивалента нет — единственный путь сегодня: дробление на новые коллекции/домены. Важное уточнение после независимой внутренней критики и исследования прецедентов: это на самом деле два разных вопроса, которые легко перепутать — 2a (гранулярность внутри одной коллекции, до уровня документа/раздела/тега — предложение дерева её НЕ решает, потому что домен по документированной сегодня архитектуре — неизменяемое после создания поле коллекции, значит любой узел дерева технически реализуем только как отдельная коллекция) и 2b (организация множества плоских доменов в управляемую иерархию — вот что дерево действительно даёт). Раньше колода не разделяла их явно — это исправлено по итогам внутреннего пересмотра.</a:t>
             </a:r>
             <a:endParaRPr lang="en-US" dirty="0"/>
           </a:p>
@@ -2436,7 +2436,7 @@
         <p:spPr>
           <a:xfrm>
             <a:off x="548640" y="1691640"/>
-            <a:ext cx="8229600" cy="1691640"/>
+            <a:ext cx="8229600" cy="1005840"/>
           </a:xfrm>
           <a:prstGeom prst="rect">
             <a:avLst/>
@@ -2455,7 +2455,7 @@
               <a:buNone/>
             </a:pPr>
             <a:r>
-              <a:rPr lang="en-US" sz="3400" b="1" dirty="0">
+              <a:rPr lang="en-US" sz="2700" b="1" dirty="0">
                 <a:solidFill>
                   <a:srgbClr val="FFFFFF"/>
                 </a:solidFill>
@@ -2465,7 +2465,7 @@
               </a:rPr>
               <a:t>Два направления к дорожной карте:</a:t>
             </a:r>
-            <a:endParaRPr lang="en-US" sz="3400" dirty="0"/>
+            <a:endParaRPr lang="en-US" sz="2700" dirty="0"/>
           </a:p>
           <a:p>
             <a:pPr indent="0" marL="0">
@@ -2475,7 +2475,7 @@
               <a:buNone/>
             </a:pPr>
             <a:r>
-              <a:rPr lang="en-US" sz="3400" b="1" dirty="0">
+              <a:rPr lang="en-US" sz="2700" b="1" dirty="0">
                 <a:solidFill>
                   <a:srgbClr val="FFFFFF"/>
                 </a:solidFill>
@@ -2485,7 +2485,7 @@
               </a:rPr>
               <a:t>локальный чат и иерархия каталогов</a:t>
             </a:r>
-            <a:endParaRPr lang="en-US" sz="3400" dirty="0"/>
+            <a:endParaRPr lang="en-US" sz="2700" dirty="0"/>
           </a:p>
         </p:txBody>
       </p:sp>
@@ -2497,8 +2497,8 @@
         </p:nvSpPr>
         <p:spPr>
           <a:xfrm>
-            <a:off x="548640" y="3566160"/>
-            <a:ext cx="7315200" cy="1005840"/>
+            <a:off x="548640" y="2880360"/>
+            <a:ext cx="7315200" cy="1371600"/>
           </a:xfrm>
           <a:prstGeom prst="rect">
             <a:avLst/>
@@ -2525,7 +2525,7 @@
                 <a:ea typeface="Calibri" pitchFamily="34" charset="-122"/>
                 <a:cs typeface="Calibri" pitchFamily="34" charset="-120"/>
               </a:rPr>
-              <a:t>Два предложения и вопроса к команде платформы — направления, которые ещё не стали функциями и не зафиксированы в договоре, а обсуждаются на ближайшем roadmap-разговоре.</a:t>
+              <a:t>Как аналитик, внимательно изучивший обе темы, поднимаю их с разработчиком платформы — направления, которые ещё не стали функциями и не зафиксированы в договоре, а обсуждаются на ближайшем roadmap-разговоре.</a:t>
             </a:r>
             <a:endParaRPr lang="en-US" sz="1550" dirty="0"/>
           </a:p>
@@ -2898,7 +2898,7 @@
                 <a:ea typeface="Calibri" pitchFamily="34" charset="-122"/>
                 <a:cs typeface="Calibri" pitchFamily="34" charset="-120"/>
               </a:rPr>
-              <a:t>Внутренний материал · сентябрь 2026 · подготовка к разговору с вендором</a:t>
+              <a:t>Внутренний материал · сентябрь 2026 · подготовка к разговору с разработчиком</a:t>
             </a:r>
             <a:endParaRPr lang="en-US" sz="1050" dirty="0"/>
           </a:p>
@@ -5396,7 +5396,7 @@
                 <a:ea typeface="Calibri" pitchFamily="34" charset="-122"/>
                 <a:cs typeface="Calibri" pitchFamily="34" charset="-120"/>
               </a:rPr>
-              <a:t> — см. case-19, §5. Предложение дерева от этого не меняется, только это конкретное решение стоит выбрать вместе с вендором.</a:t>
+              <a:t>. Предложение дерева от этого не меняется, только это конкретное решение стоит выбрать вместе с разработчиком.</a:t>
             </a:r>
             <a:endParaRPr lang="en-US" sz="1100" dirty="0"/>
           </a:p>
@@ -7245,7 +7245,7 @@
                 <a:ea typeface="Calibri" pitchFamily="34" charset="-122"/>
                 <a:cs typeface="Calibri" pitchFamily="34" charset="-120"/>
               </a:rPr>
-              <a:t>персона привязана сразу к двум узлам — это явная множественная привязка, а не «переключение» между ролями (case-11, исправлено после разбора case-20)</a:t>
+              <a:t>персона привязана сразу к двум узлам — это явная множественная привязка, а не «переключение» между ролями</a:t>
             </a:r>
             <a:endParaRPr lang="en-US" sz="1200" dirty="0"/>
           </a:p>
@@ -7541,7 +7541,7 @@
                 <a:ea typeface="Calibri" pitchFamily="34" charset="-122"/>
                 <a:cs typeface="Calibri" pitchFamily="34" charset="-120"/>
               </a:rPr>
-              <a:t>привязан к корню — права default-узла в принципе нельзя сузить (case-19, §4.3, инвариант Purview)</a:t>
+              <a:t>привязан к корню — права default-узла в принципе нельзя сузить (тот же инвариант, что и в Microsoft Purview)</a:t>
             </a:r>
             <a:endParaRPr lang="en-US" sz="1200" dirty="0"/>
           </a:p>
@@ -7894,7 +7894,7 @@
                 <a:ea typeface="Calibri" pitchFamily="34" charset="-122"/>
                 <a:cs typeface="Calibri" pitchFamily="34" charset="-120"/>
               </a:rPr>
-              <a:t>Организацию множества плоских доменов (2b) — одной структурой, а не отдельными несвязанными доменами. Гранулярность внутри документа (2a) — отдельный, ещё открытый вопрос вендору.</a:t>
+              <a:t>Организацию множества плоских доменов (2b) — одной структурой, а не отдельными несвязанными доменами. Гранулярность внутри документа (2a) — отдельный, ещё открытый вопрос к разработчику.</a:t>
             </a:r>
             <a:endParaRPr lang="en-US" sz="1150" dirty="0"/>
           </a:p>
@@ -8056,7 +8056,7 @@
                 <a:ea typeface="Calibri" pitchFamily="34" charset="-122"/>
                 <a:cs typeface="Calibri" pitchFamily="34" charset="-120"/>
               </a:rPr>
-              <a:t>Правило «вниз, не вбок и не вверх» — задокументированное поведение Microsoft Purview («Restrict inherited permissions»), Google Drive («Limited access»), SharePoint и Databricks Unity Catalog (case-19).</a:t>
+              <a:t>Правило «вниз, не вбок и не вверх» — задокументированное поведение Microsoft Purview («Restrict inherited permissions»), Google Drive («Limited access»), SharePoint и Databricks Unity Catalog.</a:t>
             </a:r>
             <a:endParaRPr lang="en-US" sz="1150" dirty="0"/>
           </a:p>
@@ -9136,7 +9136,7 @@
                 <a:ea typeface="Calibri" pitchFamily="34" charset="-122"/>
                 <a:cs typeface="Calibri" pitchFamily="34" charset="-120"/>
               </a:rPr>
-              <a:t>Это не найденный баг и не пробел в тестировании — а естественное расширение сегодняшней модели «домен = тематическая область», подкреплённое конкретными прецедентами (case-19). Мы предлагаем включить его в дорожную карту и готовы прорабатывать детали реализации вместе с вендором.</a:t>
+              <a:t>Это не найденный баг и не пробел в тестировании — а естественное расширение сегодняшней модели «домен = тематическая область», подкреплённое конкретными прецедентами из индустрии. Предлагаю включить его в дорожную карту и готов прорабатывать детали реализации вместе с разработчиком.</a:t>
             </a:r>
             <a:endParaRPr lang="en-US" sz="1250" dirty="0"/>
           </a:p>
@@ -9707,7 +9707,7 @@
                 <a:ea typeface="Calibri" pitchFamily="34" charset="-122"/>
                 <a:cs typeface="Calibri" pitchFamily="34" charset="-120"/>
               </a:rPr>
-              <a:t>• Часть 1 — сомнение в необходимости нового места исполнения (компьютер сотрудника); ждём ответа вендора</a:t>
+              <a:t>• Часть 1 — сомнение в необходимости нового места исполнения (компьютер сотрудника); жду ответа разработчика</a:t>
             </a:r>
             <a:endParaRPr lang="en-US" sz="1200" dirty="0"/>
           </a:p>
@@ -9727,7 +9727,7 @@
                 <a:ea typeface="Calibri" pitchFamily="34" charset="-122"/>
                 <a:cs typeface="Calibri" pitchFamily="34" charset="-120"/>
               </a:rPr>
-              <a:t>• Часть 2 — предложение к реализации, снимающее ограничение плоского домена; готовы дорабатывать вместе</a:t>
+              <a:t>• Часть 2 — предложение к реализации, снимающее ограничение плоского домена; готов дорабатывать вместе с разработчиком</a:t>
             </a:r>
             <a:endParaRPr lang="en-US" sz="1200" dirty="0"/>
           </a:p>
@@ -9769,7 +9769,7 @@
                 <a:ea typeface="Calibri" pitchFamily="34" charset="-122"/>
                 <a:cs typeface="Calibri" pitchFamily="34" charset="-120"/>
               </a:rPr>
-              <a:t>Часть 1 остаётся открытым вопросом для вендора, Часть 2 — предложением к реализации. Обе позиции поднимаются проактивно, до того как РМ-1 или «Каталог»/«Надзор» станут обязательством в договоре.</a:t>
+              <a:t>Часть 1 остаётся открытым вопросом к разработчику, Часть 2 — предложением к реализации. Обе позиции поднимаются проактивно, до того как РМ-1 или «Каталог»/«Надзор» станут обязательством в договоре.</a:t>
             </a:r>
             <a:endParaRPr lang="en-US" sz="1300" dirty="0"/>
           </a:p>
@@ -9976,8 +9976,8 @@
         </p:nvSpPr>
         <p:spPr>
           <a:xfrm>
-            <a:off x="548640" y="2194560"/>
-            <a:ext cx="8503920" cy="1005840"/>
+            <a:off x="548640" y="2103120"/>
+            <a:ext cx="8686800" cy="685800"/>
           </a:xfrm>
           <a:prstGeom prst="rect">
             <a:avLst/>
@@ -9991,12 +9991,12 @@
           <a:p>
             <a:pPr indent="0" marL="0">
               <a:lnSpc>
-                <a:spcPct val="108000"/>
+                <a:spcPct val="110000"/>
               </a:lnSpc>
               <a:buNone/>
             </a:pPr>
             <a:r>
-              <a:rPr lang="en-US" sz="3000" b="1" dirty="0">
+              <a:rPr lang="en-US" sz="2700" b="1" dirty="0">
                 <a:solidFill>
                   <a:srgbClr val="FFFFFF"/>
                 </a:solidFill>
@@ -10006,7 +10006,7 @@
               </a:rPr>
               <a:t>Сомнение и предложение — в одном файле</a:t>
             </a:r>
-            <a:endParaRPr lang="en-US" sz="3000" dirty="0"/>
+            <a:endParaRPr lang="en-US" sz="2700" dirty="0"/>
           </a:p>
         </p:txBody>
       </p:sp>
@@ -10018,8 +10018,8 @@
         </p:nvSpPr>
         <p:spPr>
           <a:xfrm>
-            <a:off x="548640" y="3246120"/>
-            <a:ext cx="7863840" cy="1051560"/>
+            <a:off x="548640" y="3063240"/>
+            <a:ext cx="8503920" cy="1188720"/>
           </a:xfrm>
           <a:prstGeom prst="rect">
             <a:avLst/>
@@ -10033,12 +10033,12 @@
           <a:p>
             <a:pPr indent="0" marL="0">
               <a:lnSpc>
-                <a:spcPct val="130000"/>
+                <a:spcPct val="128000"/>
               </a:lnSpc>
               <a:buNone/>
             </a:pPr>
             <a:r>
-              <a:rPr lang="en-US" sz="1450" dirty="0">
+              <a:rPr lang="en-US" sz="1350" dirty="0">
                 <a:solidFill>
                   <a:srgbClr val="AEB4C4"/>
                 </a:solidFill>
@@ -10046,9 +10046,9 @@
                 <a:ea typeface="Calibri" pitchFamily="34" charset="-122"/>
                 <a:cs typeface="Calibri" pitchFamily="34" charset="-120"/>
               </a:rPr>
-              <a:t>Часть 1 остаётся открытым вопросом о необходимости — ждём точку зрения вендора. Часть 2 — наше предложение к реализации, готовое дорабатывать вместе. Обе позиции зафиксированы в case-11-voprosy-vendoru-roadmap.md, куда лягут ответы вендора и шаги к реализации.</a:t>
-            </a:r>
-            <a:endParaRPr lang="en-US" sz="1450" dirty="0"/>
+              <a:t>Часть 1 остаётся открытым вопросом о необходимости — жду точку зрения разработчика. Часть 2 — моё предложение к реализации, готовое дорабатывать вместе. Обе позиции зафиксированы в материалах, которые я подготовил для разговора с разработчиком, куда лягут его ответы и шаги к реализации.</a:t>
+            </a:r>
+            <a:endParaRPr lang="en-US" sz="1350" dirty="0"/>
           </a:p>
         </p:txBody>
       </p:sp>
@@ -10060,7 +10060,7 @@
         </p:nvSpPr>
         <p:spPr>
           <a:xfrm>
-            <a:off x="548640" y="4572000"/>
+            <a:off x="548640" y="4526280"/>
             <a:ext cx="7863840" cy="777240"/>
           </a:xfrm>
           <a:prstGeom prst="roundRect">
@@ -10082,7 +10082,7 @@
         </p:nvSpPr>
         <p:spPr>
           <a:xfrm>
-            <a:off x="868680" y="4572000"/>
+            <a:off x="868680" y="4526280"/>
             <a:ext cx="7315200" cy="777240"/>
           </a:xfrm>
           <a:prstGeom prst="rect">
@@ -10099,17 +10099,17 @@
               <a:buNone/>
             </a:pPr>
             <a:r>
-              <a:rPr lang="en-US" sz="1350" dirty="0">
+              <a:rPr lang="en-US" sz="1400" b="1" dirty="0">
                 <a:solidFill>
                   <a:srgbClr val="E8A33D"/>
                 </a:solidFill>
-                <a:latin typeface="Courier New" pitchFamily="34" charset="0"/>
-                <a:ea typeface="Courier New" pitchFamily="34" charset="-122"/>
-                <a:cs typeface="Courier New" pitchFamily="34" charset="-120"/>
-              </a:rPr>
-              <a:t>docs/analysis/case-11-voprosy-vendoru-roadmap.md</a:t>
-            </a:r>
-            <a:endParaRPr lang="en-US" sz="1350" dirty="0"/>
+                <a:latin typeface="Calibri" pitchFamily="34" charset="0"/>
+                <a:ea typeface="Calibri" pitchFamily="34" charset="-122"/>
+                <a:cs typeface="Calibri" pitchFamily="34" charset="-120"/>
+              </a:rPr>
+              <a:t>Вопросы и предложения к дорожной карте для разработчика</a:t>
+            </a:r>
+            <a:endParaRPr lang="en-US" sz="1400" dirty="0"/>
           </a:p>
         </p:txBody>
       </p:sp>
@@ -10855,7 +10855,7 @@
                 <a:ea typeface="Calibri" pitchFamily="34" charset="-122"/>
                 <a:cs typeface="Calibri" pitchFamily="34" charset="-120"/>
               </a:rPr>
-              <a:t>Обе позиции уже зафиксированы в </a:t>
+              <a:t>Обе позиции уже оформлены как </a:t>
             </a:r>
             <a:pPr indent="0" marL="0">
               <a:lnSpc>
@@ -10872,7 +10872,7 @@
                 <a:ea typeface="Calibri" pitchFamily="34" charset="-122"/>
                 <a:cs typeface="Calibri" pitchFamily="34" charset="-120"/>
               </a:rPr>
-              <a:t>case-11-voprosy-vendoru-roadmap.md</a:t>
+              <a:t>материал для разговора с разработчиком</a:t>
             </a:r>
             <a:pPr indent="0" marL="0">
               <a:lnSpc>
@@ -10889,7 +10889,7 @@
                 <a:ea typeface="Calibri" pitchFamily="34" charset="-122"/>
                 <a:cs typeface="Calibri" pitchFamily="34" charset="-120"/>
               </a:rPr>
-              <a:t> — Часть 1 как открытый вопрос вендору, Часть 2 как предложение к обсуждению; файл остаётся живым документом, куда лягут ответы и детали реализации.</a:t>
+              <a:t> — Часть 1 как открытый вопрос к разработчику, Часть 2 как предложение к обсуждению; материал остаётся живым документом, куда лягут ответы и детали реализации.</a:t>
             </a:r>
             <a:endParaRPr lang="en-US" sz="1200" dirty="0"/>
           </a:p>
@@ -12590,7 +12590,7 @@
                 <a:ea typeface="Calibri" pitchFamily="34" charset="-122"/>
                 <a:cs typeface="Calibri" pitchFamily="34" charset="-120"/>
               </a:rPr>
-              <a:t>ЧАСТЬ 1 · ВОПРОС ВЕНДОРУ (CASE-11, ВОПРОС 1)</a:t>
+              <a:t>ЧАСТЬ 1 · ВОПРОС К РАЗРАБОТЧИКУ</a:t>
             </a:r>
             <a:endParaRPr lang="en-US" sz="1150" dirty="0"/>
           </a:p>
@@ -12674,7 +12674,7 @@
                 <a:ea typeface="Calibri" pitchFamily="34" charset="-122"/>
                 <a:cs typeface="Calibri" pitchFamily="34" charset="-120"/>
               </a:rPr>
-              <a:t>«Явная модель запретов» РМ-1 задаёт, какие папки и файлы агенту трогать нельзя, но не описывает, что происходит с содержимым разрешённых файлов на пути к LLM. Наше сомнение в необходимости РМ-1 в текущем виде снимается или подтверждается четырьмя ответами вендора:</a:t>
+              <a:t>«Явная модель запретов» РМ-1 задаёт, какие папки и файлы агенту трогать нельзя, но не описывает, что происходит с содержимым разрешённых файлов на пути к LLM. Моё сомнение в необходимости РМ-1 в текущем виде снимается или подтверждается четырьмя ответами разработчика:</a:t>
             </a:r>
             <a:endParaRPr lang="en-US" sz="1250" dirty="0"/>
           </a:p>
@@ -14172,7 +14172,7 @@
                 <a:ea typeface="Calibri" pitchFamily="34" charset="-122"/>
                 <a:cs typeface="Calibri" pitchFamily="34" charset="-120"/>
               </a:rPr>
-              <a:t>Статус: это не рекомендация отказаться от РМ-1 — необходимость этого расширения в заявленном виде для нас пока не доказана, и ответы вендора на предыдущем слайде её снимут или подтвердят. Уровень C означает подтверждённое направление, но не обязательство по срокам — самое время спросить, пока пункт не закрепился в договоре.</a:t>
+              <a:t>Статус: это не рекомендация отказаться от РМ-1 — необходимость этого расширения в заявленном виде пока не доказана, и ответы разработчика на предыдущем слайде её снимут или подтвердят. Уровень C означает подтверждённое направление, но не обязательство по срокам — самое время спросить, пока пункт не закрепился в договоре.</a:t>
             </a:r>
             <a:endParaRPr lang="en-US" sz="1200" dirty="0"/>
           </a:p>
@@ -15339,7 +15339,7 @@
                 <a:ea typeface="Calibri" pitchFamily="34" charset="-122"/>
                 <a:cs typeface="Calibri" pitchFamily="34" charset="-120"/>
               </a:rPr>
-              <a:t>» — kamerata-overview-review.md, П3/П6</a:t>
+              <a:t>» — из документации платформы Камерата</a:t>
             </a:r>
             <a:endParaRPr lang="en-US" sz="1300" dirty="0"/>
           </a:p>
@@ -16040,7 +16040,7 @@
                 <a:ea typeface="Calibri" pitchFamily="34" charset="-122"/>
                 <a:cs typeface="Calibri" pitchFamily="34" charset="-120"/>
               </a:rPr>
-              <a:t>Это на самом деле два разных вопроса вендору (case-11, Вопрос 2): </a:t>
+              <a:t>Это на самом деле два разных вопроса к разработчику: </a:t>
             </a:r>
             <a:pPr indent="0" marL="0">
               <a:lnSpc>

--- a/docs/presentations/case-17-lokalny-chat-i-ierarhiya-katalogov.pptx
+++ b/docs/presentations/case-17-lokalny-chat-i-ierarhiya-katalogov.pptx
@@ -607,7 +607,7 @@
           <a:p>
             <a:r>
               <a:rPr lang="en-US" dirty="0"/>
-              <a:t>Самая важная диаграмма всей колоды, обновлена после переименования примера (коллизия с зарезервированными именами доменов платформы «Логистика»/«Персонал»/«Продажи», уже встречающимися в документации платформы как примеры доменов, — новый пример использует «Отдел маркетинга», «Юридический отдел», «Бухгалтерия»). Домен «Кадры» — корень. Три независимые ветки первого уровня: «Общее» (видна персоне «Сотрудник», делится на «Больничные»/«Отпускные»), «Оклады» (делится по отделам — маркетинг, юротдел, бухгалтерия) и «Личные дела» (третья, отдельная ветка — не потомок ни «Общее», ни «Оклады» — с ещё более узким подузлом «Топ-менеджмент», демонстрирующим, что дерево не ограничено двумя уровнями). Директор по персоналу привязан к корню и наследует всё дерево — это не частная удобная деталь примера, а закреплённый во всех проверенных индустриальных аналогах инвариант корня (в Microsoft Purview права default-домена в принципе нельзя ограничить).</a:t>
+              <a:t>Самая важная диаграмма всей колоды, полностью пересобрана: пример теперь использует настоящие, а не изобретённые названия — «Кадры», «Маркетинг», «Логистика» — то есть в точности канонический список доменов-примеров самой платформы («Логистика», «Персонал», «Продажи»; «Персонал» здесь — «Кадры»). Прежний вариант нарочно уходил от этих имён, чтобы не путать пример с зарезервированными названиями доменов платформы, и вводил ради этого отделы, которых в реальности не будет («Отдел маркетинга», «Юридический отдел», «Бухгалтерия» как под-ветки «Оклады» внутри одного домена). Этот обходной приём был лишним и только всё усложнял — раз слайд 11 всё равно показывает «Маркетинг» и «Логистику» как отдельные домены, пример стало логичнее строить сразу на них. Дерево теперь проще и площе: домен «Кадры» имеет ровно одного потомка — «Список сотрудников» (справочник/реестр сотрудников, ключевой узел-хаб), а у него, в свою очередь, ровно три потомка — «Отпускные», «Больничные», «Оклады». «Оклады» выделены цветом как более чувствительный узел — это готовит слайд 13, где персона «Сотрудник кадров» его не видит. Директор по персоналу привязан к корню и наследует всё дерево — это не частная удобная деталь примера, а закреплённый во всех проверенных индустриальных аналогах инвариант корня (в Microsoft Purview права default-домена в принципе нельзя ограничить). Тот факт, что «Список сотрудников» — единственный узел на этом уровне, специально подчёркнут в подписи: именно он на следующем слайде окажется общим для трёх доменов сразу.</a:t>
             </a:r>
             <a:endParaRPr lang="en-US" dirty="0"/>
           </a:p>
@@ -695,7 +695,7 @@
           <a:p>
             <a:r>
               <a:rPr lang="en-US" dirty="0"/>
-              <a:t>Новый слайд — прямой ответ на замечание пользователя после просмотра дерева: каталог может по смыслу принадлежать больше чем одному домену. Точная формулировка, которую важно не смазать: это НЕ исключение из правила «видимость течёт только вниз» — правило продолжает действовать независимо и полностью внутри каждого домена (персона на корне «Кадры» видит «Список сотрудников» по обычному нисходящему наследованию, точно так же персона в «Продажи»). Новое — только то, что один и тот же узел может быть нисходяще достижимым сразу в двух разных деревьях одновременно, то есть иметь двух родителей, а не одного. Это зеркальный случай моему вопросу к разработчику о доступе персоны к нескольким несмежным узлам ОДНОГО домена — здесь, наоборот, членство каталога сразу в НЕСКОЛЬКИХ доменах — и прямая иллюстрация вывода моего исследования прецедентов: ни одна из проверенных зрелых систем (SharePoint, Google Drive, Purview, Databricks) не обошлась без отдельного механизма для похожего кросс-веточного/кросс-доменного случая. Это не повод сомневаться в самом предложении дерева — это конкретная реализационная деталь, которую честнее поднять сейчас и решить вместе с разработчиком, чем сделать вид, что её не существует.</a:t>
+              <a:t>Полностью пересобранный слайд: раньше показывал два домена («Кадры» и «Продажи»), теперь — три («Кадры», «Маркетинг», «Логистика»), сходящихся к одному и тому же узлу «Список сотрудников», введённому на предыдущем слайде — включая три его дочерних узла («Отпускные», «Больничные», «Оклады»), показанные здесь ещё раз под общим узлом. «Маркетинг» и «Логистика» — не ветки «Кадры», а отдельные, независимые домены верхнего уровня, сиблинги «Кадры» — это те самые канонические примеры доменов платформы («Логистика», «Персонал», «Продажи»). Точная формулировка, которую важно не смазать: это НЕ исключение из правила «видимость течёт только вниз» — правило продолжает действовать независимо и полностью внутри каждого из трёх доменов (персона на корне любого из них видит «Список сотрудников» по обычному нисходящему наследованию). Новое — только то, что один и тот же узел нисходяще достижим сразу из трёх разных деревьев одновременно, то есть имеет три родителя, а не одного — расширение идеи «один узел, два родителя, два домена» с предыдущего слайда сразу на три домена. Отдельно, явно как открытый вопрос, а не решённый факт: если «Список сотрудников» — один физический узел, персона, привязанная к корню «Маркетинг», обычным нисходящим наследованием доходит до него — но видит ли она весь список целиком (по всем отделам) или только часть, относящуюся к своему отделу? Само дерево, как оно здесь нарисовано, ответа на это не даёт — я сознательно не решаю этот вопрос ни в одну сторону, а называю его прямым продолжением уже поднятого раньше вопроса «2a» (гранулярность внутри одной коллекции, тоньше, чем узел дерева). Это ровно та же деталь, что иллюстрируется персоной «Начальник отдела маркетинга» на следующем слайде.</a:t>
             </a:r>
             <a:endParaRPr lang="en-US" dirty="0"/>
           </a:p>
@@ -871,7 +871,7 @@
           <a:p>
             <a:r>
               <a:rPr lang="en-US" dirty="0"/>
-              <a:t>Три строки — три персоны на переименованном дереве «Кадры» (переименовано после коллизии с зарезервированными платформенными именами доменов «Логистика»/«Персонал»/«Продажи», см. заметки к слайду с деревом). Средняя строка — исправленный после внутренней критики составной пример: «Начальник отдела маркетинга» — не единственная персона, привязанная к одному узлу, а явная множественная привязка сразу к двум узлам («Общее» и «Оклады/Отдел маркетинга»). Это прямое продолжение того, как многодоменность уже работает сегодня без всякого дерева (в рабочей инструкции платформы — «выбрать домен(ы) из списка», множественное число), а не костыль поверх дерева. Директор по персоналу — на корне, поэтому видит всё дерево автоматически; это задокументированный во всех проверенных индустриальных аналогах инвариант корня, а не удобная деталь примера.</a:t>
+              <a:t>Три строки — три персоны на переименованном дереве «Кадры» (пример теперь строится на настоящих именах доменов платформы — «Кадры», «Маркетинг», «Логистика» — без искусственного ухода от них, см. заметки к слайду с деревом). Первая строка — «Сотрудник кадров» — составная привязка сразу к двум соседним узлам («Отпускные» и «Больничные»); это прямое продолжение того, как многодоменность уже работает сегодня без всякого дерева (в рабочей инструкции платформы — «выбрать домен(ы) из списка», множественное число), а не костыль поверх дерева. «Оклады» этой персоне не видны — они не потомки ни «Отпускные», ни «Больничные», и по смыслу не входят в обычные обязанности кадрового специалиста. Вторая строка — «Начальник отдела маркетинга» — самая содержательная: персона привязана к корню СОВСЕМ ДРУГОГО домена, «Маркетинг», а не «Кадры» — и тем не менее через обычное нисходящее наследование внутри своего домена доходит до общего узла «Список сотрудников» и до всех его потомков, включая «Оклады». Это конкретная иллюстрация открытого вопроса с предыдущего слайда, и здесь он повторён явно, а не спрятан: видит ли начальник маркетинга оклады всей компании (потому что узел общий и не разбит дальше) или только своего отдела (потому что это разумно ожидалось бы) — дерево как оно есть не отвечает, это тот же класс вопроса, что и «2a» (гранулярность внутри одной коллекции). Третья строка — Директор по персоналу — на корне «Кадры», поэтому видит всё дерево домена целиком; это задокументированный во всех проверенных индустриальных аналогах инвариант корня (Microsoft Purview: права default-домена нельзя ограничить), а не удобная деталь примера.</a:t>
             </a:r>
             <a:endParaRPr lang="en-US" dirty="0"/>
           </a:p>
@@ -3025,8 +3025,8 @@
         </p:nvSpPr>
         <p:spPr>
           <a:xfrm>
-            <a:off x="6096305" y="1984248"/>
-            <a:ext cx="0" cy="297180"/>
+            <a:off x="6096305" y="2057400"/>
+            <a:ext cx="0" cy="548640"/>
           </a:xfrm>
           <a:prstGeom prst="line">
             <a:avLst/>
@@ -3048,8 +3048,8 @@
         </p:nvSpPr>
         <p:spPr>
           <a:xfrm>
-            <a:off x="2331720" y="2281428"/>
-            <a:ext cx="8046720" cy="0"/>
+            <a:off x="6096305" y="3246120"/>
+            <a:ext cx="0" cy="411480"/>
           </a:xfrm>
           <a:prstGeom prst="line">
             <a:avLst/>
@@ -3071,8 +3071,8 @@
         </p:nvSpPr>
         <p:spPr>
           <a:xfrm>
-            <a:off x="2331720" y="2281428"/>
-            <a:ext cx="0" cy="297180"/>
+            <a:off x="1737360" y="3657600"/>
+            <a:ext cx="8716975" cy="0"/>
           </a:xfrm>
           <a:prstGeom prst="line">
             <a:avLst/>
@@ -3094,8 +3094,8 @@
         </p:nvSpPr>
         <p:spPr>
           <a:xfrm>
-            <a:off x="6766560" y="2281428"/>
-            <a:ext cx="0" cy="297180"/>
+            <a:off x="1737360" y="3657600"/>
+            <a:ext cx="0" cy="411480"/>
           </a:xfrm>
           <a:prstGeom prst="line">
             <a:avLst/>
@@ -3117,8 +3117,8 @@
         </p:nvSpPr>
         <p:spPr>
           <a:xfrm>
-            <a:off x="10378440" y="2281428"/>
-            <a:ext cx="0" cy="297180"/>
+            <a:off x="6096305" y="3657600"/>
+            <a:ext cx="0" cy="411480"/>
           </a:xfrm>
           <a:prstGeom prst="line">
             <a:avLst/>
@@ -3140,8 +3140,8 @@
         </p:nvSpPr>
         <p:spPr>
           <a:xfrm>
-            <a:off x="2331720" y="3108960"/>
-            <a:ext cx="0" cy="402336"/>
+            <a:off x="10454335" y="3657600"/>
+            <a:ext cx="0" cy="411480"/>
           </a:xfrm>
           <a:prstGeom prst="line">
             <a:avLst/>
@@ -3163,215 +3163,8 @@
         </p:nvSpPr>
         <p:spPr>
           <a:xfrm>
-            <a:off x="1348740" y="3511296"/>
-            <a:ext cx="1965960" cy="0"/>
-          </a:xfrm>
-          <a:prstGeom prst="line">
-            <a:avLst/>
-          </a:prstGeom>
-          <a:noFill/>
-          <a:ln w="19050">
-            <a:solidFill>
-              <a:srgbClr val="8891A0"/>
-            </a:solidFill>
-            <a:prstDash val="solid"/>
-          </a:ln>
-        </p:spPr>
-      </p:sp>
-      <p:sp>
-        <p:nvSpPr>
-          <p:cNvPr id="11" name="Shape 9"/>
-          <p:cNvSpPr/>
-          <p:nvPr/>
-        </p:nvSpPr>
-        <p:spPr>
-          <a:xfrm>
-            <a:off x="1348740" y="3511296"/>
-            <a:ext cx="0" cy="402336"/>
-          </a:xfrm>
-          <a:prstGeom prst="line">
-            <a:avLst/>
-          </a:prstGeom>
-          <a:noFill/>
-          <a:ln w="19050">
-            <a:solidFill>
-              <a:srgbClr val="8891A0"/>
-            </a:solidFill>
-            <a:prstDash val="solid"/>
-          </a:ln>
-        </p:spPr>
-      </p:sp>
-      <p:sp>
-        <p:nvSpPr>
-          <p:cNvPr id="12" name="Shape 10"/>
-          <p:cNvSpPr/>
-          <p:nvPr/>
-        </p:nvSpPr>
-        <p:spPr>
-          <a:xfrm>
-            <a:off x="3314700" y="3511296"/>
-            <a:ext cx="0" cy="402336"/>
-          </a:xfrm>
-          <a:prstGeom prst="line">
-            <a:avLst/>
-          </a:prstGeom>
-          <a:noFill/>
-          <a:ln w="19050">
-            <a:solidFill>
-              <a:srgbClr val="8891A0"/>
-            </a:solidFill>
-            <a:prstDash val="solid"/>
-          </a:ln>
-        </p:spPr>
-      </p:sp>
-      <p:sp>
-        <p:nvSpPr>
-          <p:cNvPr id="13" name="Shape 11"/>
-          <p:cNvSpPr/>
-          <p:nvPr/>
-        </p:nvSpPr>
-        <p:spPr>
-          <a:xfrm>
-            <a:off x="6766560" y="3108960"/>
-            <a:ext cx="0" cy="402336"/>
-          </a:xfrm>
-          <a:prstGeom prst="line">
-            <a:avLst/>
-          </a:prstGeom>
-          <a:noFill/>
-          <a:ln w="19050">
-            <a:solidFill>
-              <a:srgbClr val="8891A0"/>
-            </a:solidFill>
-            <a:prstDash val="solid"/>
-          </a:ln>
-        </p:spPr>
-      </p:sp>
-      <p:sp>
-        <p:nvSpPr>
-          <p:cNvPr id="14" name="Shape 12"/>
-          <p:cNvSpPr/>
-          <p:nvPr/>
-        </p:nvSpPr>
-        <p:spPr>
-          <a:xfrm>
-            <a:off x="5074920" y="3511296"/>
-            <a:ext cx="3383280" cy="0"/>
-          </a:xfrm>
-          <a:prstGeom prst="line">
-            <a:avLst/>
-          </a:prstGeom>
-          <a:noFill/>
-          <a:ln w="19050">
-            <a:solidFill>
-              <a:srgbClr val="8891A0"/>
-            </a:solidFill>
-            <a:prstDash val="solid"/>
-          </a:ln>
-        </p:spPr>
-      </p:sp>
-      <p:sp>
-        <p:nvSpPr>
-          <p:cNvPr id="15" name="Shape 13"/>
-          <p:cNvSpPr/>
-          <p:nvPr/>
-        </p:nvSpPr>
-        <p:spPr>
-          <a:xfrm>
-            <a:off x="5074920" y="3511296"/>
-            <a:ext cx="0" cy="402336"/>
-          </a:xfrm>
-          <a:prstGeom prst="line">
-            <a:avLst/>
-          </a:prstGeom>
-          <a:noFill/>
-          <a:ln w="19050">
-            <a:solidFill>
-              <a:srgbClr val="8891A0"/>
-            </a:solidFill>
-            <a:prstDash val="solid"/>
-          </a:ln>
-        </p:spPr>
-      </p:sp>
-      <p:sp>
-        <p:nvSpPr>
-          <p:cNvPr id="16" name="Shape 14"/>
-          <p:cNvSpPr/>
-          <p:nvPr/>
-        </p:nvSpPr>
-        <p:spPr>
-          <a:xfrm>
-            <a:off x="6766560" y="3511296"/>
-            <a:ext cx="0" cy="402336"/>
-          </a:xfrm>
-          <a:prstGeom prst="line">
-            <a:avLst/>
-          </a:prstGeom>
-          <a:noFill/>
-          <a:ln w="19050">
-            <a:solidFill>
-              <a:srgbClr val="8891A0"/>
-            </a:solidFill>
-            <a:prstDash val="solid"/>
-          </a:ln>
-        </p:spPr>
-      </p:sp>
-      <p:sp>
-        <p:nvSpPr>
-          <p:cNvPr id="17" name="Shape 15"/>
-          <p:cNvSpPr/>
-          <p:nvPr/>
-        </p:nvSpPr>
-        <p:spPr>
-          <a:xfrm>
-            <a:off x="8458200" y="3511296"/>
-            <a:ext cx="0" cy="402336"/>
-          </a:xfrm>
-          <a:prstGeom prst="line">
-            <a:avLst/>
-          </a:prstGeom>
-          <a:noFill/>
-          <a:ln w="19050">
-            <a:solidFill>
-              <a:srgbClr val="8891A0"/>
-            </a:solidFill>
-            <a:prstDash val="solid"/>
-          </a:ln>
-        </p:spPr>
-      </p:sp>
-      <p:sp>
-        <p:nvSpPr>
-          <p:cNvPr id="18" name="Shape 16"/>
-          <p:cNvSpPr/>
-          <p:nvPr/>
-        </p:nvSpPr>
-        <p:spPr>
-          <a:xfrm>
-            <a:off x="10378440" y="3108960"/>
-            <a:ext cx="0" cy="804672"/>
-          </a:xfrm>
-          <a:prstGeom prst="line">
-            <a:avLst/>
-          </a:prstGeom>
-          <a:noFill/>
-          <a:ln w="19050">
-            <a:solidFill>
-              <a:srgbClr val="8891A0"/>
-            </a:solidFill>
-            <a:prstDash val="solid"/>
-          </a:ln>
-        </p:spPr>
-      </p:sp>
-      <p:sp>
-        <p:nvSpPr>
-          <p:cNvPr id="19" name="Shape 17"/>
-          <p:cNvSpPr/>
-          <p:nvPr/>
-        </p:nvSpPr>
-        <p:spPr>
-          <a:xfrm>
-            <a:off x="4861865" y="1481328"/>
-            <a:ext cx="2468880" cy="502920"/>
+            <a:off x="4724705" y="1554480"/>
+            <a:ext cx="2743200" cy="502920"/>
           </a:xfrm>
           <a:prstGeom prst="roundRect">
             <a:avLst>
@@ -3391,14 +3184,14 @@
       </p:sp>
       <p:sp>
         <p:nvSpPr>
-          <p:cNvPr id="20" name="Text 18"/>
-          <p:cNvSpPr/>
-          <p:nvPr/>
-        </p:nvSpPr>
-        <p:spPr>
-          <a:xfrm>
-            <a:off x="4861865" y="1481328"/>
-            <a:ext cx="2468880" cy="502920"/>
+          <p:cNvPr id="11" name="Text 9"/>
+          <p:cNvSpPr/>
+          <p:nvPr/>
+        </p:nvSpPr>
+        <p:spPr>
+          <a:xfrm>
+            <a:off x="4724705" y="1554480"/>
+            <a:ext cx="2743200" cy="502920"/>
           </a:xfrm>
           <a:prstGeom prst="rect">
             <a:avLst/>
@@ -3433,18 +3226,18 @@
       </p:sp>
       <p:sp>
         <p:nvSpPr>
-          <p:cNvPr id="21" name="Shape 19"/>
-          <p:cNvSpPr/>
-          <p:nvPr/>
-        </p:nvSpPr>
-        <p:spPr>
-          <a:xfrm>
-            <a:off x="1280160" y="2578608"/>
-            <a:ext cx="2103120" cy="530352"/>
+          <p:cNvPr id="12" name="Shape 10"/>
+          <p:cNvSpPr/>
+          <p:nvPr/>
+        </p:nvSpPr>
+        <p:spPr>
+          <a:xfrm>
+            <a:off x="4587545" y="2606040"/>
+            <a:ext cx="3017520" cy="640080"/>
           </a:xfrm>
           <a:prstGeom prst="roundRect">
             <a:avLst>
-              <a:gd name="adj" fmla="val 13793"/>
+              <a:gd name="adj" fmla="val 11429"/>
             </a:avLst>
           </a:prstGeom>
           <a:solidFill>
@@ -3460,14 +3253,14 @@
       </p:sp>
       <p:sp>
         <p:nvSpPr>
-          <p:cNvPr id="22" name="Text 20"/>
-          <p:cNvSpPr/>
-          <p:nvPr/>
-        </p:nvSpPr>
-        <p:spPr>
-          <a:xfrm>
-            <a:off x="1280160" y="2578608"/>
-            <a:ext cx="2103120" cy="530352"/>
+          <p:cNvPr id="13" name="Text 11"/>
+          <p:cNvSpPr/>
+          <p:nvPr/>
+        </p:nvSpPr>
+        <p:spPr>
+          <a:xfrm>
+            <a:off x="4587545" y="2606040"/>
+            <a:ext cx="3017520" cy="640080"/>
           </a:xfrm>
           <a:prstGeom prst="rect">
             <a:avLst/>
@@ -3486,7 +3279,7 @@
               <a:buNone/>
             </a:pPr>
             <a:r>
-              <a:rPr lang="en-US" sz="1300" b="1" dirty="0">
+              <a:rPr lang="en-US" sz="1600" b="1" dirty="0">
                 <a:solidFill>
                   <a:srgbClr val="1E4FB8"/>
                 </a:solidFill>
@@ -3494,26 +3287,164 @@
                 <a:ea typeface="Calibri" pitchFamily="34" charset="-122"/>
                 <a:cs typeface="Calibri" pitchFamily="34" charset="-120"/>
               </a:rPr>
-              <a:t>Общее</a:t>
-            </a:r>
-            <a:endParaRPr lang="en-US" sz="1300" dirty="0"/>
-          </a:p>
-        </p:txBody>
-      </p:sp>
-      <p:sp>
-        <p:nvSpPr>
-          <p:cNvPr id="23" name="Shape 21"/>
-          <p:cNvSpPr/>
-          <p:nvPr/>
-        </p:nvSpPr>
-        <p:spPr>
-          <a:xfrm>
-            <a:off x="5715000" y="2578608"/>
-            <a:ext cx="2103120" cy="530352"/>
+              <a:t>Список сотрудников</a:t>
+            </a:r>
+            <a:endParaRPr lang="en-US" sz="1600" dirty="0"/>
+          </a:p>
+        </p:txBody>
+      </p:sp>
+      <p:sp>
+        <p:nvSpPr>
+          <p:cNvPr id="14" name="Shape 12"/>
+          <p:cNvSpPr/>
+          <p:nvPr/>
+        </p:nvSpPr>
+        <p:spPr>
+          <a:xfrm>
+            <a:off x="822960" y="4069080"/>
+            <a:ext cx="1828800" cy="685800"/>
           </a:xfrm>
           <a:prstGeom prst="roundRect">
             <a:avLst>
-              <a:gd name="adj" fmla="val 13793"/>
+              <a:gd name="adj" fmla="val 10667"/>
+            </a:avLst>
+          </a:prstGeom>
+          <a:solidFill>
+            <a:srgbClr val="E4ECFD"/>
+          </a:solidFill>
+          <a:ln w="19050">
+            <a:solidFill>
+              <a:srgbClr val="2F6FED"/>
+            </a:solidFill>
+            <a:prstDash val="solid"/>
+          </a:ln>
+        </p:spPr>
+      </p:sp>
+      <p:sp>
+        <p:nvSpPr>
+          <p:cNvPr id="15" name="Text 13"/>
+          <p:cNvSpPr/>
+          <p:nvPr/>
+        </p:nvSpPr>
+        <p:spPr>
+          <a:xfrm>
+            <a:off x="822960" y="4069080"/>
+            <a:ext cx="1828800" cy="685800"/>
+          </a:xfrm>
+          <a:prstGeom prst="rect">
+            <a:avLst/>
+          </a:prstGeom>
+          <a:noFill/>
+          <a:ln/>
+        </p:spPr>
+        <p:txBody>
+          <a:bodyPr wrap="square" lIns="0" tIns="0" rIns="0" bIns="0" rtlCol="0" anchor="ctr"/>
+          <a:lstStyle/>
+          <a:p>
+            <a:pPr algn="ctr" indent="0" marL="0">
+              <a:lnSpc>
+                <a:spcPct val="105000"/>
+              </a:lnSpc>
+              <a:buNone/>
+            </a:pPr>
+            <a:r>
+              <a:rPr lang="en-US" sz="1300" b="1" dirty="0">
+                <a:solidFill>
+                  <a:srgbClr val="1E4FB8"/>
+                </a:solidFill>
+                <a:latin typeface="Calibri" pitchFamily="34" charset="0"/>
+                <a:ea typeface="Calibri" pitchFamily="34" charset="-122"/>
+                <a:cs typeface="Calibri" pitchFamily="34" charset="-120"/>
+              </a:rPr>
+              <a:t>Отпускные</a:t>
+            </a:r>
+            <a:endParaRPr lang="en-US" sz="1300" dirty="0"/>
+          </a:p>
+        </p:txBody>
+      </p:sp>
+      <p:sp>
+        <p:nvSpPr>
+          <p:cNvPr id="16" name="Shape 14"/>
+          <p:cNvSpPr/>
+          <p:nvPr/>
+        </p:nvSpPr>
+        <p:spPr>
+          <a:xfrm>
+            <a:off x="5181905" y="4069080"/>
+            <a:ext cx="1828800" cy="685800"/>
+          </a:xfrm>
+          <a:prstGeom prst="roundRect">
+            <a:avLst>
+              <a:gd name="adj" fmla="val 10667"/>
+            </a:avLst>
+          </a:prstGeom>
+          <a:solidFill>
+            <a:srgbClr val="E4ECFD"/>
+          </a:solidFill>
+          <a:ln w="19050">
+            <a:solidFill>
+              <a:srgbClr val="2F6FED"/>
+            </a:solidFill>
+            <a:prstDash val="solid"/>
+          </a:ln>
+        </p:spPr>
+      </p:sp>
+      <p:sp>
+        <p:nvSpPr>
+          <p:cNvPr id="17" name="Text 15"/>
+          <p:cNvSpPr/>
+          <p:nvPr/>
+        </p:nvSpPr>
+        <p:spPr>
+          <a:xfrm>
+            <a:off x="5181905" y="4069080"/>
+            <a:ext cx="1828800" cy="685800"/>
+          </a:xfrm>
+          <a:prstGeom prst="rect">
+            <a:avLst/>
+          </a:prstGeom>
+          <a:noFill/>
+          <a:ln/>
+        </p:spPr>
+        <p:txBody>
+          <a:bodyPr wrap="square" lIns="0" tIns="0" rIns="0" bIns="0" rtlCol="0" anchor="ctr"/>
+          <a:lstStyle/>
+          <a:p>
+            <a:pPr algn="ctr" indent="0" marL="0">
+              <a:lnSpc>
+                <a:spcPct val="105000"/>
+              </a:lnSpc>
+              <a:buNone/>
+            </a:pPr>
+            <a:r>
+              <a:rPr lang="en-US" sz="1300" b="1" dirty="0">
+                <a:solidFill>
+                  <a:srgbClr val="1E4FB8"/>
+                </a:solidFill>
+                <a:latin typeface="Calibri" pitchFamily="34" charset="0"/>
+                <a:ea typeface="Calibri" pitchFamily="34" charset="-122"/>
+                <a:cs typeface="Calibri" pitchFamily="34" charset="-120"/>
+              </a:rPr>
+              <a:t>Больничные</a:t>
+            </a:r>
+            <a:endParaRPr lang="en-US" sz="1300" dirty="0"/>
+          </a:p>
+        </p:txBody>
+      </p:sp>
+      <p:sp>
+        <p:nvSpPr>
+          <p:cNvPr id="18" name="Shape 16"/>
+          <p:cNvSpPr/>
+          <p:nvPr/>
+        </p:nvSpPr>
+        <p:spPr>
+          <a:xfrm>
+            <a:off x="9539935" y="4069080"/>
+            <a:ext cx="1828800" cy="685800"/>
+          </a:xfrm>
+          <a:prstGeom prst="roundRect">
+            <a:avLst>
+              <a:gd name="adj" fmla="val 10667"/>
             </a:avLst>
           </a:prstGeom>
           <a:solidFill>
@@ -3529,14 +3460,14 @@
       </p:sp>
       <p:sp>
         <p:nvSpPr>
-          <p:cNvPr id="24" name="Text 22"/>
-          <p:cNvSpPr/>
-          <p:nvPr/>
-        </p:nvSpPr>
-        <p:spPr>
-          <a:xfrm>
-            <a:off x="5715000" y="2578608"/>
-            <a:ext cx="2103120" cy="530352"/>
+          <p:cNvPr id="19" name="Text 17"/>
+          <p:cNvSpPr/>
+          <p:nvPr/>
+        </p:nvSpPr>
+        <p:spPr>
+          <a:xfrm>
+            <a:off x="9539935" y="4069080"/>
+            <a:ext cx="1828800" cy="685800"/>
           </a:xfrm>
           <a:prstGeom prst="rect">
             <a:avLst/>
@@ -3571,779 +3502,13 @@
       </p:sp>
       <p:sp>
         <p:nvSpPr>
-          <p:cNvPr id="25" name="Shape 23"/>
-          <p:cNvSpPr/>
-          <p:nvPr/>
-        </p:nvSpPr>
-        <p:spPr>
-          <a:xfrm>
-            <a:off x="9326880" y="2578608"/>
-            <a:ext cx="2103120" cy="530352"/>
-          </a:xfrm>
-          <a:prstGeom prst="roundRect">
-            <a:avLst>
-              <a:gd name="adj" fmla="val 13793"/>
-            </a:avLst>
-          </a:prstGeom>
-          <a:solidFill>
-            <a:srgbClr val="FBE6E9"/>
-          </a:solidFill>
-          <a:ln w="19050">
-            <a:solidFill>
-              <a:srgbClr val="D1495B"/>
-            </a:solidFill>
-            <a:prstDash val="solid"/>
-          </a:ln>
-        </p:spPr>
-      </p:sp>
-      <p:sp>
-        <p:nvSpPr>
-          <p:cNvPr id="26" name="Text 24"/>
-          <p:cNvSpPr/>
-          <p:nvPr/>
-        </p:nvSpPr>
-        <p:spPr>
-          <a:xfrm>
-            <a:off x="9326880" y="2578608"/>
-            <a:ext cx="2103120" cy="530352"/>
-          </a:xfrm>
-          <a:prstGeom prst="rect">
-            <a:avLst/>
-          </a:prstGeom>
-          <a:noFill/>
-          <a:ln/>
-        </p:spPr>
-        <p:txBody>
-          <a:bodyPr wrap="square" lIns="0" tIns="0" rIns="0" bIns="0" rtlCol="0" anchor="ctr"/>
-          <a:lstStyle/>
-          <a:p>
-            <a:pPr algn="ctr" indent="0" marL="0">
-              <a:lnSpc>
-                <a:spcPct val="105000"/>
-              </a:lnSpc>
-              <a:buNone/>
-            </a:pPr>
-            <a:r>
-              <a:rPr lang="en-US" sz="1300" b="1" dirty="0">
-                <a:solidFill>
-                  <a:srgbClr val="D1495B"/>
-                </a:solidFill>
-                <a:latin typeface="Calibri" pitchFamily="34" charset="0"/>
-                <a:ea typeface="Calibri" pitchFamily="34" charset="-122"/>
-                <a:cs typeface="Calibri" pitchFamily="34" charset="-120"/>
-              </a:rPr>
-              <a:t>Личные дела</a:t>
-            </a:r>
-            <a:endParaRPr lang="en-US" sz="1300" dirty="0"/>
-          </a:p>
-        </p:txBody>
-      </p:sp>
-      <p:sp>
-        <p:nvSpPr>
-          <p:cNvPr id="27" name="Shape 25"/>
-          <p:cNvSpPr/>
-          <p:nvPr/>
-        </p:nvSpPr>
-        <p:spPr>
-          <a:xfrm>
-            <a:off x="548640" y="3913632"/>
-            <a:ext cx="1600200" cy="658368"/>
-          </a:xfrm>
-          <a:prstGeom prst="roundRect">
-            <a:avLst>
-              <a:gd name="adj" fmla="val 11111"/>
-            </a:avLst>
-          </a:prstGeom>
-          <a:solidFill>
-            <a:srgbClr val="E4ECFD"/>
-          </a:solidFill>
-          <a:ln w="19050">
-            <a:solidFill>
-              <a:srgbClr val="2F6FED"/>
-            </a:solidFill>
-            <a:prstDash val="solid"/>
-          </a:ln>
-        </p:spPr>
-      </p:sp>
-      <p:sp>
-        <p:nvSpPr>
-          <p:cNvPr id="28" name="Text 26"/>
-          <p:cNvSpPr/>
-          <p:nvPr/>
-        </p:nvSpPr>
-        <p:spPr>
-          <a:xfrm>
-            <a:off x="548640" y="3913632"/>
-            <a:ext cx="1600200" cy="658368"/>
-          </a:xfrm>
-          <a:prstGeom prst="rect">
-            <a:avLst/>
-          </a:prstGeom>
-          <a:noFill/>
-          <a:ln/>
-        </p:spPr>
-        <p:txBody>
-          <a:bodyPr wrap="square" lIns="0" tIns="0" rIns="0" bIns="0" rtlCol="0" anchor="ctr"/>
-          <a:lstStyle/>
-          <a:p>
-            <a:pPr algn="ctr" indent="0" marL="0">
-              <a:lnSpc>
-                <a:spcPct val="105000"/>
-              </a:lnSpc>
-              <a:buNone/>
-            </a:pPr>
-            <a:r>
-              <a:rPr lang="en-US" sz="1100" b="1" dirty="0">
-                <a:solidFill>
-                  <a:srgbClr val="1E4FB8"/>
-                </a:solidFill>
-                <a:latin typeface="Calibri" pitchFamily="34" charset="0"/>
-                <a:ea typeface="Calibri" pitchFamily="34" charset="-122"/>
-                <a:cs typeface="Calibri" pitchFamily="34" charset="-120"/>
-              </a:rPr>
-              <a:t>Больничные</a:t>
-            </a:r>
-            <a:endParaRPr lang="en-US" sz="1100" dirty="0"/>
-          </a:p>
-        </p:txBody>
-      </p:sp>
-      <p:sp>
-        <p:nvSpPr>
-          <p:cNvPr id="29" name="Shape 27"/>
-          <p:cNvSpPr/>
-          <p:nvPr/>
-        </p:nvSpPr>
-        <p:spPr>
-          <a:xfrm>
-            <a:off x="2514600" y="3913632"/>
-            <a:ext cx="1600200" cy="658368"/>
-          </a:xfrm>
-          <a:prstGeom prst="roundRect">
-            <a:avLst>
-              <a:gd name="adj" fmla="val 11111"/>
-            </a:avLst>
-          </a:prstGeom>
-          <a:solidFill>
-            <a:srgbClr val="E4ECFD"/>
-          </a:solidFill>
-          <a:ln w="19050">
-            <a:solidFill>
-              <a:srgbClr val="2F6FED"/>
-            </a:solidFill>
-            <a:prstDash val="solid"/>
-          </a:ln>
-        </p:spPr>
-      </p:sp>
-      <p:sp>
-        <p:nvSpPr>
-          <p:cNvPr id="30" name="Text 28"/>
-          <p:cNvSpPr/>
-          <p:nvPr/>
-        </p:nvSpPr>
-        <p:spPr>
-          <a:xfrm>
-            <a:off x="2514600" y="3913632"/>
-            <a:ext cx="1600200" cy="658368"/>
-          </a:xfrm>
-          <a:prstGeom prst="rect">
-            <a:avLst/>
-          </a:prstGeom>
-          <a:noFill/>
-          <a:ln/>
-        </p:spPr>
-        <p:txBody>
-          <a:bodyPr wrap="square" lIns="0" tIns="0" rIns="0" bIns="0" rtlCol="0" anchor="ctr"/>
-          <a:lstStyle/>
-          <a:p>
-            <a:pPr algn="ctr" indent="0" marL="0">
-              <a:lnSpc>
-                <a:spcPct val="105000"/>
-              </a:lnSpc>
-              <a:buNone/>
-            </a:pPr>
-            <a:r>
-              <a:rPr lang="en-US" sz="1100" b="1" dirty="0">
-                <a:solidFill>
-                  <a:srgbClr val="1E4FB8"/>
-                </a:solidFill>
-                <a:latin typeface="Calibri" pitchFamily="34" charset="0"/>
-                <a:ea typeface="Calibri" pitchFamily="34" charset="-122"/>
-                <a:cs typeface="Calibri" pitchFamily="34" charset="-120"/>
-              </a:rPr>
-              <a:t>Отпускные</a:t>
-            </a:r>
-            <a:endParaRPr lang="en-US" sz="1100" dirty="0"/>
-          </a:p>
-        </p:txBody>
-      </p:sp>
-      <p:sp>
-        <p:nvSpPr>
-          <p:cNvPr id="31" name="Shape 29"/>
-          <p:cNvSpPr/>
-          <p:nvPr/>
-        </p:nvSpPr>
-        <p:spPr>
-          <a:xfrm>
-            <a:off x="4297680" y="3913632"/>
-            <a:ext cx="1554480" cy="658368"/>
-          </a:xfrm>
-          <a:prstGeom prst="roundRect">
-            <a:avLst>
-              <a:gd name="adj" fmla="val 11111"/>
-            </a:avLst>
-          </a:prstGeom>
-          <a:solidFill>
-            <a:srgbClr val="FBEED9"/>
-          </a:solidFill>
-          <a:ln w="19050">
-            <a:solidFill>
-              <a:srgbClr val="E8A33D"/>
-            </a:solidFill>
-            <a:prstDash val="solid"/>
-          </a:ln>
-        </p:spPr>
-      </p:sp>
-      <p:sp>
-        <p:nvSpPr>
-          <p:cNvPr id="32" name="Text 30"/>
-          <p:cNvSpPr/>
-          <p:nvPr/>
-        </p:nvSpPr>
-        <p:spPr>
-          <a:xfrm>
-            <a:off x="4297680" y="3913632"/>
-            <a:ext cx="1554480" cy="658368"/>
-          </a:xfrm>
-          <a:prstGeom prst="rect">
-            <a:avLst/>
-          </a:prstGeom>
-          <a:noFill/>
-          <a:ln/>
-        </p:spPr>
-        <p:txBody>
-          <a:bodyPr wrap="square" lIns="0" tIns="0" rIns="0" bIns="0" rtlCol="0" anchor="ctr"/>
-          <a:lstStyle/>
-          <a:p>
-            <a:pPr algn="ctr" indent="0" marL="0">
-              <a:lnSpc>
-                <a:spcPct val="105000"/>
-              </a:lnSpc>
-              <a:buNone/>
-            </a:pPr>
-            <a:r>
-              <a:rPr lang="en-US" sz="1050" b="1" dirty="0">
-                <a:solidFill>
-                  <a:srgbClr val="B87A1E"/>
-                </a:solidFill>
-                <a:latin typeface="Calibri" pitchFamily="34" charset="0"/>
-                <a:ea typeface="Calibri" pitchFamily="34" charset="-122"/>
-                <a:cs typeface="Calibri" pitchFamily="34" charset="-120"/>
-              </a:rPr>
-              <a:t>Отдел маркетинга</a:t>
-            </a:r>
-            <a:endParaRPr lang="en-US" sz="1050" dirty="0"/>
-          </a:p>
-        </p:txBody>
-      </p:sp>
-      <p:sp>
-        <p:nvSpPr>
-          <p:cNvPr id="33" name="Shape 31"/>
-          <p:cNvSpPr/>
-          <p:nvPr/>
-        </p:nvSpPr>
-        <p:spPr>
-          <a:xfrm>
-            <a:off x="5989320" y="3913632"/>
-            <a:ext cx="1554480" cy="658368"/>
-          </a:xfrm>
-          <a:prstGeom prst="roundRect">
-            <a:avLst>
-              <a:gd name="adj" fmla="val 11111"/>
-            </a:avLst>
-          </a:prstGeom>
-          <a:solidFill>
-            <a:srgbClr val="FBEED9"/>
-          </a:solidFill>
-          <a:ln w="19050">
-            <a:solidFill>
-              <a:srgbClr val="E8A33D"/>
-            </a:solidFill>
-            <a:prstDash val="solid"/>
-          </a:ln>
-        </p:spPr>
-      </p:sp>
-      <p:sp>
-        <p:nvSpPr>
-          <p:cNvPr id="34" name="Text 32"/>
-          <p:cNvSpPr/>
-          <p:nvPr/>
-        </p:nvSpPr>
-        <p:spPr>
-          <a:xfrm>
-            <a:off x="5989320" y="3913632"/>
-            <a:ext cx="1554480" cy="658368"/>
-          </a:xfrm>
-          <a:prstGeom prst="rect">
-            <a:avLst/>
-          </a:prstGeom>
-          <a:noFill/>
-          <a:ln/>
-        </p:spPr>
-        <p:txBody>
-          <a:bodyPr wrap="square" lIns="0" tIns="0" rIns="0" bIns="0" rtlCol="0" anchor="ctr"/>
-          <a:lstStyle/>
-          <a:p>
-            <a:pPr algn="ctr" indent="0" marL="0">
-              <a:lnSpc>
-                <a:spcPct val="105000"/>
-              </a:lnSpc>
-              <a:buNone/>
-            </a:pPr>
-            <a:r>
-              <a:rPr lang="en-US" sz="1050" b="1" dirty="0">
-                <a:solidFill>
-                  <a:srgbClr val="B87A1E"/>
-                </a:solidFill>
-                <a:latin typeface="Calibri" pitchFamily="34" charset="0"/>
-                <a:ea typeface="Calibri" pitchFamily="34" charset="-122"/>
-                <a:cs typeface="Calibri" pitchFamily="34" charset="-120"/>
-              </a:rPr>
-              <a:t>Юридический отдел</a:t>
-            </a:r>
-            <a:endParaRPr lang="en-US" sz="1050" dirty="0"/>
-          </a:p>
-        </p:txBody>
-      </p:sp>
-      <p:sp>
-        <p:nvSpPr>
-          <p:cNvPr id="35" name="Shape 33"/>
-          <p:cNvSpPr/>
-          <p:nvPr/>
-        </p:nvSpPr>
-        <p:spPr>
-          <a:xfrm>
-            <a:off x="7680960" y="3913632"/>
-            <a:ext cx="1554480" cy="658368"/>
-          </a:xfrm>
-          <a:prstGeom prst="roundRect">
-            <a:avLst>
-              <a:gd name="adj" fmla="val 11111"/>
-            </a:avLst>
-          </a:prstGeom>
-          <a:solidFill>
-            <a:srgbClr val="FBEED9"/>
-          </a:solidFill>
-          <a:ln w="19050">
-            <a:solidFill>
-              <a:srgbClr val="E8A33D"/>
-            </a:solidFill>
-            <a:prstDash val="solid"/>
-          </a:ln>
-        </p:spPr>
-      </p:sp>
-      <p:sp>
-        <p:nvSpPr>
-          <p:cNvPr id="36" name="Text 34"/>
-          <p:cNvSpPr/>
-          <p:nvPr/>
-        </p:nvSpPr>
-        <p:spPr>
-          <a:xfrm>
-            <a:off x="7680960" y="3913632"/>
-            <a:ext cx="1554480" cy="658368"/>
-          </a:xfrm>
-          <a:prstGeom prst="rect">
-            <a:avLst/>
-          </a:prstGeom>
-          <a:noFill/>
-          <a:ln/>
-        </p:spPr>
-        <p:txBody>
-          <a:bodyPr wrap="square" lIns="0" tIns="0" rIns="0" bIns="0" rtlCol="0" anchor="ctr"/>
-          <a:lstStyle/>
-          <a:p>
-            <a:pPr algn="ctr" indent="0" marL="0">
-              <a:lnSpc>
-                <a:spcPct val="105000"/>
-              </a:lnSpc>
-              <a:buNone/>
-            </a:pPr>
-            <a:r>
-              <a:rPr lang="en-US" sz="1050" b="1" dirty="0">
-                <a:solidFill>
-                  <a:srgbClr val="B87A1E"/>
-                </a:solidFill>
-                <a:latin typeface="Calibri" pitchFamily="34" charset="0"/>
-                <a:ea typeface="Calibri" pitchFamily="34" charset="-122"/>
-                <a:cs typeface="Calibri" pitchFamily="34" charset="-120"/>
-              </a:rPr>
-              <a:t>Бухгалтерия</a:t>
-            </a:r>
-            <a:endParaRPr lang="en-US" sz="1050" dirty="0"/>
-          </a:p>
-        </p:txBody>
-      </p:sp>
-      <p:sp>
-        <p:nvSpPr>
-          <p:cNvPr id="37" name="Shape 35"/>
-          <p:cNvSpPr/>
-          <p:nvPr/>
-        </p:nvSpPr>
-        <p:spPr>
-          <a:xfrm>
-            <a:off x="9464040" y="3913632"/>
-            <a:ext cx="1828800" cy="658368"/>
-          </a:xfrm>
-          <a:prstGeom prst="roundRect">
-            <a:avLst>
-              <a:gd name="adj" fmla="val 11111"/>
-            </a:avLst>
-          </a:prstGeom>
-          <a:solidFill>
-            <a:srgbClr val="FBE6E9"/>
-          </a:solidFill>
-          <a:ln w="19050">
-            <a:solidFill>
-              <a:srgbClr val="D1495B"/>
-            </a:solidFill>
-            <a:prstDash val="solid"/>
-          </a:ln>
-        </p:spPr>
-      </p:sp>
-      <p:sp>
-        <p:nvSpPr>
-          <p:cNvPr id="38" name="Text 36"/>
-          <p:cNvSpPr/>
-          <p:nvPr/>
-        </p:nvSpPr>
-        <p:spPr>
-          <a:xfrm>
-            <a:off x="9464040" y="3913632"/>
-            <a:ext cx="1828800" cy="658368"/>
-          </a:xfrm>
-          <a:prstGeom prst="rect">
-            <a:avLst/>
-          </a:prstGeom>
-          <a:noFill/>
-          <a:ln/>
-        </p:spPr>
-        <p:txBody>
-          <a:bodyPr wrap="square" lIns="0" tIns="0" rIns="0" bIns="0" rtlCol="0" anchor="ctr"/>
-          <a:lstStyle/>
-          <a:p>
-            <a:pPr algn="ctr" indent="0" marL="0">
-              <a:lnSpc>
-                <a:spcPct val="105000"/>
-              </a:lnSpc>
-              <a:buNone/>
-            </a:pPr>
-            <a:r>
-              <a:rPr lang="en-US" sz="1050" b="1" dirty="0">
-                <a:solidFill>
-                  <a:srgbClr val="D1495B"/>
-                </a:solidFill>
-                <a:latin typeface="Calibri" pitchFamily="34" charset="0"/>
-                <a:ea typeface="Calibri" pitchFamily="34" charset="-122"/>
-                <a:cs typeface="Calibri" pitchFamily="34" charset="-120"/>
-              </a:rPr>
-              <a:t>Топ-менеджмент</a:t>
-            </a:r>
-            <a:endParaRPr lang="en-US" sz="1050" dirty="0"/>
-          </a:p>
-        </p:txBody>
-      </p:sp>
-      <p:sp>
-        <p:nvSpPr>
-          <p:cNvPr id="39" name="Shape 37"/>
-          <p:cNvSpPr/>
-          <p:nvPr/>
-        </p:nvSpPr>
-        <p:spPr>
-          <a:xfrm>
-            <a:off x="1371600" y="4718304"/>
-            <a:ext cx="1920240" cy="310896"/>
-          </a:xfrm>
-          <a:prstGeom prst="roundRect">
-            <a:avLst>
-              <a:gd name="adj" fmla="val 50000"/>
-            </a:avLst>
-          </a:prstGeom>
-          <a:solidFill>
-            <a:srgbClr val="E4ECFD"/>
-          </a:solidFill>
-          <a:ln/>
-        </p:spPr>
-      </p:sp>
-      <p:sp>
-        <p:nvSpPr>
-          <p:cNvPr id="40" name="Text 38"/>
-          <p:cNvSpPr/>
-          <p:nvPr/>
-        </p:nvSpPr>
-        <p:spPr>
-          <a:xfrm>
-            <a:off x="1417320" y="4718304"/>
-            <a:ext cx="1828800" cy="310896"/>
-          </a:xfrm>
-          <a:prstGeom prst="rect">
-            <a:avLst/>
-          </a:prstGeom>
-          <a:noFill/>
-          <a:ln/>
-        </p:spPr>
-        <p:txBody>
-          <a:bodyPr wrap="square" lIns="0" tIns="0" rIns="0" bIns="0" rtlCol="0" anchor="ctr"/>
-          <a:lstStyle/>
-          <a:p>
-            <a:pPr algn="ctr" indent="0" marL="0">
-              <a:buNone/>
-            </a:pPr>
-            <a:r>
-              <a:rPr lang="en-US" sz="1050" b="1" dirty="0">
-                <a:solidFill>
-                  <a:srgbClr val="1E4FB8"/>
-                </a:solidFill>
-                <a:latin typeface="Calibri" pitchFamily="34" charset="0"/>
-                <a:ea typeface="Calibri" pitchFamily="34" charset="-122"/>
-                <a:cs typeface="Calibri" pitchFamily="34" charset="-120"/>
-              </a:rPr>
-              <a:t>Сотрудник</a:t>
-            </a:r>
-            <a:endParaRPr lang="en-US" sz="1050" dirty="0"/>
-          </a:p>
-        </p:txBody>
-      </p:sp>
-      <p:sp>
-        <p:nvSpPr>
-          <p:cNvPr id="41" name="Shape 39"/>
-          <p:cNvSpPr/>
-          <p:nvPr/>
-        </p:nvSpPr>
-        <p:spPr>
-          <a:xfrm>
-            <a:off x="4288536" y="4718304"/>
-            <a:ext cx="1572768" cy="310896"/>
-          </a:xfrm>
-          <a:prstGeom prst="roundRect">
-            <a:avLst>
-              <a:gd name="adj" fmla="val 50000"/>
-            </a:avLst>
-          </a:prstGeom>
-          <a:solidFill>
-            <a:srgbClr val="FBEED9"/>
-          </a:solidFill>
-          <a:ln/>
-        </p:spPr>
-      </p:sp>
-      <p:sp>
-        <p:nvSpPr>
-          <p:cNvPr id="42" name="Text 40"/>
-          <p:cNvSpPr/>
-          <p:nvPr/>
-        </p:nvSpPr>
-        <p:spPr>
-          <a:xfrm>
-            <a:off x="4334256" y="4718304"/>
-            <a:ext cx="1481328" cy="310896"/>
-          </a:xfrm>
-          <a:prstGeom prst="rect">
-            <a:avLst/>
-          </a:prstGeom>
-          <a:noFill/>
-          <a:ln/>
-        </p:spPr>
-        <p:txBody>
-          <a:bodyPr wrap="square" lIns="0" tIns="0" rIns="0" bIns="0" rtlCol="0" anchor="ctr"/>
-          <a:lstStyle/>
-          <a:p>
-            <a:pPr algn="ctr" indent="0" marL="0">
-              <a:buNone/>
-            </a:pPr>
-            <a:r>
-              <a:rPr lang="en-US" sz="850" b="1" dirty="0">
-                <a:solidFill>
-                  <a:srgbClr val="B87A1E"/>
-                </a:solidFill>
-                <a:latin typeface="Calibri" pitchFamily="34" charset="0"/>
-                <a:ea typeface="Calibri" pitchFamily="34" charset="-122"/>
-                <a:cs typeface="Calibri" pitchFamily="34" charset="-120"/>
-              </a:rPr>
-              <a:t>Нач. маркетинга</a:t>
-            </a:r>
-            <a:endParaRPr lang="en-US" sz="850" dirty="0"/>
-          </a:p>
-        </p:txBody>
-      </p:sp>
-      <p:sp>
-        <p:nvSpPr>
-          <p:cNvPr id="43" name="Shape 41"/>
-          <p:cNvSpPr/>
-          <p:nvPr/>
-        </p:nvSpPr>
-        <p:spPr>
-          <a:xfrm>
-            <a:off x="5980176" y="4718304"/>
-            <a:ext cx="1572768" cy="310896"/>
-          </a:xfrm>
-          <a:prstGeom prst="roundRect">
-            <a:avLst>
-              <a:gd name="adj" fmla="val 50000"/>
-            </a:avLst>
-          </a:prstGeom>
-          <a:solidFill>
-            <a:srgbClr val="FBEED9"/>
-          </a:solidFill>
-          <a:ln/>
-        </p:spPr>
-      </p:sp>
-      <p:sp>
-        <p:nvSpPr>
-          <p:cNvPr id="44" name="Text 42"/>
-          <p:cNvSpPr/>
-          <p:nvPr/>
-        </p:nvSpPr>
-        <p:spPr>
-          <a:xfrm>
-            <a:off x="6025896" y="4718304"/>
-            <a:ext cx="1481328" cy="310896"/>
-          </a:xfrm>
-          <a:prstGeom prst="rect">
-            <a:avLst/>
-          </a:prstGeom>
-          <a:noFill/>
-          <a:ln/>
-        </p:spPr>
-        <p:txBody>
-          <a:bodyPr wrap="square" lIns="0" tIns="0" rIns="0" bIns="0" rtlCol="0" anchor="ctr"/>
-          <a:lstStyle/>
-          <a:p>
-            <a:pPr algn="ctr" indent="0" marL="0">
-              <a:buNone/>
-            </a:pPr>
-            <a:r>
-              <a:rPr lang="en-US" sz="850" b="1" dirty="0">
-                <a:solidFill>
-                  <a:srgbClr val="B87A1E"/>
-                </a:solidFill>
-                <a:latin typeface="Calibri" pitchFamily="34" charset="0"/>
-                <a:ea typeface="Calibri" pitchFamily="34" charset="-122"/>
-                <a:cs typeface="Calibri" pitchFamily="34" charset="-120"/>
-              </a:rPr>
-              <a:t>Нач. юротдела</a:t>
-            </a:r>
-            <a:endParaRPr lang="en-US" sz="850" dirty="0"/>
-          </a:p>
-        </p:txBody>
-      </p:sp>
-      <p:sp>
-        <p:nvSpPr>
-          <p:cNvPr id="45" name="Shape 43"/>
-          <p:cNvSpPr/>
-          <p:nvPr/>
-        </p:nvSpPr>
-        <p:spPr>
-          <a:xfrm>
-            <a:off x="7671816" y="4718304"/>
-            <a:ext cx="1572768" cy="310896"/>
-          </a:xfrm>
-          <a:prstGeom prst="roundRect">
-            <a:avLst>
-              <a:gd name="adj" fmla="val 50000"/>
-            </a:avLst>
-          </a:prstGeom>
-          <a:solidFill>
-            <a:srgbClr val="FBEED9"/>
-          </a:solidFill>
-          <a:ln/>
-        </p:spPr>
-      </p:sp>
-      <p:sp>
-        <p:nvSpPr>
-          <p:cNvPr id="46" name="Text 44"/>
-          <p:cNvSpPr/>
-          <p:nvPr/>
-        </p:nvSpPr>
-        <p:spPr>
-          <a:xfrm>
-            <a:off x="7717536" y="4718304"/>
-            <a:ext cx="1481328" cy="310896"/>
-          </a:xfrm>
-          <a:prstGeom prst="rect">
-            <a:avLst/>
-          </a:prstGeom>
-          <a:noFill/>
-          <a:ln/>
-        </p:spPr>
-        <p:txBody>
-          <a:bodyPr wrap="square" lIns="0" tIns="0" rIns="0" bIns="0" rtlCol="0" anchor="ctr"/>
-          <a:lstStyle/>
-          <a:p>
-            <a:pPr algn="ctr" indent="0" marL="0">
-              <a:buNone/>
-            </a:pPr>
-            <a:r>
-              <a:rPr lang="en-US" sz="850" b="1" dirty="0">
-                <a:solidFill>
-                  <a:srgbClr val="B87A1E"/>
-                </a:solidFill>
-                <a:latin typeface="Calibri" pitchFamily="34" charset="0"/>
-                <a:ea typeface="Calibri" pitchFamily="34" charset="-122"/>
-                <a:cs typeface="Calibri" pitchFamily="34" charset="-120"/>
-              </a:rPr>
-              <a:t>Гл. бухгалтер</a:t>
-            </a:r>
-            <a:endParaRPr lang="en-US" sz="850" dirty="0"/>
-          </a:p>
-        </p:txBody>
-      </p:sp>
-      <p:sp>
-        <p:nvSpPr>
-          <p:cNvPr id="47" name="Text 45"/>
-          <p:cNvSpPr/>
-          <p:nvPr/>
-        </p:nvSpPr>
-        <p:spPr>
-          <a:xfrm>
-            <a:off x="9372600" y="4718304"/>
-            <a:ext cx="2011680" cy="310896"/>
-          </a:xfrm>
-          <a:prstGeom prst="rect">
-            <a:avLst/>
-          </a:prstGeom>
-          <a:noFill/>
-          <a:ln/>
-        </p:spPr>
-        <p:txBody>
-          <a:bodyPr wrap="square" lIns="0" tIns="0" rIns="0" bIns="0" rtlCol="0" anchor="ctr"/>
-          <a:lstStyle/>
-          <a:p>
-            <a:pPr algn="ctr" indent="0" marL="0">
-              <a:buNone/>
-            </a:pPr>
-            <a:r>
-              <a:rPr lang="en-US" sz="900" i="1" dirty="0">
-                <a:solidFill>
-                  <a:srgbClr val="D1495B"/>
-                </a:solidFill>
-                <a:latin typeface="Calibri" pitchFamily="34" charset="0"/>
-                <a:ea typeface="Calibri" pitchFamily="34" charset="-122"/>
-                <a:cs typeface="Calibri" pitchFamily="34" charset="-120"/>
-              </a:rPr>
-              <a:t>самый узкий круг доступа</a:t>
-            </a:r>
-            <a:endParaRPr lang="en-US" sz="900" dirty="0"/>
-          </a:p>
-        </p:txBody>
-      </p:sp>
-      <p:sp>
-        <p:nvSpPr>
-          <p:cNvPr id="48" name="Shape 46"/>
-          <p:cNvSpPr/>
-          <p:nvPr/>
-        </p:nvSpPr>
-        <p:spPr>
-          <a:xfrm>
-            <a:off x="7330745" y="1732788"/>
+          <p:cNvPr id="20" name="Shape 18"/>
+          <p:cNvSpPr/>
+          <p:nvPr/>
+        </p:nvSpPr>
+        <p:spPr>
+          <a:xfrm>
+            <a:off x="7467905" y="1805940"/>
             <a:ext cx="502920" cy="0"/>
           </a:xfrm>
           <a:prstGeom prst="line">
@@ -4360,14 +3525,14 @@
       </p:sp>
       <p:sp>
         <p:nvSpPr>
-          <p:cNvPr id="49" name="Shape 47"/>
-          <p:cNvSpPr/>
-          <p:nvPr/>
-        </p:nvSpPr>
-        <p:spPr>
-          <a:xfrm>
-            <a:off x="7833665" y="1504188"/>
-            <a:ext cx="2331720" cy="457200"/>
+          <p:cNvPr id="21" name="Shape 19"/>
+          <p:cNvSpPr/>
+          <p:nvPr/>
+        </p:nvSpPr>
+        <p:spPr>
+          <a:xfrm>
+            <a:off x="7970825" y="1577340"/>
+            <a:ext cx="2377440" cy="457200"/>
           </a:xfrm>
           <a:prstGeom prst="roundRect">
             <a:avLst>
@@ -4382,14 +3547,14 @@
       </p:sp>
       <p:sp>
         <p:nvSpPr>
-          <p:cNvPr id="50" name="Text 48"/>
-          <p:cNvSpPr/>
-          <p:nvPr/>
-        </p:nvSpPr>
-        <p:spPr>
-          <a:xfrm>
-            <a:off x="7925105" y="1504188"/>
-            <a:ext cx="2148840" cy="457200"/>
+          <p:cNvPr id="22" name="Text 20"/>
+          <p:cNvSpPr/>
+          <p:nvPr/>
+        </p:nvSpPr>
+        <p:spPr>
+          <a:xfrm>
+            <a:off x="8062265" y="1577340"/>
+            <a:ext cx="2194560" cy="457200"/>
           </a:xfrm>
           <a:prstGeom prst="rect">
             <a:avLst/>
@@ -4424,14 +3589,14 @@
       </p:sp>
       <p:sp>
         <p:nvSpPr>
-          <p:cNvPr id="51" name="Text 49"/>
-          <p:cNvSpPr/>
-          <p:nvPr/>
-        </p:nvSpPr>
-        <p:spPr>
-          <a:xfrm>
-            <a:off x="548640" y="5230368"/>
-            <a:ext cx="11094415" cy="365760"/>
+          <p:cNvPr id="23" name="Text 21"/>
+          <p:cNvSpPr/>
+          <p:nvPr/>
+        </p:nvSpPr>
+        <p:spPr>
+          <a:xfrm>
+            <a:off x="548640" y="4983480"/>
+            <a:ext cx="11094415" cy="502920"/>
           </a:xfrm>
           <a:prstGeom prst="rect">
             <a:avLst/>
@@ -4444,6 +3609,9 @@
           <a:lstStyle/>
           <a:p>
             <a:pPr algn="ctr" indent="0" marL="0">
+              <a:lnSpc>
+                <a:spcPct val="120000"/>
+              </a:lnSpc>
               <a:buNone/>
             </a:pPr>
             <a:r>
@@ -4455,7 +3623,7 @@
                 <a:ea typeface="Calibri" pitchFamily="34" charset="-122"/>
                 <a:cs typeface="Calibri" pitchFamily="34" charset="-120"/>
               </a:rPr>
-              <a:t>«Общее», «Оклады» и «Личные дела» — три независимые ветки одного домена: ни одна не наследует и не ограничивает видимость другой.</a:t>
+              <a:t>«Список сотрудников» — единственный потомок домена «Кадры»; «Отпускные», «Больничные» и «Оклады» — единственные потомки «Список сотрудников». Этот же узел появится ещё в двух доменах на следующем слайде.</a:t>
             </a:r>
             <a:endParaRPr lang="en-US" sz="1200" dirty="0"/>
           </a:p>
@@ -4463,7 +3631,7 @@
       </p:sp>
       <p:sp>
         <p:nvSpPr>
-          <p:cNvPr id="52" name="Text 50"/>
+          <p:cNvPr id="24" name="Text 22"/>
           <p:cNvSpPr/>
           <p:nvPr/>
         </p:nvSpPr>
@@ -4502,7 +3670,7 @@
       </p:sp>
       <p:sp>
         <p:nvSpPr>
-          <p:cNvPr id="53" name="Text 51"/>
+          <p:cNvPr id="25" name="Text 23"/>
           <p:cNvSpPr/>
           <p:nvPr/>
         </p:nvSpPr>
@@ -4541,7 +3709,7 @@
       </p:sp>
       <p:sp>
         <p:nvSpPr>
-          <p:cNvPr id="54" name="Text 52"/>
+          <p:cNvPr id="26" name="Text 24"/>
           <p:cNvSpPr/>
           <p:nvPr/>
         </p:nvSpPr>
@@ -4685,7 +3853,7 @@
                 <a:ea typeface="Cambria" pitchFamily="34" charset="-122"/>
                 <a:cs typeface="Cambria" pitchFamily="34" charset="-120"/>
               </a:rPr>
-              <a:t>«Список сотрудников» — один каталог, узел сразу в двух деревьях</a:t>
+              <a:t>«Список сотрудников» — общий узел сразу трёх доменов</a:t>
             </a:r>
             <a:endParaRPr lang="en-US" sz="2500" dirty="0"/>
           </a:p>
@@ -4700,7 +3868,7 @@
         <p:spPr>
           <a:xfrm>
             <a:off x="548640" y="1481328"/>
-            <a:ext cx="11094415" cy="713232"/>
+            <a:ext cx="11094415" cy="475488"/>
           </a:xfrm>
           <a:prstGeom prst="rect">
             <a:avLst/>
@@ -4714,12 +3882,12 @@
           <a:p>
             <a:pPr indent="0" marL="0">
               <a:lnSpc>
-                <a:spcPct val="126000"/>
+                <a:spcPct val="124000"/>
               </a:lnSpc>
               <a:buNone/>
             </a:pPr>
             <a:r>
-              <a:rPr lang="en-US" sz="1300" dirty="0">
+              <a:rPr lang="en-US" sz="1250" dirty="0">
                 <a:solidFill>
                   <a:srgbClr val="5B6472"/>
                 </a:solidFill>
@@ -4727,9 +3895,9 @@
                 <a:ea typeface="Calibri" pitchFamily="34" charset="-122"/>
                 <a:cs typeface="Calibri" pitchFamily="34" charset="-120"/>
               </a:rPr>
-              <a:t>Каталог не обязан быть листом только одного домена. «Список сотрудников» естественно ведётся в «Кадры», но нужен и в «Продажи» — чтобы искать, чей сотрудник кто. Правило «только вниз» при этом не меняется: оно просто применяется дважды, в двух независимых деревьях.</a:t>
-            </a:r>
-            <a:endParaRPr lang="en-US" sz="1300" dirty="0"/>
+              <a:t>Каталог не обязан быть листом только одного домена. «Список сотрудников» одновременно нужен трём независимым доменам — «Кадры», «Маркетинг», «Логистика» — и наследуется в каждом сверху вниз, как обычно.</a:t>
+            </a:r>
+            <a:endParaRPr lang="en-US" sz="1250" dirty="0"/>
           </a:p>
         </p:txBody>
       </p:sp>
@@ -4741,12 +3909,12 @@
         </p:nvSpPr>
         <p:spPr>
           <a:xfrm>
-            <a:off x="1783080" y="2286000"/>
-            <a:ext cx="2468880" cy="457200"/>
+            <a:off x="1417320" y="2048256"/>
+            <a:ext cx="2103120" cy="384048"/>
           </a:xfrm>
           <a:prstGeom prst="roundRect">
             <a:avLst>
-              <a:gd name="adj" fmla="val 16000"/>
+              <a:gd name="adj" fmla="val 19048"/>
             </a:avLst>
           </a:prstGeom>
           <a:solidFill>
@@ -4763,8 +3931,8 @@
         </p:nvSpPr>
         <p:spPr>
           <a:xfrm>
-            <a:off x="1783080" y="2286000"/>
-            <a:ext cx="2468880" cy="457200"/>
+            <a:off x="1417320" y="2048256"/>
+            <a:ext cx="2103120" cy="384048"/>
           </a:xfrm>
           <a:prstGeom prst="rect">
             <a:avLst/>
@@ -4780,7 +3948,7 @@
               <a:buNone/>
             </a:pPr>
             <a:r>
-              <a:rPr lang="en-US" sz="1300" b="1" dirty="0">
+              <a:rPr lang="en-US" sz="1100" b="1" dirty="0">
                 <a:solidFill>
                   <a:srgbClr val="FFFFFF"/>
                 </a:solidFill>
@@ -4788,9 +3956,9 @@
                 <a:ea typeface="Calibri" pitchFamily="34" charset="-122"/>
                 <a:cs typeface="Calibri" pitchFamily="34" charset="-120"/>
               </a:rPr>
-              <a:t>ДОМЕН «КАДРЫ»</a:t>
-            </a:r>
-            <a:endParaRPr lang="en-US" sz="1300" dirty="0"/>
+              <a:t>ДОМЕН «МАРКЕТИНГ»</a:t>
+            </a:r>
+            <a:endParaRPr lang="en-US" sz="1100" dirty="0"/>
           </a:p>
         </p:txBody>
       </p:sp>
@@ -4802,12 +3970,12 @@
         </p:nvSpPr>
         <p:spPr>
           <a:xfrm>
-            <a:off x="7909560" y="2286000"/>
-            <a:ext cx="2468880" cy="457200"/>
+            <a:off x="5044745" y="2048256"/>
+            <a:ext cx="2103120" cy="384048"/>
           </a:xfrm>
           <a:prstGeom prst="roundRect">
             <a:avLst>
-              <a:gd name="adj" fmla="val 16000"/>
+              <a:gd name="adj" fmla="val 19048"/>
             </a:avLst>
           </a:prstGeom>
           <a:solidFill>
@@ -4824,8 +3992,8 @@
         </p:nvSpPr>
         <p:spPr>
           <a:xfrm>
-            <a:off x="7909560" y="2286000"/>
-            <a:ext cx="2468880" cy="457200"/>
+            <a:off x="5044745" y="2048256"/>
+            <a:ext cx="2103120" cy="384048"/>
           </a:xfrm>
           <a:prstGeom prst="rect">
             <a:avLst/>
@@ -4841,7 +4009,7 @@
               <a:buNone/>
             </a:pPr>
             <a:r>
-              <a:rPr lang="en-US" sz="1300" b="1" dirty="0">
+              <a:rPr lang="en-US" sz="1100" b="1" dirty="0">
                 <a:solidFill>
                   <a:srgbClr val="FFFFFF"/>
                 </a:solidFill>
@@ -4849,22 +4017,83 @@
                 <a:ea typeface="Calibri" pitchFamily="34" charset="-122"/>
                 <a:cs typeface="Calibri" pitchFamily="34" charset="-120"/>
               </a:rPr>
-              <a:t>ДОМЕН «ПРОДАЖИ»</a:t>
-            </a:r>
-            <a:endParaRPr lang="en-US" sz="1300" dirty="0"/>
-          </a:p>
-        </p:txBody>
-      </p:sp>
-      <p:sp>
-        <p:nvSpPr>
-          <p:cNvPr id="9" name="Text 7"/>
-          <p:cNvSpPr/>
-          <p:nvPr/>
-        </p:nvSpPr>
-        <p:spPr>
-          <a:xfrm>
-            <a:off x="548640" y="2313432"/>
-            <a:ext cx="1097280" cy="402336"/>
+              <a:t>ДОМЕН «КАДРЫ»</a:t>
+            </a:r>
+            <a:endParaRPr lang="en-US" sz="1100" dirty="0"/>
+          </a:p>
+        </p:txBody>
+      </p:sp>
+      <p:sp>
+        <p:nvSpPr>
+          <p:cNvPr id="9" name="Shape 7"/>
+          <p:cNvSpPr/>
+          <p:nvPr/>
+        </p:nvSpPr>
+        <p:spPr>
+          <a:xfrm>
+            <a:off x="8668512" y="2048256"/>
+            <a:ext cx="2103120" cy="384048"/>
+          </a:xfrm>
+          <a:prstGeom prst="roundRect">
+            <a:avLst>
+              <a:gd name="adj" fmla="val 19048"/>
+            </a:avLst>
+          </a:prstGeom>
+          <a:solidFill>
+            <a:srgbClr val="2C3140"/>
+          </a:solidFill>
+          <a:ln/>
+        </p:spPr>
+      </p:sp>
+      <p:sp>
+        <p:nvSpPr>
+          <p:cNvPr id="10" name="Text 8"/>
+          <p:cNvSpPr/>
+          <p:nvPr/>
+        </p:nvSpPr>
+        <p:spPr>
+          <a:xfrm>
+            <a:off x="8668512" y="2048256"/>
+            <a:ext cx="2103120" cy="384048"/>
+          </a:xfrm>
+          <a:prstGeom prst="rect">
+            <a:avLst/>
+          </a:prstGeom>
+          <a:noFill/>
+          <a:ln/>
+        </p:spPr>
+        <p:txBody>
+          <a:bodyPr wrap="square" lIns="0" tIns="0" rIns="0" bIns="0" rtlCol="0" anchor="ctr"/>
+          <a:lstStyle/>
+          <a:p>
+            <a:pPr algn="ctr" indent="0" marL="0">
+              <a:buNone/>
+            </a:pPr>
+            <a:r>
+              <a:rPr lang="en-US" sz="1100" b="1" dirty="0">
+                <a:solidFill>
+                  <a:srgbClr val="FFFFFF"/>
+                </a:solidFill>
+                <a:latin typeface="Calibri" pitchFamily="34" charset="0"/>
+                <a:ea typeface="Calibri" pitchFamily="34" charset="-122"/>
+                <a:cs typeface="Calibri" pitchFamily="34" charset="-120"/>
+              </a:rPr>
+              <a:t>ДОМЕН «ЛОГИСТИКА»</a:t>
+            </a:r>
+            <a:endParaRPr lang="en-US" sz="1100" dirty="0"/>
+          </a:p>
+        </p:txBody>
+      </p:sp>
+      <p:sp>
+        <p:nvSpPr>
+          <p:cNvPr id="11" name="Text 9"/>
+          <p:cNvSpPr/>
+          <p:nvPr/>
+        </p:nvSpPr>
+        <p:spPr>
+          <a:xfrm>
+            <a:off x="548640" y="2066544"/>
+            <a:ext cx="777240" cy="347472"/>
           </a:xfrm>
           <a:prstGeom prst="rect">
             <a:avLst/>
@@ -4878,12 +4107,12 @@
           <a:p>
             <a:pPr algn="r" indent="0" marL="0">
               <a:lnSpc>
-                <a:spcPct val="105000"/>
+                <a:spcPct val="100000"/>
               </a:lnSpc>
               <a:buNone/>
             </a:pPr>
             <a:r>
-              <a:rPr lang="en-US" sz="850" i="1" dirty="0">
+              <a:rPr lang="en-US" sz="800" i="1" dirty="0">
                 <a:solidFill>
                   <a:srgbClr val="5B6472"/>
                 </a:solidFill>
@@ -4893,20 +4122,20 @@
               </a:rPr>
               <a:t>не всё дерево показано</a:t>
             </a:r>
-            <a:endParaRPr lang="en-US" sz="850" dirty="0"/>
-          </a:p>
-        </p:txBody>
-      </p:sp>
-      <p:sp>
-        <p:nvSpPr>
-          <p:cNvPr id="10" name="Text 8"/>
-          <p:cNvSpPr/>
-          <p:nvPr/>
-        </p:nvSpPr>
-        <p:spPr>
-          <a:xfrm>
-            <a:off x="10515600" y="2313432"/>
-            <a:ext cx="1127455" cy="402336"/>
+            <a:endParaRPr lang="en-US" sz="800" dirty="0"/>
+          </a:p>
+        </p:txBody>
+      </p:sp>
+      <p:sp>
+        <p:nvSpPr>
+          <p:cNvPr id="12" name="Text 10"/>
+          <p:cNvSpPr/>
+          <p:nvPr/>
+        </p:nvSpPr>
+        <p:spPr>
+          <a:xfrm>
+            <a:off x="10863072" y="2066544"/>
+            <a:ext cx="779983" cy="347472"/>
           </a:xfrm>
           <a:prstGeom prst="rect">
             <a:avLst/>
@@ -4920,12 +4149,12 @@
           <a:p>
             <a:pPr algn="l" indent="0" marL="0">
               <a:lnSpc>
-                <a:spcPct val="105000"/>
+                <a:spcPct val="100000"/>
               </a:lnSpc>
               <a:buNone/>
             </a:pPr>
             <a:r>
-              <a:rPr lang="en-US" sz="850" i="1" dirty="0">
+              <a:rPr lang="en-US" sz="800" i="1" dirty="0">
                 <a:solidFill>
                   <a:srgbClr val="5B6472"/>
                 </a:solidFill>
@@ -4935,20 +4164,20 @@
               </a:rPr>
               <a:t>не всё дерево показано</a:t>
             </a:r>
-            <a:endParaRPr lang="en-US" sz="850" dirty="0"/>
-          </a:p>
-        </p:txBody>
-      </p:sp>
-      <p:sp>
-        <p:nvSpPr>
-          <p:cNvPr id="11" name="Shape 9"/>
-          <p:cNvSpPr/>
-          <p:nvPr/>
-        </p:nvSpPr>
-        <p:spPr>
-          <a:xfrm>
-            <a:off x="3017520" y="2743200"/>
-            <a:ext cx="2027225" cy="1207008"/>
+            <a:endParaRPr lang="en-US" sz="800" dirty="0"/>
+          </a:p>
+        </p:txBody>
+      </p:sp>
+      <p:sp>
+        <p:nvSpPr>
+          <p:cNvPr id="13" name="Shape 11"/>
+          <p:cNvSpPr/>
+          <p:nvPr/>
+        </p:nvSpPr>
+        <p:spPr>
+          <a:xfrm>
+            <a:off x="2468880" y="2432304"/>
+            <a:ext cx="2438705" cy="777240"/>
           </a:xfrm>
           <a:prstGeom prst="line">
             <a:avLst/>
@@ -4964,14 +4193,14 @@
       </p:sp>
       <p:sp>
         <p:nvSpPr>
-          <p:cNvPr id="12" name="Shape 10"/>
-          <p:cNvSpPr/>
-          <p:nvPr/>
-        </p:nvSpPr>
-        <p:spPr>
-          <a:xfrm>
-            <a:off x="7147865" y="2743200"/>
-            <a:ext cx="1996135" cy="1207008"/>
+          <p:cNvPr id="14" name="Shape 12"/>
+          <p:cNvSpPr/>
+          <p:nvPr/>
+        </p:nvSpPr>
+        <p:spPr>
+          <a:xfrm>
+            <a:off x="6096305" y="2432304"/>
+            <a:ext cx="0" cy="777240"/>
           </a:xfrm>
           <a:prstGeom prst="line">
             <a:avLst/>
@@ -4987,146 +4216,41 @@
       </p:sp>
       <p:sp>
         <p:nvSpPr>
-          <p:cNvPr id="13" name="Text 11"/>
-          <p:cNvSpPr/>
-          <p:nvPr/>
-        </p:nvSpPr>
-        <p:spPr>
-          <a:xfrm>
-            <a:off x="3253892" y="3145536"/>
-            <a:ext cx="1554480" cy="402336"/>
-          </a:xfrm>
-          <a:prstGeom prst="rect">
-            <a:avLst/>
-          </a:prstGeom>
-          <a:solidFill>
-            <a:srgbClr val="FFFFFF"/>
-          </a:solidFill>
-          <a:ln/>
-        </p:spPr>
-        <p:txBody>
-          <a:bodyPr wrap="square" lIns="0" tIns="0" rIns="0" bIns="0" rtlCol="0" anchor="ctr"/>
-          <a:lstStyle/>
-          <a:p>
-            <a:pPr algn="ctr" indent="0" marL="0">
-              <a:lnSpc>
-                <a:spcPct val="105000"/>
-              </a:lnSpc>
-              <a:buNone/>
-            </a:pPr>
-            <a:r>
-              <a:rPr lang="en-US" sz="850" b="1" dirty="0">
-                <a:solidFill>
-                  <a:srgbClr val="1E4FB8"/>
-                </a:solidFill>
-                <a:latin typeface="Calibri" pitchFamily="34" charset="0"/>
-                <a:ea typeface="Calibri" pitchFamily="34" charset="-122"/>
-                <a:cs typeface="Calibri" pitchFamily="34" charset="-120"/>
-              </a:rPr>
-              <a:t>потомок в «Кадры»</a:t>
-            </a:r>
-            <a:endParaRPr lang="en-US" sz="850" dirty="0"/>
-          </a:p>
-          <a:p>
-            <a:pPr algn="ctr" indent="0" marL="0">
-              <a:lnSpc>
-                <a:spcPct val="105000"/>
-              </a:lnSpc>
-              <a:buNone/>
-            </a:pPr>
-            <a:r>
-              <a:rPr lang="en-US" sz="850" b="1" dirty="0">
-                <a:solidFill>
-                  <a:srgbClr val="1E4FB8"/>
-                </a:solidFill>
-                <a:latin typeface="Calibri" pitchFamily="34" charset="0"/>
-                <a:ea typeface="Calibri" pitchFamily="34" charset="-122"/>
-                <a:cs typeface="Calibri" pitchFamily="34" charset="-120"/>
-              </a:rPr>
-              <a:t>(вниз, как обычно)</a:t>
-            </a:r>
-            <a:endParaRPr lang="en-US" sz="850" dirty="0"/>
-          </a:p>
-        </p:txBody>
-      </p:sp>
-      <p:sp>
-        <p:nvSpPr>
-          <p:cNvPr id="14" name="Text 12"/>
-          <p:cNvSpPr/>
-          <p:nvPr/>
-        </p:nvSpPr>
-        <p:spPr>
-          <a:xfrm>
-            <a:off x="7368692" y="3145536"/>
-            <a:ext cx="1554480" cy="402336"/>
-          </a:xfrm>
-          <a:prstGeom prst="rect">
-            <a:avLst/>
-          </a:prstGeom>
-          <a:solidFill>
-            <a:srgbClr val="FFFFFF"/>
-          </a:solidFill>
-          <a:ln/>
-        </p:spPr>
-        <p:txBody>
-          <a:bodyPr wrap="square" lIns="0" tIns="0" rIns="0" bIns="0" rtlCol="0" anchor="ctr"/>
-          <a:lstStyle/>
-          <a:p>
-            <a:pPr algn="ctr" indent="0" marL="0">
-              <a:lnSpc>
-                <a:spcPct val="105000"/>
-              </a:lnSpc>
-              <a:buNone/>
-            </a:pPr>
-            <a:r>
-              <a:rPr lang="en-US" sz="850" b="1" dirty="0">
-                <a:solidFill>
-                  <a:srgbClr val="1E4FB8"/>
-                </a:solidFill>
-                <a:latin typeface="Calibri" pitchFamily="34" charset="0"/>
-                <a:ea typeface="Calibri" pitchFamily="34" charset="-122"/>
-                <a:cs typeface="Calibri" pitchFamily="34" charset="-120"/>
-              </a:rPr>
-              <a:t>потомок в «Продажи»</a:t>
-            </a:r>
-            <a:endParaRPr lang="en-US" sz="850" dirty="0"/>
-          </a:p>
-          <a:p>
-            <a:pPr algn="ctr" indent="0" marL="0">
-              <a:lnSpc>
-                <a:spcPct val="105000"/>
-              </a:lnSpc>
-              <a:buNone/>
-            </a:pPr>
-            <a:r>
-              <a:rPr lang="en-US" sz="850" b="1" dirty="0">
-                <a:solidFill>
-                  <a:srgbClr val="1E4FB8"/>
-                </a:solidFill>
-                <a:latin typeface="Calibri" pitchFamily="34" charset="0"/>
-                <a:ea typeface="Calibri" pitchFamily="34" charset="-122"/>
-                <a:cs typeface="Calibri" pitchFamily="34" charset="-120"/>
-              </a:rPr>
-              <a:t>(вниз, как обычно)</a:t>
-            </a:r>
-            <a:endParaRPr lang="en-US" sz="850" dirty="0"/>
-          </a:p>
-        </p:txBody>
-      </p:sp>
-      <p:sp>
-        <p:nvSpPr>
           <p:cNvPr id="15" name="Shape 13"/>
           <p:cNvSpPr/>
           <p:nvPr/>
         </p:nvSpPr>
         <p:spPr>
           <a:xfrm>
-            <a:off x="4541825" y="3950208"/>
-            <a:ext cx="3108960" cy="566928"/>
+            <a:off x="7285025" y="2432304"/>
+            <a:ext cx="2435047" cy="777240"/>
+          </a:xfrm>
+          <a:prstGeom prst="line">
+            <a:avLst/>
+          </a:prstGeom>
+          <a:noFill/>
+          <a:ln w="25400">
+            <a:solidFill>
+              <a:srgbClr val="2F6FED"/>
+            </a:solidFill>
+            <a:prstDash val="solid"/>
+          </a:ln>
+        </p:spPr>
+      </p:sp>
+      <p:sp>
+        <p:nvSpPr>
+          <p:cNvPr id="16" name="Shape 14"/>
+          <p:cNvSpPr/>
+          <p:nvPr/>
+        </p:nvSpPr>
+        <p:spPr>
+          <a:xfrm>
+            <a:off x="4541825" y="3209544"/>
+            <a:ext cx="3108960" cy="502920"/>
           </a:xfrm>
           <a:prstGeom prst="roundRect">
             <a:avLst>
-              <a:gd name="adj" fmla="val 14516"/>
+              <a:gd name="adj" fmla="val 16364"/>
             </a:avLst>
           </a:prstGeom>
           <a:solidFill>
@@ -5142,14 +4266,14 @@
       </p:sp>
       <p:sp>
         <p:nvSpPr>
-          <p:cNvPr id="16" name="Text 14"/>
-          <p:cNvSpPr/>
-          <p:nvPr/>
-        </p:nvSpPr>
-        <p:spPr>
-          <a:xfrm>
-            <a:off x="4541825" y="3950208"/>
-            <a:ext cx="3108960" cy="566928"/>
+          <p:cNvPr id="17" name="Text 15"/>
+          <p:cNvSpPr/>
+          <p:nvPr/>
+        </p:nvSpPr>
+        <p:spPr>
+          <a:xfrm>
+            <a:off x="4541825" y="3209544"/>
+            <a:ext cx="3108960" cy="502920"/>
           </a:xfrm>
           <a:prstGeom prst="rect">
             <a:avLst/>
@@ -5165,7 +4289,7 @@
               <a:buNone/>
             </a:pPr>
             <a:r>
-              <a:rPr lang="en-US" sz="1500" b="1" dirty="0">
+              <a:rPr lang="en-US" sz="1450" b="1" dirty="0">
                 <a:solidFill>
                   <a:srgbClr val="1E4FB8"/>
                 </a:solidFill>
@@ -5175,20 +4299,360 @@
               </a:rPr>
               <a:t>Список сотрудников</a:t>
             </a:r>
-            <a:endParaRPr lang="en-US" sz="1500" dirty="0"/>
-          </a:p>
-        </p:txBody>
-      </p:sp>
-      <p:sp>
-        <p:nvSpPr>
-          <p:cNvPr id="17" name="Text 15"/>
-          <p:cNvSpPr/>
-          <p:nvPr/>
-        </p:nvSpPr>
-        <p:spPr>
-          <a:xfrm>
-            <a:off x="548640" y="4663440"/>
-            <a:ext cx="11094415" cy="310896"/>
+            <a:endParaRPr lang="en-US" sz="1450" dirty="0"/>
+          </a:p>
+        </p:txBody>
+      </p:sp>
+      <p:sp>
+        <p:nvSpPr>
+          <p:cNvPr id="18" name="Shape 16"/>
+          <p:cNvSpPr/>
+          <p:nvPr/>
+        </p:nvSpPr>
+        <p:spPr>
+          <a:xfrm>
+            <a:off x="6096305" y="3712464"/>
+            <a:ext cx="0" cy="137160"/>
+          </a:xfrm>
+          <a:prstGeom prst="line">
+            <a:avLst/>
+          </a:prstGeom>
+          <a:noFill/>
+          <a:ln w="19050">
+            <a:solidFill>
+              <a:srgbClr val="8891A0"/>
+            </a:solidFill>
+            <a:prstDash val="solid"/>
+          </a:ln>
+        </p:spPr>
+      </p:sp>
+      <p:sp>
+        <p:nvSpPr>
+          <p:cNvPr id="19" name="Shape 17"/>
+          <p:cNvSpPr/>
+          <p:nvPr/>
+        </p:nvSpPr>
+        <p:spPr>
+          <a:xfrm>
+            <a:off x="1737360" y="3849624"/>
+            <a:ext cx="8716975" cy="0"/>
+          </a:xfrm>
+          <a:prstGeom prst="line">
+            <a:avLst/>
+          </a:prstGeom>
+          <a:noFill/>
+          <a:ln w="19050">
+            <a:solidFill>
+              <a:srgbClr val="8891A0"/>
+            </a:solidFill>
+            <a:prstDash val="solid"/>
+          </a:ln>
+        </p:spPr>
+      </p:sp>
+      <p:sp>
+        <p:nvSpPr>
+          <p:cNvPr id="20" name="Shape 18"/>
+          <p:cNvSpPr/>
+          <p:nvPr/>
+        </p:nvSpPr>
+        <p:spPr>
+          <a:xfrm>
+            <a:off x="1737360" y="3849624"/>
+            <a:ext cx="0" cy="137160"/>
+          </a:xfrm>
+          <a:prstGeom prst="line">
+            <a:avLst/>
+          </a:prstGeom>
+          <a:noFill/>
+          <a:ln w="19050">
+            <a:solidFill>
+              <a:srgbClr val="8891A0"/>
+            </a:solidFill>
+            <a:prstDash val="solid"/>
+          </a:ln>
+        </p:spPr>
+      </p:sp>
+      <p:sp>
+        <p:nvSpPr>
+          <p:cNvPr id="21" name="Shape 19"/>
+          <p:cNvSpPr/>
+          <p:nvPr/>
+        </p:nvSpPr>
+        <p:spPr>
+          <a:xfrm>
+            <a:off x="6096305" y="3849624"/>
+            <a:ext cx="0" cy="137160"/>
+          </a:xfrm>
+          <a:prstGeom prst="line">
+            <a:avLst/>
+          </a:prstGeom>
+          <a:noFill/>
+          <a:ln w="19050">
+            <a:solidFill>
+              <a:srgbClr val="8891A0"/>
+            </a:solidFill>
+            <a:prstDash val="solid"/>
+          </a:ln>
+        </p:spPr>
+      </p:sp>
+      <p:sp>
+        <p:nvSpPr>
+          <p:cNvPr id="22" name="Shape 20"/>
+          <p:cNvSpPr/>
+          <p:nvPr/>
+        </p:nvSpPr>
+        <p:spPr>
+          <a:xfrm>
+            <a:off x="10454335" y="3849624"/>
+            <a:ext cx="0" cy="137160"/>
+          </a:xfrm>
+          <a:prstGeom prst="line">
+            <a:avLst/>
+          </a:prstGeom>
+          <a:noFill/>
+          <a:ln w="19050">
+            <a:solidFill>
+              <a:srgbClr val="8891A0"/>
+            </a:solidFill>
+            <a:prstDash val="solid"/>
+          </a:ln>
+        </p:spPr>
+      </p:sp>
+      <p:sp>
+        <p:nvSpPr>
+          <p:cNvPr id="23" name="Shape 21"/>
+          <p:cNvSpPr/>
+          <p:nvPr/>
+        </p:nvSpPr>
+        <p:spPr>
+          <a:xfrm>
+            <a:off x="822960" y="3986784"/>
+            <a:ext cx="1828800" cy="475488"/>
+          </a:xfrm>
+          <a:prstGeom prst="roundRect">
+            <a:avLst>
+              <a:gd name="adj" fmla="val 15385"/>
+            </a:avLst>
+          </a:prstGeom>
+          <a:solidFill>
+            <a:srgbClr val="E4ECFD"/>
+          </a:solidFill>
+          <a:ln w="19050">
+            <a:solidFill>
+              <a:srgbClr val="2F6FED"/>
+            </a:solidFill>
+            <a:prstDash val="solid"/>
+          </a:ln>
+        </p:spPr>
+      </p:sp>
+      <p:sp>
+        <p:nvSpPr>
+          <p:cNvPr id="24" name="Text 22"/>
+          <p:cNvSpPr/>
+          <p:nvPr/>
+        </p:nvSpPr>
+        <p:spPr>
+          <a:xfrm>
+            <a:off x="822960" y="3986784"/>
+            <a:ext cx="1828800" cy="475488"/>
+          </a:xfrm>
+          <a:prstGeom prst="rect">
+            <a:avLst/>
+          </a:prstGeom>
+          <a:noFill/>
+          <a:ln/>
+        </p:spPr>
+        <p:txBody>
+          <a:bodyPr wrap="square" lIns="0" tIns="0" rIns="0" bIns="0" rtlCol="0" anchor="ctr"/>
+          <a:lstStyle/>
+          <a:p>
+            <a:pPr algn="ctr" indent="0" marL="0">
+              <a:buNone/>
+            </a:pPr>
+            <a:r>
+              <a:rPr lang="en-US" sz="1200" b="1" dirty="0">
+                <a:solidFill>
+                  <a:srgbClr val="1E4FB8"/>
+                </a:solidFill>
+                <a:latin typeface="Calibri" pitchFamily="34" charset="0"/>
+                <a:ea typeface="Calibri" pitchFamily="34" charset="-122"/>
+                <a:cs typeface="Calibri" pitchFamily="34" charset="-120"/>
+              </a:rPr>
+              <a:t>Отпускные</a:t>
+            </a:r>
+            <a:endParaRPr lang="en-US" sz="1200" dirty="0"/>
+          </a:p>
+        </p:txBody>
+      </p:sp>
+      <p:sp>
+        <p:nvSpPr>
+          <p:cNvPr id="25" name="Shape 23"/>
+          <p:cNvSpPr/>
+          <p:nvPr/>
+        </p:nvSpPr>
+        <p:spPr>
+          <a:xfrm>
+            <a:off x="5181905" y="3986784"/>
+            <a:ext cx="1828800" cy="475488"/>
+          </a:xfrm>
+          <a:prstGeom prst="roundRect">
+            <a:avLst>
+              <a:gd name="adj" fmla="val 15385"/>
+            </a:avLst>
+          </a:prstGeom>
+          <a:solidFill>
+            <a:srgbClr val="E4ECFD"/>
+          </a:solidFill>
+          <a:ln w="19050">
+            <a:solidFill>
+              <a:srgbClr val="2F6FED"/>
+            </a:solidFill>
+            <a:prstDash val="solid"/>
+          </a:ln>
+        </p:spPr>
+      </p:sp>
+      <p:sp>
+        <p:nvSpPr>
+          <p:cNvPr id="26" name="Text 24"/>
+          <p:cNvSpPr/>
+          <p:nvPr/>
+        </p:nvSpPr>
+        <p:spPr>
+          <a:xfrm>
+            <a:off x="5181905" y="3986784"/>
+            <a:ext cx="1828800" cy="475488"/>
+          </a:xfrm>
+          <a:prstGeom prst="rect">
+            <a:avLst/>
+          </a:prstGeom>
+          <a:noFill/>
+          <a:ln/>
+        </p:spPr>
+        <p:txBody>
+          <a:bodyPr wrap="square" lIns="0" tIns="0" rIns="0" bIns="0" rtlCol="0" anchor="ctr"/>
+          <a:lstStyle/>
+          <a:p>
+            <a:pPr algn="ctr" indent="0" marL="0">
+              <a:buNone/>
+            </a:pPr>
+            <a:r>
+              <a:rPr lang="en-US" sz="1200" b="1" dirty="0">
+                <a:solidFill>
+                  <a:srgbClr val="1E4FB8"/>
+                </a:solidFill>
+                <a:latin typeface="Calibri" pitchFamily="34" charset="0"/>
+                <a:ea typeface="Calibri" pitchFamily="34" charset="-122"/>
+                <a:cs typeface="Calibri" pitchFamily="34" charset="-120"/>
+              </a:rPr>
+              <a:t>Больничные</a:t>
+            </a:r>
+            <a:endParaRPr lang="en-US" sz="1200" dirty="0"/>
+          </a:p>
+        </p:txBody>
+      </p:sp>
+      <p:sp>
+        <p:nvSpPr>
+          <p:cNvPr id="27" name="Shape 25"/>
+          <p:cNvSpPr/>
+          <p:nvPr/>
+        </p:nvSpPr>
+        <p:spPr>
+          <a:xfrm>
+            <a:off x="9539935" y="3986784"/>
+            <a:ext cx="1828800" cy="475488"/>
+          </a:xfrm>
+          <a:prstGeom prst="roundRect">
+            <a:avLst>
+              <a:gd name="adj" fmla="val 15385"/>
+            </a:avLst>
+          </a:prstGeom>
+          <a:solidFill>
+            <a:srgbClr val="FBEED9"/>
+          </a:solidFill>
+          <a:ln w="19050">
+            <a:solidFill>
+              <a:srgbClr val="E8A33D"/>
+            </a:solidFill>
+            <a:prstDash val="solid"/>
+          </a:ln>
+        </p:spPr>
+      </p:sp>
+      <p:sp>
+        <p:nvSpPr>
+          <p:cNvPr id="28" name="Text 26"/>
+          <p:cNvSpPr/>
+          <p:nvPr/>
+        </p:nvSpPr>
+        <p:spPr>
+          <a:xfrm>
+            <a:off x="9539935" y="3986784"/>
+            <a:ext cx="1828800" cy="475488"/>
+          </a:xfrm>
+          <a:prstGeom prst="rect">
+            <a:avLst/>
+          </a:prstGeom>
+          <a:noFill/>
+          <a:ln/>
+        </p:spPr>
+        <p:txBody>
+          <a:bodyPr wrap="square" lIns="0" tIns="0" rIns="0" bIns="0" rtlCol="0" anchor="ctr"/>
+          <a:lstStyle/>
+          <a:p>
+            <a:pPr algn="ctr" indent="0" marL="0">
+              <a:buNone/>
+            </a:pPr>
+            <a:r>
+              <a:rPr lang="en-US" sz="1200" b="1" dirty="0">
+                <a:solidFill>
+                  <a:srgbClr val="B87A1E"/>
+                </a:solidFill>
+                <a:latin typeface="Calibri" pitchFamily="34" charset="0"/>
+                <a:ea typeface="Calibri" pitchFamily="34" charset="-122"/>
+                <a:cs typeface="Calibri" pitchFamily="34" charset="-120"/>
+              </a:rPr>
+              <a:t>Оклады</a:t>
+            </a:r>
+            <a:endParaRPr lang="en-US" sz="1200" dirty="0"/>
+          </a:p>
+        </p:txBody>
+      </p:sp>
+      <p:sp>
+        <p:nvSpPr>
+          <p:cNvPr id="29" name="Shape 27"/>
+          <p:cNvSpPr/>
+          <p:nvPr/>
+        </p:nvSpPr>
+        <p:spPr>
+          <a:xfrm>
+            <a:off x="548640" y="4590288"/>
+            <a:ext cx="11094415" cy="347472"/>
+          </a:xfrm>
+          <a:prstGeom prst="roundRect">
+            <a:avLst>
+              <a:gd name="adj" fmla="val 23684"/>
+            </a:avLst>
+          </a:prstGeom>
+          <a:solidFill>
+            <a:srgbClr val="EAEDF3"/>
+          </a:solidFill>
+          <a:ln w="9525">
+            <a:solidFill>
+              <a:srgbClr val="DCE1E9"/>
+            </a:solidFill>
+            <a:prstDash val="solid"/>
+          </a:ln>
+        </p:spPr>
+      </p:sp>
+      <p:sp>
+        <p:nvSpPr>
+          <p:cNvPr id="30" name="Text 28"/>
+          <p:cNvSpPr/>
+          <p:nvPr/>
+        </p:nvSpPr>
+        <p:spPr>
+          <a:xfrm>
+            <a:off x="777240" y="4590288"/>
+            <a:ext cx="10637215" cy="347472"/>
           </a:xfrm>
           <a:prstGeom prst="rect">
             <a:avLst/>
@@ -5202,12 +4666,12 @@
           <a:p>
             <a:pPr algn="ctr" indent="0" marL="0">
               <a:lnSpc>
-                <a:spcPct val="120000"/>
+                <a:spcPct val="110000"/>
               </a:lnSpc>
               <a:buNone/>
             </a:pPr>
             <a:r>
-              <a:rPr lang="en-US" sz="1200" b="1" dirty="0">
+              <a:rPr lang="en-US" sz="1100" b="1" dirty="0">
                 <a:solidFill>
                   <a:srgbClr val="1B1E27"/>
                 </a:solidFill>
@@ -5215,38 +4679,21 @@
                 <a:ea typeface="Calibri" pitchFamily="34" charset="-122"/>
                 <a:cs typeface="Calibri" pitchFamily="34" charset="-120"/>
               </a:rPr>
-              <a:t>У узла — два родителя, по одному в каждом дереве. </a:t>
-            </a:r>
-            <a:pPr algn="ctr" indent="0" marL="0">
-              <a:lnSpc>
-                <a:spcPct val="120000"/>
-              </a:lnSpc>
-              <a:buNone/>
-            </a:pPr>
-            <a:r>
-              <a:rPr lang="en-US" sz="1200" dirty="0">
-                <a:solidFill>
-                  <a:srgbClr val="5B6472"/>
-                </a:solidFill>
-                <a:latin typeface="Calibri" pitchFamily="34" charset="0"/>
-                <a:ea typeface="Calibri" pitchFamily="34" charset="-122"/>
-                <a:cs typeface="Calibri" pitchFamily="34" charset="-120"/>
-              </a:rPr>
-              <a:t>Правило «вниз» не нарушено ни в «Кадры», ни в «Продажи» — оно действует независимо в каждом домене, как на предыдущем слайде.</a:t>
-            </a:r>
-            <a:endParaRPr lang="en-US" sz="1200" dirty="0"/>
-          </a:p>
-        </p:txBody>
-      </p:sp>
-      <p:sp>
-        <p:nvSpPr>
-          <p:cNvPr id="18" name="Shape 16"/>
-          <p:cNvSpPr/>
-          <p:nvPr/>
-        </p:nvSpPr>
-        <p:spPr>
-          <a:xfrm>
-            <a:off x="548640" y="5138928"/>
+              <a:t>У узла — три родителя, по одному в каждом дереве. Правило «вниз» не нарушено ни в одном из трёх доменов — оно действует независимо и полностью в каждом, как на предыдущем слайде.</a:t>
+            </a:r>
+            <a:endParaRPr lang="en-US" sz="1100" dirty="0"/>
+          </a:p>
+        </p:txBody>
+      </p:sp>
+      <p:sp>
+        <p:nvSpPr>
+          <p:cNvPr id="31" name="Shape 29"/>
+          <p:cNvSpPr/>
+          <p:nvPr/>
+        </p:nvSpPr>
+        <p:spPr>
+          <a:xfrm>
+            <a:off x="548640" y="5029200"/>
             <a:ext cx="11094415" cy="1097280"/>
           </a:xfrm>
           <a:prstGeom prst="roundRect">
@@ -5267,13 +4714,13 @@
       </p:sp>
       <p:sp>
         <p:nvSpPr>
-          <p:cNvPr id="19" name="Shape 17"/>
-          <p:cNvSpPr/>
-          <p:nvPr/>
-        </p:nvSpPr>
-        <p:spPr>
-          <a:xfrm>
-            <a:off x="777240" y="5413248"/>
+          <p:cNvPr id="32" name="Shape 30"/>
+          <p:cNvSpPr/>
+          <p:nvPr/>
+        </p:nvSpPr>
+        <p:spPr>
+          <a:xfrm>
+            <a:off x="777240" y="5303520"/>
             <a:ext cx="548640" cy="548640"/>
           </a:xfrm>
           <a:prstGeom prst="ellipse">
@@ -5287,7 +4734,7 @@
       </p:sp>
       <p:pic>
         <p:nvPicPr>
-          <p:cNvPr id="20" name="Image 0" descr="preencoded.png">    </p:cNvPr>
+          <p:cNvPr id="33" name="Image 0" descr="preencoded.png">    </p:cNvPr>
           <p:cNvPicPr>
             <a:picLocks noChangeAspect="1"/>
           </p:cNvPicPr>
@@ -5301,7 +4748,7 @@
         </p:blipFill>
         <p:spPr>
           <a:xfrm>
-            <a:off x="908914" y="5544922"/>
+            <a:off x="908914" y="5435194"/>
             <a:ext cx="285293" cy="285293"/>
           </a:xfrm>
           <a:prstGeom prst="rect">
@@ -5311,13 +4758,13 @@
       </p:pic>
       <p:sp>
         <p:nvSpPr>
-          <p:cNvPr id="21" name="Text 18"/>
-          <p:cNvSpPr/>
-          <p:nvPr/>
-        </p:nvSpPr>
-        <p:spPr>
-          <a:xfrm>
-            <a:off x="1463040" y="5266944"/>
+          <p:cNvPr id="34" name="Text 31"/>
+          <p:cNvSpPr/>
+          <p:nvPr/>
+        </p:nvSpPr>
+        <p:spPr>
+          <a:xfrm>
+            <a:off x="1463040" y="5157216"/>
             <a:ext cx="9905695" cy="841248"/>
           </a:xfrm>
           <a:prstGeom prst="rect">
@@ -5332,12 +4779,12 @@
           <a:p>
             <a:pPr indent="0" marL="0">
               <a:lnSpc>
-                <a:spcPct val="124000"/>
+                <a:spcPct val="122000"/>
               </a:lnSpc>
               <a:buNone/>
             </a:pPr>
             <a:r>
-              <a:rPr lang="en-US" sz="1100" b="1" dirty="0">
+              <a:rPr lang="en-US" sz="1050" b="1" dirty="0">
                 <a:solidFill>
                   <a:srgbClr val="B87A1E"/>
                 </a:solidFill>
@@ -5345,16 +4792,16 @@
                 <a:ea typeface="Calibri" pitchFamily="34" charset="-122"/>
                 <a:cs typeface="Calibri" pitchFamily="34" charset="-120"/>
               </a:rPr>
-              <a:t>Деталь для совместной проработки при реализации: </a:t>
+              <a:t>Открытый вопрос для совместной проработки: </a:t>
             </a:r>
             <a:pPr indent="0" marL="0">
               <a:lnSpc>
-                <a:spcPct val="124000"/>
+                <a:spcPct val="122000"/>
               </a:lnSpc>
               <a:buNone/>
             </a:pPr>
             <a:r>
-              <a:rPr lang="en-US" sz="1100" dirty="0">
+              <a:rPr lang="en-US" sz="1050" dirty="0">
                 <a:solidFill>
                   <a:srgbClr val="1B1E27"/>
                 </a:solidFill>
@@ -5362,16 +4809,16 @@
                 <a:ea typeface="Calibri" pitchFamily="34" charset="-122"/>
                 <a:cs typeface="Calibri" pitchFamily="34" charset="-120"/>
               </a:rPr>
-              <a:t>как технически реализовать двойное членство каталога — общий объект с двумя ссылками, представление (view) или дублирование? Каждая проверенная зрелая система вводит для этого отдельный, второстепенный механизм поверх самого дерева — </a:t>
+              <a:t>если «Список сотрудников» — один общий узел, персона на корне «Маркетинг» обычным нисходящим наследованием доходит до него — но видит ли она весь список целиком, или только часть, относящуюся к своему отделу? Дерево само по себе на этот вопрос не отвечает — это тот же класс вопроса, что и «2a» (гранулярность </a:t>
             </a:r>
             <a:pPr indent="0" marL="0">
               <a:lnSpc>
-                <a:spcPct val="124000"/>
+                <a:spcPct val="122000"/>
               </a:lnSpc>
               <a:buNone/>
             </a:pPr>
             <a:r>
-              <a:rPr lang="en-US" sz="1100" b="1" dirty="0">
+              <a:rPr lang="en-US" sz="1050" i="1" dirty="0">
                 <a:solidFill>
                   <a:srgbClr val="1B1E27"/>
                 </a:solidFill>
@@ -5379,16 +4826,16 @@
                 <a:ea typeface="Calibri" pitchFamily="34" charset="-122"/>
                 <a:cs typeface="Calibri" pitchFamily="34" charset="-120"/>
               </a:rPr>
-              <a:t>SharePoint (прямой доступ), Google Drive (Expansive access), Purview (повторный грант после Restrict), Databricks (представления / Delta Sharing)</a:t>
+              <a:t>внутри</a:t>
             </a:r>
             <a:pPr indent="0" marL="0">
               <a:lnSpc>
-                <a:spcPct val="124000"/>
+                <a:spcPct val="122000"/>
               </a:lnSpc>
               <a:buNone/>
             </a:pPr>
             <a:r>
-              <a:rPr lang="en-US" sz="1100" dirty="0">
+              <a:rPr lang="en-US" sz="1050" dirty="0">
                 <a:solidFill>
                   <a:srgbClr val="1B1E27"/>
                 </a:solidFill>
@@ -5396,15 +4843,15 @@
                 <a:ea typeface="Calibri" pitchFamily="34" charset="-122"/>
                 <a:cs typeface="Calibri" pitchFamily="34" charset="-120"/>
               </a:rPr>
-              <a:t>. Предложение дерева от этого не меняется, только это конкретное решение стоит выбрать вместе с разработчиком.</a:t>
-            </a:r>
-            <a:endParaRPr lang="en-US" sz="1100" dirty="0"/>
-          </a:p>
-        </p:txBody>
-      </p:sp>
-      <p:sp>
-        <p:nvSpPr>
-          <p:cNvPr id="22" name="Text 19"/>
+              <a:t> одной коллекции), рассмотренный раньше. Предложение дерева от этого не меняется — вопрос стоит решить вместе с разработчиком.</a:t>
+            </a:r>
+            <a:endParaRPr lang="en-US" sz="1050" dirty="0"/>
+          </a:p>
+        </p:txBody>
+      </p:sp>
+      <p:sp>
+        <p:nvSpPr>
+          <p:cNvPr id="35" name="Text 32"/>
           <p:cNvSpPr/>
           <p:nvPr/>
         </p:nvSpPr>
@@ -5443,7 +4890,7 @@
       </p:sp>
       <p:sp>
         <p:nvSpPr>
-          <p:cNvPr id="23" name="Text 20"/>
+          <p:cNvPr id="36" name="Text 33"/>
           <p:cNvSpPr/>
           <p:nvPr/>
         </p:nvSpPr>
@@ -6592,7 +6039,7 @@
                 <a:ea typeface="Cambria" pitchFamily="34" charset="-122"/>
                 <a:cs typeface="Cambria" pitchFamily="34" charset="-120"/>
               </a:rPr>
-              <a:t>Одно дерево — три персоны, три разных среза видимости</a:t>
+              <a:t>Три персоны — три разных пути к «Список сотрудников»</a:t>
             </a:r>
             <a:endParaRPr lang="en-US" sz="2700" dirty="0"/>
           </a:p>
@@ -6647,7 +6094,7 @@
             <a:avLst/>
           </a:prstGeom>
           <a:solidFill>
-            <a:srgbClr val="E4ECFD"/>
+            <a:srgbClr val="FBEED9"/>
           </a:solidFill>
           <a:ln/>
         </p:spPr>
@@ -6709,7 +6156,7 @@
                 <a:ea typeface="Cambria" pitchFamily="34" charset="-122"/>
                 <a:cs typeface="Cambria" pitchFamily="34" charset="-120"/>
               </a:rPr>
-              <a:t>Сотрудник</a:t>
+              <a:t>Сотрудник кадров</a:t>
             </a:r>
             <a:endParaRPr lang="en-US" sz="1400" dirty="0"/>
           </a:p>
@@ -6732,7 +6179,7 @@
             </a:avLst>
           </a:prstGeom>
           <a:solidFill>
-            <a:srgbClr val="EEF0F3"/>
+            <a:srgbClr val="FBEED9"/>
           </a:solidFill>
           <a:ln/>
         </p:spPr>
@@ -6762,7 +6209,127 @@
               <a:buNone/>
             </a:pPr>
             <a:r>
-              <a:rPr lang="en-US" sz="1000" b="1" dirty="0">
+              <a:rPr lang="en-US" sz="950" b="1" dirty="0">
+                <a:solidFill>
+                  <a:srgbClr val="B87A1E"/>
+                </a:solidFill>
+                <a:latin typeface="Calibri" pitchFamily="34" charset="0"/>
+                <a:ea typeface="Calibri" pitchFamily="34" charset="-122"/>
+                <a:cs typeface="Calibri" pitchFamily="34" charset="-120"/>
+              </a:rPr>
+              <a:t>Кадры / Список сотрудников / Отпускные</a:t>
+            </a:r>
+            <a:endParaRPr lang="en-US" sz="950" dirty="0"/>
+          </a:p>
+        </p:txBody>
+      </p:sp>
+      <p:sp>
+        <p:nvSpPr>
+          <p:cNvPr id="10" name="Shape 7"/>
+          <p:cNvSpPr/>
+          <p:nvPr/>
+        </p:nvSpPr>
+        <p:spPr>
+          <a:xfrm>
+            <a:off x="1691640" y="2560320"/>
+            <a:ext cx="3566160" cy="329184"/>
+          </a:xfrm>
+          <a:prstGeom prst="roundRect">
+            <a:avLst>
+              <a:gd name="adj" fmla="val 50000"/>
+            </a:avLst>
+          </a:prstGeom>
+          <a:solidFill>
+            <a:srgbClr val="FBEED9"/>
+          </a:solidFill>
+          <a:ln/>
+        </p:spPr>
+      </p:sp>
+      <p:sp>
+        <p:nvSpPr>
+          <p:cNvPr id="11" name="Text 8"/>
+          <p:cNvSpPr/>
+          <p:nvPr/>
+        </p:nvSpPr>
+        <p:spPr>
+          <a:xfrm>
+            <a:off x="1737360" y="2560320"/>
+            <a:ext cx="3474720" cy="329184"/>
+          </a:xfrm>
+          <a:prstGeom prst="rect">
+            <a:avLst/>
+          </a:prstGeom>
+          <a:noFill/>
+          <a:ln/>
+        </p:spPr>
+        <p:txBody>
+          <a:bodyPr wrap="square" lIns="0" tIns="0" rIns="0" bIns="0" rtlCol="0" anchor="ctr"/>
+          <a:lstStyle/>
+          <a:p>
+            <a:pPr algn="ctr" indent="0" marL="0">
+              <a:buNone/>
+            </a:pPr>
+            <a:r>
+              <a:rPr lang="en-US" sz="950" b="1" dirty="0">
+                <a:solidFill>
+                  <a:srgbClr val="B87A1E"/>
+                </a:solidFill>
+                <a:latin typeface="Calibri" pitchFamily="34" charset="0"/>
+                <a:ea typeface="Calibri" pitchFamily="34" charset="-122"/>
+                <a:cs typeface="Calibri" pitchFamily="34" charset="-120"/>
+              </a:rPr>
+              <a:t>Кадры / Список сотрудников / Больничные</a:t>
+            </a:r>
+            <a:endParaRPr lang="en-US" sz="950" dirty="0"/>
+          </a:p>
+        </p:txBody>
+      </p:sp>
+      <p:sp>
+        <p:nvSpPr>
+          <p:cNvPr id="12" name="Text 9"/>
+          <p:cNvSpPr/>
+          <p:nvPr/>
+        </p:nvSpPr>
+        <p:spPr>
+          <a:xfrm>
+            <a:off x="5577840" y="1810512"/>
+            <a:ext cx="5790895" cy="566928"/>
+          </a:xfrm>
+          <a:prstGeom prst="rect">
+            <a:avLst/>
+          </a:prstGeom>
+          <a:noFill/>
+          <a:ln/>
+        </p:spPr>
+        <p:txBody>
+          <a:bodyPr wrap="square" lIns="0" tIns="0" rIns="0" bIns="0" rtlCol="0" anchor="ctr"/>
+          <a:lstStyle/>
+          <a:p>
+            <a:pPr indent="0" marL="0">
+              <a:lnSpc>
+                <a:spcPct val="118000"/>
+              </a:lnSpc>
+              <a:buNone/>
+            </a:pPr>
+            <a:r>
+              <a:rPr lang="en-US" sz="1150" b="1" dirty="0">
+                <a:solidFill>
+                  <a:srgbClr val="2E9E6E"/>
+                </a:solidFill>
+                <a:latin typeface="Calibri" pitchFamily="34" charset="0"/>
+                <a:ea typeface="Calibri" pitchFamily="34" charset="-122"/>
+                <a:cs typeface="Calibri" pitchFamily="34" charset="-120"/>
+              </a:rPr>
+              <a:t>Видит: </a:t>
+            </a:r>
+            <a:pPr indent="0" marL="0">
+              <a:lnSpc>
+                <a:spcPct val="118000"/>
+              </a:lnSpc>
+              <a:buNone/>
+            </a:pPr>
+            <a:r>
+              <a:rPr lang="en-US" sz="1150" dirty="0">
                 <a:solidFill>
                   <a:srgbClr val="1B1E27"/>
                 </a:solidFill>
@@ -6770,22 +6337,22 @@
                 <a:ea typeface="Calibri" pitchFamily="34" charset="-122"/>
                 <a:cs typeface="Calibri" pitchFamily="34" charset="-120"/>
               </a:rPr>
-              <a:t>Кадры / Общее</a:t>
-            </a:r>
-            <a:endParaRPr lang="en-US" sz="1000" dirty="0"/>
-          </a:p>
-        </p:txBody>
-      </p:sp>
-      <p:sp>
-        <p:nvSpPr>
-          <p:cNvPr id="10" name="Text 7"/>
-          <p:cNvSpPr/>
-          <p:nvPr/>
-        </p:nvSpPr>
-        <p:spPr>
-          <a:xfrm>
-            <a:off x="5577840" y="1810512"/>
-            <a:ext cx="5790895" cy="502920"/>
+              <a:t>отпускные и больничные по всей компании — оба узла, к которым привязана</a:t>
+            </a:r>
+            <a:endParaRPr lang="en-US" sz="1150" dirty="0"/>
+          </a:p>
+        </p:txBody>
+      </p:sp>
+      <p:sp>
+        <p:nvSpPr>
+          <p:cNvPr id="13" name="Text 10"/>
+          <p:cNvSpPr/>
+          <p:nvPr/>
+        </p:nvSpPr>
+        <p:spPr>
+          <a:xfrm>
+            <a:off x="5577840" y="2395728"/>
+            <a:ext cx="5790895" cy="621792"/>
           </a:xfrm>
           <a:prstGeom prst="rect">
             <a:avLst/>
@@ -6804,15 +6371,15 @@
               <a:buNone/>
             </a:pPr>
             <a:r>
-              <a:rPr lang="en-US" sz="1200" b="1" dirty="0">
-                <a:solidFill>
-                  <a:srgbClr val="2E9E6E"/>
-                </a:solidFill>
-                <a:latin typeface="Calibri" pitchFamily="34" charset="0"/>
-                <a:ea typeface="Calibri" pitchFamily="34" charset="-122"/>
-                <a:cs typeface="Calibri" pitchFamily="34" charset="-120"/>
-              </a:rPr>
-              <a:t>Видит: </a:t>
+              <a:rPr lang="en-US" sz="1150" b="1" dirty="0">
+                <a:solidFill>
+                  <a:srgbClr val="1E4FB8"/>
+                </a:solidFill>
+                <a:latin typeface="Calibri" pitchFamily="34" charset="0"/>
+                <a:ea typeface="Calibri" pitchFamily="34" charset="-122"/>
+                <a:cs typeface="Calibri" pitchFamily="34" charset="-120"/>
+              </a:rPr>
+              <a:t>Составная привязка: </a:t>
             </a:r>
             <a:pPr indent="0" marL="0">
               <a:lnSpc>
@@ -6821,66 +6388,7 @@
               <a:buNone/>
             </a:pPr>
             <a:r>
-              <a:rPr lang="en-US" sz="1200" dirty="0">
-                <a:solidFill>
-                  <a:srgbClr val="1B1E27"/>
-                </a:solidFill>
-                <a:latin typeface="Calibri" pitchFamily="34" charset="0"/>
-                <a:ea typeface="Calibri" pitchFamily="34" charset="-122"/>
-                <a:cs typeface="Calibri" pitchFamily="34" charset="-120"/>
-              </a:rPr>
-              <a:t>только больничные и отпускные</a:t>
-            </a:r>
-            <a:endParaRPr lang="en-US" sz="1200" dirty="0"/>
-          </a:p>
-        </p:txBody>
-      </p:sp>
-      <p:sp>
-        <p:nvSpPr>
-          <p:cNvPr id="11" name="Text 8"/>
-          <p:cNvSpPr/>
-          <p:nvPr/>
-        </p:nvSpPr>
-        <p:spPr>
-          <a:xfrm>
-            <a:off x="5577840" y="2359152"/>
-            <a:ext cx="5790895" cy="658368"/>
-          </a:xfrm>
-          <a:prstGeom prst="rect">
-            <a:avLst/>
-          </a:prstGeom>
-          <a:noFill/>
-          <a:ln/>
-        </p:spPr>
-        <p:txBody>
-          <a:bodyPr wrap="square" lIns="0" tIns="0" rIns="0" bIns="0" rtlCol="0" anchor="ctr"/>
-          <a:lstStyle/>
-          <a:p>
-            <a:pPr indent="0" marL="0">
-              <a:lnSpc>
-                <a:spcPct val="122000"/>
-              </a:lnSpc>
-              <a:buNone/>
-            </a:pPr>
-            <a:r>
-              <a:rPr lang="en-US" sz="1200" b="1" dirty="0">
-                <a:solidFill>
-                  <a:srgbClr val="1E4FB8"/>
-                </a:solidFill>
-                <a:latin typeface="Calibri" pitchFamily="34" charset="0"/>
-                <a:ea typeface="Calibri" pitchFamily="34" charset="-122"/>
-                <a:cs typeface="Calibri" pitchFamily="34" charset="-120"/>
-              </a:rPr>
-              <a:t>Не видит: </a:t>
-            </a:r>
-            <a:pPr indent="0" marL="0">
-              <a:lnSpc>
-                <a:spcPct val="122000"/>
-              </a:lnSpc>
-              <a:buNone/>
-            </a:pPr>
-            <a:r>
-              <a:rPr lang="en-US" sz="1200" dirty="0">
+              <a:rPr lang="en-US" sz="1150" dirty="0">
                 <a:solidFill>
                   <a:srgbClr val="5B6472"/>
                 </a:solidFill>
@@ -6888,15 +6396,15 @@
                 <a:ea typeface="Calibri" pitchFamily="34" charset="-122"/>
                 <a:cs typeface="Calibri" pitchFamily="34" charset="-120"/>
               </a:rPr>
-              <a:t>про «Оклады» и «Личные дела» не знает вообще — это не потомки узла «Общее»</a:t>
-            </a:r>
-            <a:endParaRPr lang="en-US" sz="1200" dirty="0"/>
-          </a:p>
-        </p:txBody>
-      </p:sp>
-      <p:sp>
-        <p:nvSpPr>
-          <p:cNvPr id="12" name="Shape 9"/>
+              <a:t>привязана сразу к двум соседним узлам — явная множественная привязка, а не «переключение» между ролями. «Оклады» не видит: это не входит в обычные обязанности кадровика</a:t>
+            </a:r>
+            <a:endParaRPr lang="en-US" sz="1150" dirty="0"/>
+          </a:p>
+        </p:txBody>
+      </p:sp>
+      <p:sp>
+        <p:nvSpPr>
+          <p:cNvPr id="14" name="Shape 11"/>
           <p:cNvSpPr/>
           <p:nvPr/>
         </p:nvSpPr>
@@ -6930,7 +6438,7 @@
       </p:sp>
       <p:sp>
         <p:nvSpPr>
-          <p:cNvPr id="13" name="Shape 10"/>
+          <p:cNvPr id="15" name="Shape 12"/>
           <p:cNvSpPr/>
           <p:nvPr/>
         </p:nvSpPr>
@@ -6950,7 +6458,7 @@
       </p:sp>
       <p:pic>
         <p:nvPicPr>
-          <p:cNvPr id="14" name="Image 1" descr="preencoded.png">    </p:cNvPr>
+          <p:cNvPr id="16" name="Image 1" descr="preencoded.png">    </p:cNvPr>
           <p:cNvPicPr>
             <a:picLocks noChangeAspect="1"/>
           </p:cNvPicPr>
@@ -6974,7 +6482,7 @@
       </p:pic>
       <p:sp>
         <p:nvSpPr>
-          <p:cNvPr id="15" name="Text 11"/>
+          <p:cNvPr id="17" name="Text 13"/>
           <p:cNvSpPr/>
           <p:nvPr/>
         </p:nvSpPr>
@@ -7013,7 +6521,7 @@
       </p:sp>
       <p:sp>
         <p:nvSpPr>
-          <p:cNvPr id="16" name="Shape 12"/>
+          <p:cNvPr id="18" name="Shape 14"/>
           <p:cNvSpPr/>
           <p:nvPr/>
         </p:nvSpPr>
@@ -7028,14 +6536,14 @@
             </a:avLst>
           </a:prstGeom>
           <a:solidFill>
-            <a:srgbClr val="FBEED9"/>
+            <a:srgbClr val="EEF0F3"/>
           </a:solidFill>
           <a:ln/>
         </p:spPr>
       </p:sp>
       <p:sp>
         <p:nvSpPr>
-          <p:cNvPr id="17" name="Text 13"/>
+          <p:cNvPr id="19" name="Text 15"/>
           <p:cNvSpPr/>
           <p:nvPr/>
         </p:nvSpPr>
@@ -7058,78 +6566,17 @@
               <a:buNone/>
             </a:pPr>
             <a:r>
-              <a:rPr lang="en-US" sz="1000" b="1" dirty="0">
-                <a:solidFill>
-                  <a:srgbClr val="B87A1E"/>
-                </a:solidFill>
-                <a:latin typeface="Calibri" pitchFamily="34" charset="0"/>
-                <a:ea typeface="Calibri" pitchFamily="34" charset="-122"/>
-                <a:cs typeface="Calibri" pitchFamily="34" charset="-120"/>
-              </a:rPr>
-              <a:t>Кадры / Общее</a:t>
-            </a:r>
-            <a:endParaRPr lang="en-US" sz="1000" dirty="0"/>
-          </a:p>
-        </p:txBody>
-      </p:sp>
-      <p:sp>
-        <p:nvSpPr>
-          <p:cNvPr id="18" name="Shape 14"/>
-          <p:cNvSpPr/>
-          <p:nvPr/>
-        </p:nvSpPr>
-        <p:spPr>
-          <a:xfrm>
-            <a:off x="1691640" y="4206240"/>
-            <a:ext cx="3566160" cy="329184"/>
-          </a:xfrm>
-          <a:prstGeom prst="roundRect">
-            <a:avLst>
-              <a:gd name="adj" fmla="val 50000"/>
-            </a:avLst>
-          </a:prstGeom>
-          <a:solidFill>
-            <a:srgbClr val="FBEED9"/>
-          </a:solidFill>
-          <a:ln/>
-        </p:spPr>
-      </p:sp>
-      <p:sp>
-        <p:nvSpPr>
-          <p:cNvPr id="19" name="Text 15"/>
-          <p:cNvSpPr/>
-          <p:nvPr/>
-        </p:nvSpPr>
-        <p:spPr>
-          <a:xfrm>
-            <a:off x="1737360" y="4206240"/>
-            <a:ext cx="3474720" cy="329184"/>
-          </a:xfrm>
-          <a:prstGeom prst="rect">
-            <a:avLst/>
-          </a:prstGeom>
-          <a:noFill/>
-          <a:ln/>
-        </p:spPr>
-        <p:txBody>
-          <a:bodyPr wrap="square" lIns="0" tIns="0" rIns="0" bIns="0" rtlCol="0" anchor="ctr"/>
-          <a:lstStyle/>
-          <a:p>
-            <a:pPr algn="ctr" indent="0" marL="0">
-              <a:buNone/>
-            </a:pPr>
-            <a:r>
-              <a:rPr lang="en-US" sz="1000" b="1" dirty="0">
-                <a:solidFill>
-                  <a:srgbClr val="B87A1E"/>
-                </a:solidFill>
-                <a:latin typeface="Calibri" pitchFamily="34" charset="0"/>
-                <a:ea typeface="Calibri" pitchFamily="34" charset="-122"/>
-                <a:cs typeface="Calibri" pitchFamily="34" charset="-120"/>
-              </a:rPr>
-              <a:t>Кадры / Оклады / Отдел маркетинга</a:t>
-            </a:r>
-            <a:endParaRPr lang="en-US" sz="1000" dirty="0"/>
+              <a:rPr lang="en-US" sz="950" b="1" dirty="0">
+                <a:solidFill>
+                  <a:srgbClr val="1B1E27"/>
+                </a:solidFill>
+                <a:latin typeface="Calibri" pitchFamily="34" charset="0"/>
+                <a:ea typeface="Calibri" pitchFamily="34" charset="-122"/>
+                <a:cs typeface="Calibri" pitchFamily="34" charset="-120"/>
+              </a:rPr>
+              <a:t>Маркетинг (корень домена)</a:t>
+            </a:r>
+            <a:endParaRPr lang="en-US" sz="950" dirty="0"/>
           </a:p>
         </p:txBody>
       </p:sp>
@@ -7142,7 +6589,66 @@
         <p:spPr>
           <a:xfrm>
             <a:off x="5577840" y="3456432"/>
-            <a:ext cx="5790895" cy="502920"/>
+            <a:ext cx="5790895" cy="566928"/>
+          </a:xfrm>
+          <a:prstGeom prst="rect">
+            <a:avLst/>
+          </a:prstGeom>
+          <a:noFill/>
+          <a:ln/>
+        </p:spPr>
+        <p:txBody>
+          <a:bodyPr wrap="square" lIns="0" tIns="0" rIns="0" bIns="0" rtlCol="0" anchor="ctr"/>
+          <a:lstStyle/>
+          <a:p>
+            <a:pPr indent="0" marL="0">
+              <a:lnSpc>
+                <a:spcPct val="118000"/>
+              </a:lnSpc>
+              <a:buNone/>
+            </a:pPr>
+            <a:r>
+              <a:rPr lang="en-US" sz="1150" b="1" dirty="0">
+                <a:solidFill>
+                  <a:srgbClr val="2E9E6E"/>
+                </a:solidFill>
+                <a:latin typeface="Calibri" pitchFamily="34" charset="0"/>
+                <a:ea typeface="Calibri" pitchFamily="34" charset="-122"/>
+                <a:cs typeface="Calibri" pitchFamily="34" charset="-120"/>
+              </a:rPr>
+              <a:t>Видит: </a:t>
+            </a:r>
+            <a:pPr indent="0" marL="0">
+              <a:lnSpc>
+                <a:spcPct val="118000"/>
+              </a:lnSpc>
+              <a:buNone/>
+            </a:pPr>
+            <a:r>
+              <a:rPr lang="en-US" sz="1150" dirty="0">
+                <a:solidFill>
+                  <a:srgbClr val="1B1E27"/>
+                </a:solidFill>
+                <a:latin typeface="Calibri" pitchFamily="34" charset="0"/>
+                <a:ea typeface="Calibri" pitchFamily="34" charset="-122"/>
+                <a:cs typeface="Calibri" pitchFamily="34" charset="-120"/>
+              </a:rPr>
+              <a:t>через свой домен обычным нисходящим наследованием доходит до «Список сотрудников» и всех его потомков — включая «Оклады»</a:t>
+            </a:r>
+            <a:endParaRPr lang="en-US" sz="1150" dirty="0"/>
+          </a:p>
+        </p:txBody>
+      </p:sp>
+      <p:sp>
+        <p:nvSpPr>
+          <p:cNvPr id="21" name="Text 17"/>
+          <p:cNvSpPr/>
+          <p:nvPr/>
+        </p:nvSpPr>
+        <p:spPr>
+          <a:xfrm>
+            <a:off x="5577840" y="4041648"/>
+            <a:ext cx="5790895" cy="621792"/>
           </a:xfrm>
           <a:prstGeom prst="rect">
             <a:avLst/>
@@ -7161,15 +6667,15 @@
               <a:buNone/>
             </a:pPr>
             <a:r>
-              <a:rPr lang="en-US" sz="1200" b="1" dirty="0">
-                <a:solidFill>
-                  <a:srgbClr val="2E9E6E"/>
-                </a:solidFill>
-                <a:latin typeface="Calibri" pitchFamily="34" charset="0"/>
-                <a:ea typeface="Calibri" pitchFamily="34" charset="-122"/>
-                <a:cs typeface="Calibri" pitchFamily="34" charset="-120"/>
-              </a:rPr>
-              <a:t>Видит: </a:t>
+              <a:rPr lang="en-US" sz="1150" b="1" dirty="0">
+                <a:solidFill>
+                  <a:srgbClr val="B87A1E"/>
+                </a:solidFill>
+                <a:latin typeface="Calibri" pitchFamily="34" charset="0"/>
+                <a:ea typeface="Calibri" pitchFamily="34" charset="-122"/>
+                <a:cs typeface="Calibri" pitchFamily="34" charset="-120"/>
+              </a:rPr>
+              <a:t>Открытый вопрос: </a:t>
             </a:r>
             <a:pPr indent="0" marL="0">
               <a:lnSpc>
@@ -7178,66 +6684,7 @@
               <a:buNone/>
             </a:pPr>
             <a:r>
-              <a:rPr lang="en-US" sz="1200" dirty="0">
-                <a:solidFill>
-                  <a:srgbClr val="1B1E27"/>
-                </a:solidFill>
-                <a:latin typeface="Calibri" pitchFamily="34" charset="0"/>
-                <a:ea typeface="Calibri" pitchFamily="34" charset="-122"/>
-                <a:cs typeface="Calibri" pitchFamily="34" charset="-120"/>
-              </a:rPr>
-              <a:t>и общие отпускные/больничные, и оклады своего отдела</a:t>
-            </a:r>
-            <a:endParaRPr lang="en-US" sz="1200" dirty="0"/>
-          </a:p>
-        </p:txBody>
-      </p:sp>
-      <p:sp>
-        <p:nvSpPr>
-          <p:cNvPr id="21" name="Text 17"/>
-          <p:cNvSpPr/>
-          <p:nvPr/>
-        </p:nvSpPr>
-        <p:spPr>
-          <a:xfrm>
-            <a:off x="5577840" y="4005072"/>
-            <a:ext cx="5790895" cy="658368"/>
-          </a:xfrm>
-          <a:prstGeom prst="rect">
-            <a:avLst/>
-          </a:prstGeom>
-          <a:noFill/>
-          <a:ln/>
-        </p:spPr>
-        <p:txBody>
-          <a:bodyPr wrap="square" lIns="0" tIns="0" rIns="0" bIns="0" rtlCol="0" anchor="ctr"/>
-          <a:lstStyle/>
-          <a:p>
-            <a:pPr indent="0" marL="0">
-              <a:lnSpc>
-                <a:spcPct val="122000"/>
-              </a:lnSpc>
-              <a:buNone/>
-            </a:pPr>
-            <a:r>
-              <a:rPr lang="en-US" sz="1200" b="1" dirty="0">
-                <a:solidFill>
-                  <a:srgbClr val="1E4FB8"/>
-                </a:solidFill>
-                <a:latin typeface="Calibri" pitchFamily="34" charset="0"/>
-                <a:ea typeface="Calibri" pitchFamily="34" charset="-122"/>
-                <a:cs typeface="Calibri" pitchFamily="34" charset="-120"/>
-              </a:rPr>
-              <a:t>Составная привязка: </a:t>
-            </a:r>
-            <a:pPr indent="0" marL="0">
-              <a:lnSpc>
-                <a:spcPct val="122000"/>
-              </a:lnSpc>
-              <a:buNone/>
-            </a:pPr>
-            <a:r>
-              <a:rPr lang="en-US" sz="1200" dirty="0">
+              <a:rPr lang="en-US" sz="1150" dirty="0">
                 <a:solidFill>
                   <a:srgbClr val="5B6472"/>
                 </a:solidFill>
@@ -7245,9 +6692,9 @@
                 <a:ea typeface="Calibri" pitchFamily="34" charset="-122"/>
                 <a:cs typeface="Calibri" pitchFamily="34" charset="-120"/>
               </a:rPr>
-              <a:t>персона привязана сразу к двум узлам — это явная множественная привязка, а не «переключение» между ролями</a:t>
-            </a:r>
-            <a:endParaRPr lang="en-US" sz="1200" dirty="0"/>
+              <a:t>весь список целиком или только свой отдел? Дерево само по себе не отвечает — тот же вопрос, что и «2a» на предыдущем слайде</a:t>
+            </a:r>
+            <a:endParaRPr lang="en-US" sz="1150" dirty="0"/>
           </a:p>
         </p:txBody>
       </p:sp>
@@ -7415,7 +6862,7 @@
               <a:buNone/>
             </a:pPr>
             <a:r>
-              <a:rPr lang="en-US" sz="1000" b="1" dirty="0">
+              <a:rPr lang="en-US" sz="950" b="1" dirty="0">
                 <a:solidFill>
                   <a:srgbClr val="1B1E27"/>
                 </a:solidFill>
@@ -7425,7 +6872,7 @@
               </a:rPr>
               <a:t>Кадры (корень домена)</a:t>
             </a:r>
-            <a:endParaRPr lang="en-US" sz="1000" dirty="0"/>
+            <a:endParaRPr lang="en-US" sz="950" dirty="0"/>
           </a:p>
         </p:txBody>
       </p:sp>
@@ -7438,7 +6885,66 @@
         <p:spPr>
           <a:xfrm>
             <a:off x="5577840" y="5102352"/>
-            <a:ext cx="5790895" cy="502920"/>
+            <a:ext cx="5790895" cy="566928"/>
+          </a:xfrm>
+          <a:prstGeom prst="rect">
+            <a:avLst/>
+          </a:prstGeom>
+          <a:noFill/>
+          <a:ln/>
+        </p:spPr>
+        <p:txBody>
+          <a:bodyPr wrap="square" lIns="0" tIns="0" rIns="0" bIns="0" rtlCol="0" anchor="ctr"/>
+          <a:lstStyle/>
+          <a:p>
+            <a:pPr indent="0" marL="0">
+              <a:lnSpc>
+                <a:spcPct val="118000"/>
+              </a:lnSpc>
+              <a:buNone/>
+            </a:pPr>
+            <a:r>
+              <a:rPr lang="en-US" sz="1150" b="1" dirty="0">
+                <a:solidFill>
+                  <a:srgbClr val="2E9E6E"/>
+                </a:solidFill>
+                <a:latin typeface="Calibri" pitchFamily="34" charset="0"/>
+                <a:ea typeface="Calibri" pitchFamily="34" charset="-122"/>
+                <a:cs typeface="Calibri" pitchFamily="34" charset="-120"/>
+              </a:rPr>
+              <a:t>Видит: </a:t>
+            </a:r>
+            <a:pPr indent="0" marL="0">
+              <a:lnSpc>
+                <a:spcPct val="118000"/>
+              </a:lnSpc>
+              <a:buNone/>
+            </a:pPr>
+            <a:r>
+              <a:rPr lang="en-US" sz="1150" dirty="0">
+                <a:solidFill>
+                  <a:srgbClr val="1B1E27"/>
+                </a:solidFill>
+                <a:latin typeface="Calibri" pitchFamily="34" charset="0"/>
+                <a:ea typeface="Calibri" pitchFamily="34" charset="-122"/>
+                <a:cs typeface="Calibri" pitchFamily="34" charset="-120"/>
+              </a:rPr>
+              <a:t>весь домен целиком — «Список сотрудников», «Отпускные», «Больничные» и «Оклады»</a:t>
+            </a:r>
+            <a:endParaRPr lang="en-US" sz="1150" dirty="0"/>
+          </a:p>
+        </p:txBody>
+      </p:sp>
+      <p:sp>
+        <p:nvSpPr>
+          <p:cNvPr id="29" name="Text 24"/>
+          <p:cNvSpPr/>
+          <p:nvPr/>
+        </p:nvSpPr>
+        <p:spPr>
+          <a:xfrm>
+            <a:off x="5577840" y="5687568"/>
+            <a:ext cx="5790895" cy="621792"/>
           </a:xfrm>
           <a:prstGeom prst="rect">
             <a:avLst/>
@@ -7457,15 +6963,15 @@
               <a:buNone/>
             </a:pPr>
             <a:r>
-              <a:rPr lang="en-US" sz="1200" b="1" dirty="0">
-                <a:solidFill>
-                  <a:srgbClr val="2E9E6E"/>
-                </a:solidFill>
-                <a:latin typeface="Calibri" pitchFamily="34" charset="0"/>
-                <a:ea typeface="Calibri" pitchFamily="34" charset="-122"/>
-                <a:cs typeface="Calibri" pitchFamily="34" charset="-120"/>
-              </a:rPr>
-              <a:t>Видит: </a:t>
+              <a:rPr lang="en-US" sz="1150" b="1" dirty="0">
+                <a:solidFill>
+                  <a:srgbClr val="1E4FB8"/>
+                </a:solidFill>
+                <a:latin typeface="Calibri" pitchFamily="34" charset="0"/>
+                <a:ea typeface="Calibri" pitchFamily="34" charset="-122"/>
+                <a:cs typeface="Calibri" pitchFamily="34" charset="-120"/>
+              </a:rPr>
+              <a:t>Особенность корня: </a:t>
             </a:r>
             <a:pPr indent="0" marL="0">
               <a:lnSpc>
@@ -7474,66 +6980,7 @@
               <a:buNone/>
             </a:pPr>
             <a:r>
-              <a:rPr lang="en-US" sz="1200" dirty="0">
-                <a:solidFill>
-                  <a:srgbClr val="1B1E27"/>
-                </a:solidFill>
-                <a:latin typeface="Calibri" pitchFamily="34" charset="0"/>
-                <a:ea typeface="Calibri" pitchFamily="34" charset="-122"/>
-                <a:cs typeface="Calibri" pitchFamily="34" charset="-120"/>
-              </a:rPr>
-              <a:t>весь домен целиком — «Общее», «Оклады» и «Личные дела»</a:t>
-            </a:r>
-            <a:endParaRPr lang="en-US" sz="1200" dirty="0"/>
-          </a:p>
-        </p:txBody>
-      </p:sp>
-      <p:sp>
-        <p:nvSpPr>
-          <p:cNvPr id="29" name="Text 24"/>
-          <p:cNvSpPr/>
-          <p:nvPr/>
-        </p:nvSpPr>
-        <p:spPr>
-          <a:xfrm>
-            <a:off x="5577840" y="5650992"/>
-            <a:ext cx="5790895" cy="658368"/>
-          </a:xfrm>
-          <a:prstGeom prst="rect">
-            <a:avLst/>
-          </a:prstGeom>
-          <a:noFill/>
-          <a:ln/>
-        </p:spPr>
-        <p:txBody>
-          <a:bodyPr wrap="square" lIns="0" tIns="0" rIns="0" bIns="0" rtlCol="0" anchor="ctr"/>
-          <a:lstStyle/>
-          <a:p>
-            <a:pPr indent="0" marL="0">
-              <a:lnSpc>
-                <a:spcPct val="122000"/>
-              </a:lnSpc>
-              <a:buNone/>
-            </a:pPr>
-            <a:r>
-              <a:rPr lang="en-US" sz="1200" b="1" dirty="0">
-                <a:solidFill>
-                  <a:srgbClr val="1E4FB8"/>
-                </a:solidFill>
-                <a:latin typeface="Calibri" pitchFamily="34" charset="0"/>
-                <a:ea typeface="Calibri" pitchFamily="34" charset="-122"/>
-                <a:cs typeface="Calibri" pitchFamily="34" charset="-120"/>
-              </a:rPr>
-              <a:t>Особенность корня: </a:t>
-            </a:r>
-            <a:pPr indent="0" marL="0">
-              <a:lnSpc>
-                <a:spcPct val="122000"/>
-              </a:lnSpc>
-              <a:buNone/>
-            </a:pPr>
-            <a:r>
-              <a:rPr lang="en-US" sz="1200" dirty="0">
+              <a:rPr lang="en-US" sz="1150" dirty="0">
                 <a:solidFill>
                   <a:srgbClr val="5B6472"/>
                 </a:solidFill>
@@ -7543,7 +6990,7 @@
               </a:rPr>
               <a:t>привязан к корню — права default-узла в принципе нельзя сузить (тот же инвариант, что и в Microsoft Purview)</a:t>
             </a:r>
-            <a:endParaRPr lang="en-US" sz="1200" dirty="0"/>
+            <a:endParaRPr lang="en-US" sz="1150" dirty="0"/>
           </a:p>
         </p:txBody>
       </p:sp>
@@ -15572,7 +15019,7 @@
                 <a:ea typeface="Calibri" pitchFamily="34" charset="-122"/>
                 <a:cs typeface="Calibri" pitchFamily="34" charset="-120"/>
               </a:rPr>
-              <a:t>Пример: в домене «Кадры» отпуска и больничные должны быть видны всем сотрудникам, а оклады — только начальнику отдела, и только по своему отделу. Для табличных данных это решено штатно; для документов — нет.</a:t>
+              <a:t>Пример: в домене «Кадры» отпускные и больничные должны быть видны всем сотрудникам, а оклады — только узкому кругу лиц. Для табличных данных это решено штатно; для документов — нет.</a:t>
             </a:r>
             <a:endParaRPr lang="en-US" sz="1300" dirty="0"/>
           </a:p>

--- a/docs/presentations/case-17-lokalny-chat-i-ierarhiya-katalogov.pptx
+++ b/docs/presentations/case-17-lokalny-chat-i-ierarhiya-katalogov.pptx
@@ -607,7 +607,7 @@
           <a:p>
             <a:r>
               <a:rPr lang="en-US" dirty="0"/>
-              <a:t>Самая важная диаграмма всей колоды, полностью пересобрана: пример теперь использует настоящие, а не изобретённые названия — «Кадры», «Маркетинг», «Логистика» — то есть в точности канонический список доменов-примеров самой платформы («Логистика», «Персонал», «Продажи»; «Персонал» здесь — «Кадры»). Прежний вариант нарочно уходил от этих имён, чтобы не путать пример с зарезервированными названиями доменов платформы, и вводил ради этого отделы, которых в реальности не будет («Отдел маркетинга», «Юридический отдел», «Бухгалтерия» как под-ветки «Оклады» внутри одного домена). Этот обходной приём был лишним и только всё усложнял — раз слайд 11 всё равно показывает «Маркетинг» и «Логистику» как отдельные домены, пример стало логичнее строить сразу на них. Дерево теперь проще и площе: домен «Кадры» имеет ровно одного потомка — «Список сотрудников» (справочник/реестр сотрудников, ключевой узел-хаб), а у него, в свою очередь, ровно три потомка — «Отпускные», «Больничные», «Оклады». «Оклады» выделены цветом как более чувствительный узел — это готовит слайд 13, где персона «Сотрудник кадров» его не видит. Директор по персоналу привязан к корню и наследует всё дерево — это не частная удобная деталь примера, а закреплённый во всех проверенных индустриальных аналогах инвариант корня (в Microsoft Purview права default-домена в принципе нельзя ограничить). Тот факт, что «Список сотрудников» — единственный узел на этом уровне, специально подчёркнут в подписи: именно он на следующем слайде окажется общим для трёх доменов сразу.</a:t>
+              <a:t>Самая важная диаграмма всей колоды, полностью пересобрана под «алмазную» форму (diamond DAG) — сиблинги, сходящиеся в один общий лист, а не строгая цепочка и не плоский хаб. Она заменяет сразу два прежних варианта, оба с проблемами: (1) плоский хаб («Список сотрудников» как родитель, «Отпускные»/«Больничные»/«Оклады» как три его листа) утекал зарплатные данные в другие домены через общий хаб; (2) строгая цепочка в четыре уровня по прямой (Оклады→Больничные→Отпускные→Список сотрудников) эту утечку закрывала, но создавала новую проблему — тому, кому нужны только «Отпускные», приходилось структурно стоять «выше» и по дороге видеть ещё и «Больничные», хотя по чувствительности эти два узла не образуют строгий порядок относительно друг друга — неоправданно широкий грант. Алмаз решает обе проблемы разом: домен «Кадры» имеет ровно одного потомка — «Оклады» (самый чувствительный узел, наверху видимой цепочки); у «Оклады» — два сиблинга, «Больничные» и «Отпускные» (между собой не связаны, это две параллельные ветки, а не цепочка); оба сходятся в один общий лист — «Список сотрудников», у которого поэтому уже два родителя внутри одного домена. На следующем слайде тот же узел получит ещё двух родителей (домены «Маркетинг» и «Логистика») — итого четыре, но сам он остаётся листом: ничего чувствительного под ним не висит, так что неважно, через какого из родителей до него дошли. Пример теперь использует настоящие названия доменов платформы — «Кадры», «Маркетинг», «Логистика» — канонический список примеров самой платформы («Логистика», «Персонал», «Продажи»; «Персонал» здесь — «Кадры»). Директор по персоналу привязан к корню и наследует всё дерево — задокументированный во всех проверенных индустриальных аналогах инвариант корня (в Microsoft Purview права default-домена в принципе нельзя ограничить).</a:t>
             </a:r>
             <a:endParaRPr lang="en-US" dirty="0"/>
           </a:p>
@@ -695,7 +695,7 @@
           <a:p>
             <a:r>
               <a:rPr lang="en-US" dirty="0"/>
-              <a:t>Полностью пересобранный слайд: раньше показывал два домена («Кадры» и «Продажи»), теперь — три («Кадры», «Маркетинг», «Логистика»), сходящихся к одному и тому же узлу «Список сотрудников», введённому на предыдущем слайде — включая три его дочерних узла («Отпускные», «Больничные», «Оклады»), показанные здесь ещё раз под общим узлом. «Маркетинг» и «Логистика» — не ветки «Кадры», а отдельные, независимые домены верхнего уровня, сиблинги «Кадры» — это те самые канонические примеры доменов платформы («Логистика», «Персонал», «Продажи»). Точная формулировка, которую важно не смазать: это НЕ исключение из правила «видимость течёт только вниз» — правило продолжает действовать независимо и полностью внутри каждого из трёх доменов (персона на корне любого из них видит «Список сотрудников» по обычному нисходящему наследованию). Новое — только то, что один и тот же узел нисходяще достижим сразу из трёх разных деревьев одновременно, то есть имеет три родителя, а не одного — расширение идеи «один узел, два родителя, два домена» с предыдущего слайда сразу на три домена. Отдельно, явно как открытый вопрос, а не решённый факт: если «Список сотрудников» — один физический узел, персона, привязанная к корню «Маркетинг», обычным нисходящим наследованием доходит до него — но видит ли она весь список целиком (по всем отделам) или только часть, относящуюся к своему отделу? Само дерево, как оно здесь нарисовано, ответа на это не даёт — я сознательно не решаю этот вопрос ни в одну сторону, а называю его прямым продолжением уже поднятого раньше вопроса «2a» (гранулярность внутри одной коллекции, тоньше, чем узел дерева). Это ровно та же деталь, что иллюстрируется персоной «Начальник отдела маркетинга» на следующем слайде.</a:t>
+              <a:t>Полностью пересобранный слайд под новую форму: раньше общий узел «Список сотрудников» сам был хабом с тремя детьми, теперь он — лист, и это ключевое исправление по итогам ревью. Три независимых домена верхнего уровня — «Кадры», «Маркетинг», «Логистика» (канонические примеры платформы: «Логистика», «Персонал», «Продажи») — сходятся в одну и ту же точку четырьмя путями: «Кадры» доходит до неё через свою пару сиблингов «Больничные»/«Отпускные» (узел «Оклады», который стоит выше них на предыдущем слайде, здесь сознательно не перерисован — пометка рядом с доменным блоком отсылает к слайду 10); «Маркетинг» и «Логистика» — прямым ребром от своего корня. Итого у «Список сотрудников» четыре родителя, но сам он — лист без единого потомка: это и есть структурное исправление против прежней версии, где через общий хаб зарплатные данные утекали в другие домены. Обе вещи, которые независимый ревью просил сделать явными, есть на слайде: (1) легенда-напоминание в общем баре — узел на схеме означает узел плюс все его потомки, иначе «Оклады» на предыдущем слайде легко прочитать как «только сами оклады»; (2) новый открытый вопрос к разработчику о направлении обхода — что для узла с несколькими родителями видимость гарантированно обходится только вниз от точки привязки, а родительские рёбра при проверке доступа никогда не используются, вне зависимости от числа родителей; это нужно подтвердить как реальную гарантию реализации, а не молча предполагать. Старый открытый вопрос про «Маркетинг» — весь список или только свой отдел — сохранён дословно по сути (тот же класс вопроса, что и «2a»), но явно объявлено, что раньше сопутствовавший ему риск увидеть «Оклады» через общий хаб теперь закрыт структурно, потому что общий узел — лист.</a:t>
             </a:r>
             <a:endParaRPr lang="en-US" dirty="0"/>
           </a:p>
@@ -871,7 +871,7 @@
           <a:p>
             <a:r>
               <a:rPr lang="en-US" dirty="0"/>
-              <a:t>Три строки — три персоны на переименованном дереве «Кадры» (пример теперь строится на настоящих именах доменов платформы — «Кадры», «Маркетинг», «Логистика» — без искусственного ухода от них, см. заметки к слайду с деревом). Первая строка — «Сотрудник кадров» — составная привязка сразу к двум соседним узлам («Отпускные» и «Больничные»); это прямое продолжение того, как многодоменность уже работает сегодня без всякого дерева (в рабочей инструкции платформы — «выбрать домен(ы) из списка», множественное число), а не костыль поверх дерева. «Оклады» этой персоне не видны — они не потомки ни «Отпускные», ни «Больничные», и по смыслу не входят в обычные обязанности кадрового специалиста. Вторая строка — «Начальник отдела маркетинга» — самая содержательная: персона привязана к корню СОВСЕМ ДРУГОГО домена, «Маркетинг», а не «Кадры» — и тем не менее через обычное нисходящее наследование внутри своего домена доходит до общего узла «Список сотрудников» и до всех его потомков, включая «Оклады». Это конкретная иллюстрация открытого вопроса с предыдущего слайда, и здесь он повторён явно, а не спрятан: видит ли начальник маркетинга оклады всей компании (потому что узел общий и не разбит дальше) или только своего отдела (потому что это разумно ожидалось бы) — дерево как оно есть не отвечает, это тот же класс вопроса, что и «2a» (гранулярность внутри одной коллекции). Третья строка — Директор по персоналу — на корне «Кадры», поэтому видит всё дерево домена целиком; это задокументированный во всех проверенных индустриальных аналогах инвариант корня (Microsoft Purview: права default-домена нельзя ограничить), а не удобная деталь примера.</a:t>
+              <a:t>Три строки — три персоны на алмазном дереве «Кадры» (пример строится на настоящих именах доменов платформы — «Кадры», «Маркетинг», «Логистика» — см. заметки к слайду с деревом). Первая строка — «Сотрудник кадров» — составная привязка сразу к двум узлам-сиблингам («Больничные» и «Отпускные»); это прямое продолжение того, как многодоменность уже работает сегодня без всякого дерева (в рабочей инструкции платформы — «выбрать домен(ы) из списка», множественное число), а не костыль поверх дерева. Через оба узла она нисходяще доходит и до общего листа «Список сотрудников». «Оклады» этой персоне не видны — это общий родитель «Больничные» и «Отпускные», стоит выше обоих, а видимость вверх не течёт. Вторая строка — «Начальник отдела маркетинга» — самая содержательная: персона привязана к корню СОВСЕМ ДРУГОГО домена, «Маркетинг», а не «Кадры» — и тем не менее через обычное нисходящее наследование внутри своего домена доходит до общего узла «Список сотрудников». Главное, что здесь нужно сказать прямо: «Оклады», «Больничные» и «Отпускные» ей НЕ видны — они существуют только внутри «Кадры» и с корня «Маркетинг» структурно недостижимы, потому что «Список сотрудников» — лист без потомков. Риск увидеть оклады всей компании через общий узел, который раньше был реальной проблемой (общий узел был хабом с детьми), теперь закрыт структурно, и это стоит проговорить явно, а не просто перестать упоминать. Остаётся открытым только более тонкий вопрос, тот же класс, что и «2a»: видит ли она «Список сотрудников» целиком или только свою часть — это про гранулярность внутри уже единственного общего узла, а не про то, дотягивается ли она до чего-то лишнего сверху. Третья строка — Директор по персоналу — на корне «Кадры», поэтому видит всё дерево домена целиком — «Оклады», «Больничные», «Отпускные» и «Список сотрудников»; это задокументированный во всех проверенных индустриальных аналогах инвариант корня (Microsoft Purview: права default-домена нельзя ограничить), а не удобная деталь примера.</a:t>
             </a:r>
             <a:endParaRPr lang="en-US" dirty="0"/>
           </a:p>
@@ -3025,8 +3025,8 @@
         </p:nvSpPr>
         <p:spPr>
           <a:xfrm>
-            <a:off x="6096305" y="2057400"/>
-            <a:ext cx="0" cy="548640"/>
+            <a:off x="6096305" y="1984248"/>
+            <a:ext cx="0" cy="411480"/>
           </a:xfrm>
           <a:prstGeom prst="line">
             <a:avLst/>
@@ -3048,8 +3048,8 @@
         </p:nvSpPr>
         <p:spPr>
           <a:xfrm>
-            <a:off x="6096305" y="3246120"/>
-            <a:ext cx="0" cy="411480"/>
+            <a:off x="6096305" y="2926080"/>
+            <a:ext cx="0" cy="237744"/>
           </a:xfrm>
           <a:prstGeom prst="line">
             <a:avLst/>
@@ -3071,8 +3071,8 @@
         </p:nvSpPr>
         <p:spPr>
           <a:xfrm>
-            <a:off x="1737360" y="3657600"/>
-            <a:ext cx="8716975" cy="0"/>
+            <a:off x="4678985" y="3163824"/>
+            <a:ext cx="2834640" cy="0"/>
           </a:xfrm>
           <a:prstGeom prst="line">
             <a:avLst/>
@@ -3094,8 +3094,8 @@
         </p:nvSpPr>
         <p:spPr>
           <a:xfrm>
-            <a:off x="1737360" y="3657600"/>
-            <a:ext cx="0" cy="411480"/>
+            <a:off x="4678985" y="3163824"/>
+            <a:ext cx="0" cy="237744"/>
           </a:xfrm>
           <a:prstGeom prst="line">
             <a:avLst/>
@@ -3117,8 +3117,8 @@
         </p:nvSpPr>
         <p:spPr>
           <a:xfrm>
-            <a:off x="6096305" y="3657600"/>
-            <a:ext cx="0" cy="411480"/>
+            <a:off x="7513625" y="3163824"/>
+            <a:ext cx="0" cy="237744"/>
           </a:xfrm>
           <a:prstGeom prst="line">
             <a:avLst/>
@@ -3140,8 +3140,8 @@
         </p:nvSpPr>
         <p:spPr>
           <a:xfrm>
-            <a:off x="10454335" y="3657600"/>
-            <a:ext cx="0" cy="411480"/>
+            <a:off x="4678985" y="3931920"/>
+            <a:ext cx="0" cy="251460"/>
           </a:xfrm>
           <a:prstGeom prst="line">
             <a:avLst/>
@@ -3163,7 +3163,76 @@
         </p:nvSpPr>
         <p:spPr>
           <a:xfrm>
-            <a:off x="4724705" y="1554480"/>
+            <a:off x="7513625" y="3931920"/>
+            <a:ext cx="0" cy="251460"/>
+          </a:xfrm>
+          <a:prstGeom prst="line">
+            <a:avLst/>
+          </a:prstGeom>
+          <a:noFill/>
+          <a:ln w="19050">
+            <a:solidFill>
+              <a:srgbClr val="8891A0"/>
+            </a:solidFill>
+            <a:prstDash val="solid"/>
+          </a:ln>
+        </p:spPr>
+      </p:sp>
+      <p:sp>
+        <p:nvSpPr>
+          <p:cNvPr id="11" name="Shape 9"/>
+          <p:cNvSpPr/>
+          <p:nvPr/>
+        </p:nvSpPr>
+        <p:spPr>
+          <a:xfrm>
+            <a:off x="4678985" y="4183380"/>
+            <a:ext cx="2834640" cy="0"/>
+          </a:xfrm>
+          <a:prstGeom prst="line">
+            <a:avLst/>
+          </a:prstGeom>
+          <a:noFill/>
+          <a:ln w="19050">
+            <a:solidFill>
+              <a:srgbClr val="8891A0"/>
+            </a:solidFill>
+            <a:prstDash val="solid"/>
+          </a:ln>
+        </p:spPr>
+      </p:sp>
+      <p:sp>
+        <p:nvSpPr>
+          <p:cNvPr id="12" name="Shape 10"/>
+          <p:cNvSpPr/>
+          <p:nvPr/>
+        </p:nvSpPr>
+        <p:spPr>
+          <a:xfrm>
+            <a:off x="6096305" y="4183380"/>
+            <a:ext cx="0" cy="251460"/>
+          </a:xfrm>
+          <a:prstGeom prst="line">
+            <a:avLst/>
+          </a:prstGeom>
+          <a:noFill/>
+          <a:ln w="19050">
+            <a:solidFill>
+              <a:srgbClr val="8891A0"/>
+            </a:solidFill>
+            <a:prstDash val="solid"/>
+          </a:ln>
+        </p:spPr>
+      </p:sp>
+      <p:sp>
+        <p:nvSpPr>
+          <p:cNvPr id="13" name="Shape 11"/>
+          <p:cNvSpPr/>
+          <p:nvPr/>
+        </p:nvSpPr>
+        <p:spPr>
+          <a:xfrm>
+            <a:off x="4724705" y="1481328"/>
             <a:ext cx="2743200" cy="502920"/>
           </a:xfrm>
           <a:prstGeom prst="roundRect">
@@ -3184,13 +3253,13 @@
       </p:sp>
       <p:sp>
         <p:nvSpPr>
-          <p:cNvPr id="11" name="Text 9"/>
-          <p:cNvSpPr/>
-          <p:nvPr/>
-        </p:nvSpPr>
-        <p:spPr>
-          <a:xfrm>
-            <a:off x="4724705" y="1554480"/>
+          <p:cNvPr id="14" name="Text 12"/>
+          <p:cNvSpPr/>
+          <p:nvPr/>
+        </p:nvSpPr>
+        <p:spPr>
+          <a:xfrm>
+            <a:off x="4724705" y="1481328"/>
             <a:ext cx="2743200" cy="502920"/>
           </a:xfrm>
           <a:prstGeom prst="rect">
@@ -3226,18 +3295,87 @@
       </p:sp>
       <p:sp>
         <p:nvSpPr>
-          <p:cNvPr id="12" name="Shape 10"/>
-          <p:cNvSpPr/>
-          <p:nvPr/>
-        </p:nvSpPr>
-        <p:spPr>
-          <a:xfrm>
-            <a:off x="4587545" y="2606040"/>
-            <a:ext cx="3017520" cy="640080"/>
+          <p:cNvPr id="15" name="Shape 13"/>
+          <p:cNvSpPr/>
+          <p:nvPr/>
+        </p:nvSpPr>
+        <p:spPr>
+          <a:xfrm>
+            <a:off x="4907585" y="2395728"/>
+            <a:ext cx="2377440" cy="530352"/>
           </a:xfrm>
           <a:prstGeom prst="roundRect">
             <a:avLst>
-              <a:gd name="adj" fmla="val 11429"/>
+              <a:gd name="adj" fmla="val 13793"/>
+            </a:avLst>
+          </a:prstGeom>
+          <a:solidFill>
+            <a:srgbClr val="FBEED9"/>
+          </a:solidFill>
+          <a:ln w="19050">
+            <a:solidFill>
+              <a:srgbClr val="E8A33D"/>
+            </a:solidFill>
+            <a:prstDash val="solid"/>
+          </a:ln>
+        </p:spPr>
+      </p:sp>
+      <p:sp>
+        <p:nvSpPr>
+          <p:cNvPr id="16" name="Text 14"/>
+          <p:cNvSpPr/>
+          <p:nvPr/>
+        </p:nvSpPr>
+        <p:spPr>
+          <a:xfrm>
+            <a:off x="4907585" y="2395728"/>
+            <a:ext cx="2377440" cy="530352"/>
+          </a:xfrm>
+          <a:prstGeom prst="rect">
+            <a:avLst/>
+          </a:prstGeom>
+          <a:noFill/>
+          <a:ln/>
+        </p:spPr>
+        <p:txBody>
+          <a:bodyPr wrap="square" lIns="0" tIns="0" rIns="0" bIns="0" rtlCol="0" anchor="ctr"/>
+          <a:lstStyle/>
+          <a:p>
+            <a:pPr algn="ctr" indent="0" marL="0">
+              <a:lnSpc>
+                <a:spcPct val="105000"/>
+              </a:lnSpc>
+              <a:buNone/>
+            </a:pPr>
+            <a:r>
+              <a:rPr lang="en-US" sz="1400" b="1" dirty="0">
+                <a:solidFill>
+                  <a:srgbClr val="B87A1E"/>
+                </a:solidFill>
+                <a:latin typeface="Calibri" pitchFamily="34" charset="0"/>
+                <a:ea typeface="Calibri" pitchFamily="34" charset="-122"/>
+                <a:cs typeface="Calibri" pitchFamily="34" charset="-120"/>
+              </a:rPr>
+              <a:t>Оклады</a:t>
+            </a:r>
+            <a:endParaRPr lang="en-US" sz="1400" dirty="0"/>
+          </a:p>
+        </p:txBody>
+      </p:sp>
+      <p:sp>
+        <p:nvSpPr>
+          <p:cNvPr id="17" name="Shape 15"/>
+          <p:cNvSpPr/>
+          <p:nvPr/>
+        </p:nvSpPr>
+        <p:spPr>
+          <a:xfrm>
+            <a:off x="3627425" y="3401568"/>
+            <a:ext cx="2103120" cy="530352"/>
+          </a:xfrm>
+          <a:prstGeom prst="roundRect">
+            <a:avLst>
+              <a:gd name="adj" fmla="val 13793"/>
             </a:avLst>
           </a:prstGeom>
           <a:solidFill>
@@ -3253,14 +3391,14 @@
       </p:sp>
       <p:sp>
         <p:nvSpPr>
-          <p:cNvPr id="13" name="Text 11"/>
-          <p:cNvSpPr/>
-          <p:nvPr/>
-        </p:nvSpPr>
-        <p:spPr>
-          <a:xfrm>
-            <a:off x="4587545" y="2606040"/>
-            <a:ext cx="3017520" cy="640080"/>
+          <p:cNvPr id="18" name="Text 16"/>
+          <p:cNvSpPr/>
+          <p:nvPr/>
+        </p:nvSpPr>
+        <p:spPr>
+          <a:xfrm>
+            <a:off x="3627425" y="3401568"/>
+            <a:ext cx="2103120" cy="530352"/>
           </a:xfrm>
           <a:prstGeom prst="rect">
             <a:avLst/>
@@ -3279,7 +3417,7 @@
               <a:buNone/>
             </a:pPr>
             <a:r>
-              <a:rPr lang="en-US" sz="1600" b="1" dirty="0">
+              <a:rPr lang="en-US" sz="1300" b="1" dirty="0">
                 <a:solidFill>
                   <a:srgbClr val="1E4FB8"/>
                 </a:solidFill>
@@ -3287,26 +3425,26 @@
                 <a:ea typeface="Calibri" pitchFamily="34" charset="-122"/>
                 <a:cs typeface="Calibri" pitchFamily="34" charset="-120"/>
               </a:rPr>
-              <a:t>Список сотрудников</a:t>
-            </a:r>
-            <a:endParaRPr lang="en-US" sz="1600" dirty="0"/>
-          </a:p>
-        </p:txBody>
-      </p:sp>
-      <p:sp>
-        <p:nvSpPr>
-          <p:cNvPr id="14" name="Shape 12"/>
-          <p:cNvSpPr/>
-          <p:nvPr/>
-        </p:nvSpPr>
-        <p:spPr>
-          <a:xfrm>
-            <a:off x="822960" y="4069080"/>
-            <a:ext cx="1828800" cy="685800"/>
+              <a:t>Больничные</a:t>
+            </a:r>
+            <a:endParaRPr lang="en-US" sz="1300" dirty="0"/>
+          </a:p>
+        </p:txBody>
+      </p:sp>
+      <p:sp>
+        <p:nvSpPr>
+          <p:cNvPr id="19" name="Shape 17"/>
+          <p:cNvSpPr/>
+          <p:nvPr/>
+        </p:nvSpPr>
+        <p:spPr>
+          <a:xfrm>
+            <a:off x="6462065" y="3401568"/>
+            <a:ext cx="2103120" cy="530352"/>
           </a:xfrm>
           <a:prstGeom prst="roundRect">
             <a:avLst>
-              <a:gd name="adj" fmla="val 10667"/>
+              <a:gd name="adj" fmla="val 13793"/>
             </a:avLst>
           </a:prstGeom>
           <a:solidFill>
@@ -3322,14 +3460,14 @@
       </p:sp>
       <p:sp>
         <p:nvSpPr>
-          <p:cNvPr id="15" name="Text 13"/>
-          <p:cNvSpPr/>
-          <p:nvPr/>
-        </p:nvSpPr>
-        <p:spPr>
-          <a:xfrm>
-            <a:off x="822960" y="4069080"/>
-            <a:ext cx="1828800" cy="685800"/>
+          <p:cNvPr id="20" name="Text 18"/>
+          <p:cNvSpPr/>
+          <p:nvPr/>
+        </p:nvSpPr>
+        <p:spPr>
+          <a:xfrm>
+            <a:off x="6462065" y="3401568"/>
+            <a:ext cx="2103120" cy="530352"/>
           </a:xfrm>
           <a:prstGeom prst="rect">
             <a:avLst/>
@@ -3364,18 +3502,18 @@
       </p:sp>
       <p:sp>
         <p:nvSpPr>
-          <p:cNvPr id="16" name="Shape 14"/>
-          <p:cNvSpPr/>
-          <p:nvPr/>
-        </p:nvSpPr>
-        <p:spPr>
-          <a:xfrm>
-            <a:off x="5181905" y="4069080"/>
-            <a:ext cx="1828800" cy="685800"/>
+          <p:cNvPr id="21" name="Shape 19"/>
+          <p:cNvSpPr/>
+          <p:nvPr/>
+        </p:nvSpPr>
+        <p:spPr>
+          <a:xfrm>
+            <a:off x="4541825" y="4434840"/>
+            <a:ext cx="3108960" cy="566928"/>
           </a:xfrm>
           <a:prstGeom prst="roundRect">
             <a:avLst>
-              <a:gd name="adj" fmla="val 10667"/>
+              <a:gd name="adj" fmla="val 12903"/>
             </a:avLst>
           </a:prstGeom>
           <a:solidFill>
@@ -3391,14 +3529,14 @@
       </p:sp>
       <p:sp>
         <p:nvSpPr>
-          <p:cNvPr id="17" name="Text 15"/>
-          <p:cNvSpPr/>
-          <p:nvPr/>
-        </p:nvSpPr>
-        <p:spPr>
-          <a:xfrm>
-            <a:off x="5181905" y="4069080"/>
-            <a:ext cx="1828800" cy="685800"/>
+          <p:cNvPr id="22" name="Text 20"/>
+          <p:cNvSpPr/>
+          <p:nvPr/>
+        </p:nvSpPr>
+        <p:spPr>
+          <a:xfrm>
+            <a:off x="4541825" y="4434840"/>
+            <a:ext cx="3108960" cy="566928"/>
           </a:xfrm>
           <a:prstGeom prst="rect">
             <a:avLst/>
@@ -3417,7 +3555,7 @@
               <a:buNone/>
             </a:pPr>
             <a:r>
-              <a:rPr lang="en-US" sz="1300" b="1" dirty="0">
+              <a:rPr lang="en-US" sz="1600" b="1" dirty="0">
                 <a:solidFill>
                   <a:srgbClr val="1E4FB8"/>
                 </a:solidFill>
@@ -3425,91 +3563,22 @@
                 <a:ea typeface="Calibri" pitchFamily="34" charset="-122"/>
                 <a:cs typeface="Calibri" pitchFamily="34" charset="-120"/>
               </a:rPr>
-              <a:t>Больничные</a:t>
-            </a:r>
-            <a:endParaRPr lang="en-US" sz="1300" dirty="0"/>
-          </a:p>
-        </p:txBody>
-      </p:sp>
-      <p:sp>
-        <p:nvSpPr>
-          <p:cNvPr id="18" name="Shape 16"/>
-          <p:cNvSpPr/>
-          <p:nvPr/>
-        </p:nvSpPr>
-        <p:spPr>
-          <a:xfrm>
-            <a:off x="9539935" y="4069080"/>
-            <a:ext cx="1828800" cy="685800"/>
-          </a:xfrm>
-          <a:prstGeom prst="roundRect">
-            <a:avLst>
-              <a:gd name="adj" fmla="val 10667"/>
-            </a:avLst>
-          </a:prstGeom>
-          <a:solidFill>
-            <a:srgbClr val="FBEED9"/>
-          </a:solidFill>
-          <a:ln w="19050">
-            <a:solidFill>
-              <a:srgbClr val="E8A33D"/>
-            </a:solidFill>
-            <a:prstDash val="solid"/>
-          </a:ln>
-        </p:spPr>
-      </p:sp>
-      <p:sp>
-        <p:nvSpPr>
-          <p:cNvPr id="19" name="Text 17"/>
-          <p:cNvSpPr/>
-          <p:nvPr/>
-        </p:nvSpPr>
-        <p:spPr>
-          <a:xfrm>
-            <a:off x="9539935" y="4069080"/>
-            <a:ext cx="1828800" cy="685800"/>
-          </a:xfrm>
-          <a:prstGeom prst="rect">
-            <a:avLst/>
-          </a:prstGeom>
-          <a:noFill/>
-          <a:ln/>
-        </p:spPr>
-        <p:txBody>
-          <a:bodyPr wrap="square" lIns="0" tIns="0" rIns="0" bIns="0" rtlCol="0" anchor="ctr"/>
-          <a:lstStyle/>
-          <a:p>
-            <a:pPr algn="ctr" indent="0" marL="0">
-              <a:lnSpc>
-                <a:spcPct val="105000"/>
-              </a:lnSpc>
-              <a:buNone/>
-            </a:pPr>
-            <a:r>
-              <a:rPr lang="en-US" sz="1300" b="1" dirty="0">
-                <a:solidFill>
-                  <a:srgbClr val="B87A1E"/>
-                </a:solidFill>
-                <a:latin typeface="Calibri" pitchFamily="34" charset="0"/>
-                <a:ea typeface="Calibri" pitchFamily="34" charset="-122"/>
-                <a:cs typeface="Calibri" pitchFamily="34" charset="-120"/>
-              </a:rPr>
-              <a:t>Оклады</a:t>
-            </a:r>
-            <a:endParaRPr lang="en-US" sz="1300" dirty="0"/>
-          </a:p>
-        </p:txBody>
-      </p:sp>
-      <p:sp>
-        <p:nvSpPr>
-          <p:cNvPr id="20" name="Shape 18"/>
-          <p:cNvSpPr/>
-          <p:nvPr/>
-        </p:nvSpPr>
-        <p:spPr>
-          <a:xfrm>
-            <a:off x="7467905" y="1805940"/>
-            <a:ext cx="502920" cy="0"/>
+              <a:t>Список сотрудников</a:t>
+            </a:r>
+            <a:endParaRPr lang="en-US" sz="1600" dirty="0"/>
+          </a:p>
+        </p:txBody>
+      </p:sp>
+      <p:sp>
+        <p:nvSpPr>
+          <p:cNvPr id="23" name="Shape 21"/>
+          <p:cNvSpPr/>
+          <p:nvPr/>
+        </p:nvSpPr>
+        <p:spPr>
+          <a:xfrm>
+            <a:off x="7467905" y="1732788"/>
+            <a:ext cx="457200" cy="0"/>
           </a:xfrm>
           <a:prstGeom prst="line">
             <a:avLst/>
@@ -3525,13 +3594,13 @@
       </p:sp>
       <p:sp>
         <p:nvSpPr>
-          <p:cNvPr id="21" name="Shape 19"/>
-          <p:cNvSpPr/>
-          <p:nvPr/>
-        </p:nvSpPr>
-        <p:spPr>
-          <a:xfrm>
-            <a:off x="7970825" y="1577340"/>
+          <p:cNvPr id="24" name="Shape 22"/>
+          <p:cNvSpPr/>
+          <p:nvPr/>
+        </p:nvSpPr>
+        <p:spPr>
+          <a:xfrm>
+            <a:off x="7925105" y="1504188"/>
             <a:ext cx="2377440" cy="457200"/>
           </a:xfrm>
           <a:prstGeom prst="roundRect">
@@ -3547,13 +3616,13 @@
       </p:sp>
       <p:sp>
         <p:nvSpPr>
-          <p:cNvPr id="22" name="Text 20"/>
-          <p:cNvSpPr/>
-          <p:nvPr/>
-        </p:nvSpPr>
-        <p:spPr>
-          <a:xfrm>
-            <a:off x="8062265" y="1577340"/>
+          <p:cNvPr id="25" name="Text 23"/>
+          <p:cNvSpPr/>
+          <p:nvPr/>
+        </p:nvSpPr>
+        <p:spPr>
+          <a:xfrm>
+            <a:off x="8016545" y="1504188"/>
             <a:ext cx="2194560" cy="457200"/>
           </a:xfrm>
           <a:prstGeom prst="rect">
@@ -3589,13 +3658,13 @@
       </p:sp>
       <p:sp>
         <p:nvSpPr>
-          <p:cNvPr id="23" name="Text 21"/>
-          <p:cNvSpPr/>
-          <p:nvPr/>
-        </p:nvSpPr>
-        <p:spPr>
-          <a:xfrm>
-            <a:off x="548640" y="4983480"/>
+          <p:cNvPr id="26" name="Text 24"/>
+          <p:cNvSpPr/>
+          <p:nvPr/>
+        </p:nvSpPr>
+        <p:spPr>
+          <a:xfrm>
+            <a:off x="548640" y="5202936"/>
             <a:ext cx="11094415" cy="502920"/>
           </a:xfrm>
           <a:prstGeom prst="rect">
@@ -3623,7 +3692,7 @@
                 <a:ea typeface="Calibri" pitchFamily="34" charset="-122"/>
                 <a:cs typeface="Calibri" pitchFamily="34" charset="-120"/>
               </a:rPr>
-              <a:t>«Список сотрудников» — единственный потомок домена «Кадры»; «Отпускные», «Больничные» и «Оклады» — единственные потомки «Список сотрудников». Этот же узел появится ещё в двух доменах на следующем слайде.</a:t>
+              <a:t>«Оклады» — единственный потомок домена «Кадры»; «Больничные» и «Отпускные» — его дети-сиблинги, между собой напрямую не связанные, и оба сходятся в общий лист «Список сотрудников» — у него уже два родителя внутри одного домена. Этот же узел получит ещё двух родителей — от доменов «Маркетинг» и «Логистика» — на следующем слайде.</a:t>
             </a:r>
             <a:endParaRPr lang="en-US" sz="1200" dirty="0"/>
           </a:p>
@@ -3631,13 +3700,13 @@
       </p:sp>
       <p:sp>
         <p:nvSpPr>
-          <p:cNvPr id="24" name="Text 22"/>
-          <p:cNvSpPr/>
-          <p:nvPr/>
-        </p:nvSpPr>
-        <p:spPr>
-          <a:xfrm>
-            <a:off x="548640" y="5559552"/>
+          <p:cNvPr id="27" name="Text 25"/>
+          <p:cNvSpPr/>
+          <p:nvPr/>
+        </p:nvSpPr>
+        <p:spPr>
+          <a:xfrm>
+            <a:off x="548640" y="5751576"/>
             <a:ext cx="11094415" cy="320040"/>
           </a:xfrm>
           <a:prstGeom prst="rect">
@@ -3670,7 +3739,7 @@
       </p:sp>
       <p:sp>
         <p:nvSpPr>
-          <p:cNvPr id="25" name="Text 23"/>
+          <p:cNvPr id="28" name="Text 26"/>
           <p:cNvSpPr/>
           <p:nvPr/>
         </p:nvSpPr>
@@ -3709,7 +3778,7 @@
       </p:sp>
       <p:sp>
         <p:nvSpPr>
-          <p:cNvPr id="26" name="Text 24"/>
+          <p:cNvPr id="29" name="Text 27"/>
           <p:cNvSpPr/>
           <p:nvPr/>
         </p:nvSpPr>
@@ -3868,7 +3937,7 @@
         <p:spPr>
           <a:xfrm>
             <a:off x="548640" y="1481328"/>
-            <a:ext cx="11094415" cy="475488"/>
+            <a:ext cx="11094415" cy="457200"/>
           </a:xfrm>
           <a:prstGeom prst="rect">
             <a:avLst/>
@@ -3882,7 +3951,7 @@
           <a:p>
             <a:pPr indent="0" marL="0">
               <a:lnSpc>
-                <a:spcPct val="124000"/>
+                <a:spcPct val="122000"/>
               </a:lnSpc>
               <a:buNone/>
             </a:pPr>
@@ -3895,7 +3964,7 @@
                 <a:ea typeface="Calibri" pitchFamily="34" charset="-122"/>
                 <a:cs typeface="Calibri" pitchFamily="34" charset="-120"/>
               </a:rPr>
-              <a:t>Каталог не обязан быть листом только одного домена. «Список сотрудников» одновременно нужен трём независимым доменам — «Кадры», «Маркетинг», «Логистика» — и наследуется в каждом сверху вниз, как обычно.</a:t>
+              <a:t>Каталог не обязан быть в одном дереве. «Список сотрудников» нужен трём доменам сразу — «Кадры» (через «Больничные»/«Отпускные»), «Маркетинг» и «Логистика» (прямым ребром от корня) — и сам является листом.</a:t>
             </a:r>
             <a:endParaRPr lang="en-US" sz="1250" dirty="0"/>
           </a:p>
@@ -3909,12 +3978,12 @@
         </p:nvSpPr>
         <p:spPr>
           <a:xfrm>
-            <a:off x="1417320" y="2048256"/>
-            <a:ext cx="2103120" cy="384048"/>
+            <a:off x="1417320" y="2011680"/>
+            <a:ext cx="2103120" cy="365760"/>
           </a:xfrm>
           <a:prstGeom prst="roundRect">
             <a:avLst>
-              <a:gd name="adj" fmla="val 19048"/>
+              <a:gd name="adj" fmla="val 20000"/>
             </a:avLst>
           </a:prstGeom>
           <a:solidFill>
@@ -3931,8 +4000,8 @@
         </p:nvSpPr>
         <p:spPr>
           <a:xfrm>
-            <a:off x="1417320" y="2048256"/>
-            <a:ext cx="2103120" cy="384048"/>
+            <a:off x="1417320" y="2011680"/>
+            <a:ext cx="2103120" cy="365760"/>
           </a:xfrm>
           <a:prstGeom prst="rect">
             <a:avLst/>
@@ -3970,12 +4039,12 @@
         </p:nvSpPr>
         <p:spPr>
           <a:xfrm>
-            <a:off x="5044745" y="2048256"/>
-            <a:ext cx="2103120" cy="384048"/>
+            <a:off x="5044745" y="2011680"/>
+            <a:ext cx="2103120" cy="365760"/>
           </a:xfrm>
           <a:prstGeom prst="roundRect">
             <a:avLst>
-              <a:gd name="adj" fmla="val 19048"/>
+              <a:gd name="adj" fmla="val 20000"/>
             </a:avLst>
           </a:prstGeom>
           <a:solidFill>
@@ -3992,8 +4061,8 @@
         </p:nvSpPr>
         <p:spPr>
           <a:xfrm>
-            <a:off x="5044745" y="2048256"/>
-            <a:ext cx="2103120" cy="384048"/>
+            <a:off x="5044745" y="2011680"/>
+            <a:ext cx="2103120" cy="365760"/>
           </a:xfrm>
           <a:prstGeom prst="rect">
             <a:avLst/>
@@ -4031,12 +4100,12 @@
         </p:nvSpPr>
         <p:spPr>
           <a:xfrm>
-            <a:off x="8668512" y="2048256"/>
-            <a:ext cx="2103120" cy="384048"/>
+            <a:off x="8668512" y="2011680"/>
+            <a:ext cx="2103120" cy="365760"/>
           </a:xfrm>
           <a:prstGeom prst="roundRect">
             <a:avLst>
-              <a:gd name="adj" fmla="val 19048"/>
+              <a:gd name="adj" fmla="val 20000"/>
             </a:avLst>
           </a:prstGeom>
           <a:solidFill>
@@ -4053,8 +4122,8 @@
         </p:nvSpPr>
         <p:spPr>
           <a:xfrm>
-            <a:off x="8668512" y="2048256"/>
-            <a:ext cx="2103120" cy="384048"/>
+            <a:off x="8668512" y="2011680"/>
+            <a:ext cx="2103120" cy="365760"/>
           </a:xfrm>
           <a:prstGeom prst="rect">
             <a:avLst/>
@@ -4092,8 +4161,8 @@
         </p:nvSpPr>
         <p:spPr>
           <a:xfrm>
-            <a:off x="548640" y="2066544"/>
-            <a:ext cx="777240" cy="347472"/>
+            <a:off x="548640" y="2029968"/>
+            <a:ext cx="777240" cy="329184"/>
           </a:xfrm>
           <a:prstGeom prst="rect">
             <a:avLst/>
@@ -4134,8 +4203,8 @@
         </p:nvSpPr>
         <p:spPr>
           <a:xfrm>
-            <a:off x="10863072" y="2066544"/>
-            <a:ext cx="779983" cy="347472"/>
+            <a:off x="7257593" y="2029968"/>
+            <a:ext cx="1417320" cy="329184"/>
           </a:xfrm>
           <a:prstGeom prst="rect">
             <a:avLst/>
@@ -4162,6 +4231,48 @@
                 <a:ea typeface="Calibri" pitchFamily="34" charset="-122"/>
                 <a:cs typeface="Calibri" pitchFamily="34" charset="-120"/>
               </a:rPr>
+              <a:t>«Оклады» — выше, см. слайд 10</a:t>
+            </a:r>
+            <a:endParaRPr lang="en-US" sz="800" dirty="0"/>
+          </a:p>
+        </p:txBody>
+      </p:sp>
+      <p:sp>
+        <p:nvSpPr>
+          <p:cNvPr id="13" name="Text 11"/>
+          <p:cNvSpPr/>
+          <p:nvPr/>
+        </p:nvSpPr>
+        <p:spPr>
+          <a:xfrm>
+            <a:off x="10863072" y="2029968"/>
+            <a:ext cx="779983" cy="329184"/>
+          </a:xfrm>
+          <a:prstGeom prst="rect">
+            <a:avLst/>
+          </a:prstGeom>
+          <a:noFill/>
+          <a:ln/>
+        </p:spPr>
+        <p:txBody>
+          <a:bodyPr wrap="square" lIns="0" tIns="0" rIns="0" bIns="0" rtlCol="0" anchor="ctr"/>
+          <a:lstStyle/>
+          <a:p>
+            <a:pPr algn="l" indent="0" marL="0">
+              <a:lnSpc>
+                <a:spcPct val="100000"/>
+              </a:lnSpc>
+              <a:buNone/>
+            </a:pPr>
+            <a:r>
+              <a:rPr lang="en-US" sz="800" i="1" dirty="0">
+                <a:solidFill>
+                  <a:srgbClr val="5B6472"/>
+                </a:solidFill>
+                <a:latin typeface="Calibri" pitchFamily="34" charset="0"/>
+                <a:ea typeface="Calibri" pitchFamily="34" charset="-122"/>
+                <a:cs typeface="Calibri" pitchFamily="34" charset="-120"/>
+              </a:rPr>
               <a:t>не всё дерево показано</a:t>
             </a:r>
             <a:endParaRPr lang="en-US" sz="800" dirty="0"/>
@@ -4170,14 +4281,330 @@
       </p:sp>
       <p:sp>
         <p:nvSpPr>
-          <p:cNvPr id="13" name="Shape 11"/>
-          <p:cNvSpPr/>
-          <p:nvPr/>
-        </p:nvSpPr>
-        <p:spPr>
-          <a:xfrm>
-            <a:off x="2468880" y="2432304"/>
-            <a:ext cx="2438705" cy="777240"/>
+          <p:cNvPr id="14" name="Shape 12"/>
+          <p:cNvSpPr/>
+          <p:nvPr/>
+        </p:nvSpPr>
+        <p:spPr>
+          <a:xfrm>
+            <a:off x="6096305" y="2377440"/>
+            <a:ext cx="0" cy="182880"/>
+          </a:xfrm>
+          <a:prstGeom prst="line">
+            <a:avLst/>
+          </a:prstGeom>
+          <a:noFill/>
+          <a:ln w="19050">
+            <a:solidFill>
+              <a:srgbClr val="8891A0"/>
+            </a:solidFill>
+            <a:prstDash val="solid"/>
+          </a:ln>
+        </p:spPr>
+      </p:sp>
+      <p:sp>
+        <p:nvSpPr>
+          <p:cNvPr id="15" name="Shape 13"/>
+          <p:cNvSpPr/>
+          <p:nvPr/>
+        </p:nvSpPr>
+        <p:spPr>
+          <a:xfrm>
+            <a:off x="5227625" y="2560320"/>
+            <a:ext cx="1737360" cy="0"/>
+          </a:xfrm>
+          <a:prstGeom prst="line">
+            <a:avLst/>
+          </a:prstGeom>
+          <a:noFill/>
+          <a:ln w="19050">
+            <a:solidFill>
+              <a:srgbClr val="8891A0"/>
+            </a:solidFill>
+            <a:prstDash val="solid"/>
+          </a:ln>
+        </p:spPr>
+      </p:sp>
+      <p:sp>
+        <p:nvSpPr>
+          <p:cNvPr id="16" name="Shape 14"/>
+          <p:cNvSpPr/>
+          <p:nvPr/>
+        </p:nvSpPr>
+        <p:spPr>
+          <a:xfrm>
+            <a:off x="5227625" y="2560320"/>
+            <a:ext cx="0" cy="182880"/>
+          </a:xfrm>
+          <a:prstGeom prst="line">
+            <a:avLst/>
+          </a:prstGeom>
+          <a:noFill/>
+          <a:ln w="19050">
+            <a:solidFill>
+              <a:srgbClr val="8891A0"/>
+            </a:solidFill>
+            <a:prstDash val="solid"/>
+          </a:ln>
+        </p:spPr>
+      </p:sp>
+      <p:sp>
+        <p:nvSpPr>
+          <p:cNvPr id="17" name="Shape 15"/>
+          <p:cNvSpPr/>
+          <p:nvPr/>
+        </p:nvSpPr>
+        <p:spPr>
+          <a:xfrm>
+            <a:off x="6964985" y="2560320"/>
+            <a:ext cx="0" cy="182880"/>
+          </a:xfrm>
+          <a:prstGeom prst="line">
+            <a:avLst/>
+          </a:prstGeom>
+          <a:noFill/>
+          <a:ln w="19050">
+            <a:solidFill>
+              <a:srgbClr val="8891A0"/>
+            </a:solidFill>
+            <a:prstDash val="solid"/>
+          </a:ln>
+        </p:spPr>
+      </p:sp>
+      <p:sp>
+        <p:nvSpPr>
+          <p:cNvPr id="18" name="Shape 16"/>
+          <p:cNvSpPr/>
+          <p:nvPr/>
+        </p:nvSpPr>
+        <p:spPr>
+          <a:xfrm>
+            <a:off x="4404665" y="2743200"/>
+            <a:ext cx="1645920" cy="420624"/>
+          </a:xfrm>
+          <a:prstGeom prst="roundRect">
+            <a:avLst>
+              <a:gd name="adj" fmla="val 17391"/>
+            </a:avLst>
+          </a:prstGeom>
+          <a:solidFill>
+            <a:srgbClr val="E4ECFD"/>
+          </a:solidFill>
+          <a:ln w="19050">
+            <a:solidFill>
+              <a:srgbClr val="2F6FED"/>
+            </a:solidFill>
+            <a:prstDash val="solid"/>
+          </a:ln>
+        </p:spPr>
+      </p:sp>
+      <p:sp>
+        <p:nvSpPr>
+          <p:cNvPr id="19" name="Text 17"/>
+          <p:cNvSpPr/>
+          <p:nvPr/>
+        </p:nvSpPr>
+        <p:spPr>
+          <a:xfrm>
+            <a:off x="4404665" y="2743200"/>
+            <a:ext cx="1645920" cy="420624"/>
+          </a:xfrm>
+          <a:prstGeom prst="rect">
+            <a:avLst/>
+          </a:prstGeom>
+          <a:noFill/>
+          <a:ln/>
+        </p:spPr>
+        <p:txBody>
+          <a:bodyPr wrap="square" lIns="0" tIns="0" rIns="0" bIns="0" rtlCol="0" anchor="ctr"/>
+          <a:lstStyle/>
+          <a:p>
+            <a:pPr algn="ctr" indent="0" marL="0">
+              <a:buNone/>
+            </a:pPr>
+            <a:r>
+              <a:rPr lang="en-US" sz="1150" b="1" dirty="0">
+                <a:solidFill>
+                  <a:srgbClr val="1E4FB8"/>
+                </a:solidFill>
+                <a:latin typeface="Calibri" pitchFamily="34" charset="0"/>
+                <a:ea typeface="Calibri" pitchFamily="34" charset="-122"/>
+                <a:cs typeface="Calibri" pitchFamily="34" charset="-120"/>
+              </a:rPr>
+              <a:t>Больничные</a:t>
+            </a:r>
+            <a:endParaRPr lang="en-US" sz="1150" dirty="0"/>
+          </a:p>
+        </p:txBody>
+      </p:sp>
+      <p:sp>
+        <p:nvSpPr>
+          <p:cNvPr id="20" name="Shape 18"/>
+          <p:cNvSpPr/>
+          <p:nvPr/>
+        </p:nvSpPr>
+        <p:spPr>
+          <a:xfrm>
+            <a:off x="6142025" y="2743200"/>
+            <a:ext cx="1645920" cy="420624"/>
+          </a:xfrm>
+          <a:prstGeom prst="roundRect">
+            <a:avLst>
+              <a:gd name="adj" fmla="val 17391"/>
+            </a:avLst>
+          </a:prstGeom>
+          <a:solidFill>
+            <a:srgbClr val="E4ECFD"/>
+          </a:solidFill>
+          <a:ln w="19050">
+            <a:solidFill>
+              <a:srgbClr val="2F6FED"/>
+            </a:solidFill>
+            <a:prstDash val="solid"/>
+          </a:ln>
+        </p:spPr>
+      </p:sp>
+      <p:sp>
+        <p:nvSpPr>
+          <p:cNvPr id="21" name="Text 19"/>
+          <p:cNvSpPr/>
+          <p:nvPr/>
+        </p:nvSpPr>
+        <p:spPr>
+          <a:xfrm>
+            <a:off x="6142025" y="2743200"/>
+            <a:ext cx="1645920" cy="420624"/>
+          </a:xfrm>
+          <a:prstGeom prst="rect">
+            <a:avLst/>
+          </a:prstGeom>
+          <a:noFill/>
+          <a:ln/>
+        </p:spPr>
+        <p:txBody>
+          <a:bodyPr wrap="square" lIns="0" tIns="0" rIns="0" bIns="0" rtlCol="0" anchor="ctr"/>
+          <a:lstStyle/>
+          <a:p>
+            <a:pPr algn="ctr" indent="0" marL="0">
+              <a:buNone/>
+            </a:pPr>
+            <a:r>
+              <a:rPr lang="en-US" sz="1150" b="1" dirty="0">
+                <a:solidFill>
+                  <a:srgbClr val="1E4FB8"/>
+                </a:solidFill>
+                <a:latin typeface="Calibri" pitchFamily="34" charset="0"/>
+                <a:ea typeface="Calibri" pitchFamily="34" charset="-122"/>
+                <a:cs typeface="Calibri" pitchFamily="34" charset="-120"/>
+              </a:rPr>
+              <a:t>Отпускные</a:t>
+            </a:r>
+            <a:endParaRPr lang="en-US" sz="1150" dirty="0"/>
+          </a:p>
+        </p:txBody>
+      </p:sp>
+      <p:sp>
+        <p:nvSpPr>
+          <p:cNvPr id="22" name="Shape 20"/>
+          <p:cNvSpPr/>
+          <p:nvPr/>
+        </p:nvSpPr>
+        <p:spPr>
+          <a:xfrm>
+            <a:off x="5227625" y="3163824"/>
+            <a:ext cx="0" cy="315468"/>
+          </a:xfrm>
+          <a:prstGeom prst="line">
+            <a:avLst/>
+          </a:prstGeom>
+          <a:noFill/>
+          <a:ln w="19050">
+            <a:solidFill>
+              <a:srgbClr val="8891A0"/>
+            </a:solidFill>
+            <a:prstDash val="solid"/>
+          </a:ln>
+        </p:spPr>
+      </p:sp>
+      <p:sp>
+        <p:nvSpPr>
+          <p:cNvPr id="23" name="Shape 21"/>
+          <p:cNvSpPr/>
+          <p:nvPr/>
+        </p:nvSpPr>
+        <p:spPr>
+          <a:xfrm>
+            <a:off x="6964985" y="3163824"/>
+            <a:ext cx="0" cy="315468"/>
+          </a:xfrm>
+          <a:prstGeom prst="line">
+            <a:avLst/>
+          </a:prstGeom>
+          <a:noFill/>
+          <a:ln w="19050">
+            <a:solidFill>
+              <a:srgbClr val="8891A0"/>
+            </a:solidFill>
+            <a:prstDash val="solid"/>
+          </a:ln>
+        </p:spPr>
+      </p:sp>
+      <p:sp>
+        <p:nvSpPr>
+          <p:cNvPr id="24" name="Shape 22"/>
+          <p:cNvSpPr/>
+          <p:nvPr/>
+        </p:nvSpPr>
+        <p:spPr>
+          <a:xfrm>
+            <a:off x="5227625" y="3479292"/>
+            <a:ext cx="1737360" cy="0"/>
+          </a:xfrm>
+          <a:prstGeom prst="line">
+            <a:avLst/>
+          </a:prstGeom>
+          <a:noFill/>
+          <a:ln w="19050">
+            <a:solidFill>
+              <a:srgbClr val="8891A0"/>
+            </a:solidFill>
+            <a:prstDash val="solid"/>
+          </a:ln>
+        </p:spPr>
+      </p:sp>
+      <p:sp>
+        <p:nvSpPr>
+          <p:cNvPr id="25" name="Shape 23"/>
+          <p:cNvSpPr/>
+          <p:nvPr/>
+        </p:nvSpPr>
+        <p:spPr>
+          <a:xfrm>
+            <a:off x="6096305" y="3479292"/>
+            <a:ext cx="0" cy="315468"/>
+          </a:xfrm>
+          <a:prstGeom prst="line">
+            <a:avLst/>
+          </a:prstGeom>
+          <a:noFill/>
+          <a:ln w="19050">
+            <a:solidFill>
+              <a:srgbClr val="8891A0"/>
+            </a:solidFill>
+            <a:prstDash val="solid"/>
+          </a:ln>
+        </p:spPr>
+      </p:sp>
+      <p:sp>
+        <p:nvSpPr>
+          <p:cNvPr id="26" name="Shape 24"/>
+          <p:cNvSpPr/>
+          <p:nvPr/>
+        </p:nvSpPr>
+        <p:spPr>
+          <a:xfrm>
+            <a:off x="2468880" y="2377440"/>
+            <a:ext cx="2667305" cy="1417320"/>
           </a:xfrm>
           <a:prstGeom prst="line">
             <a:avLst/>
@@ -4193,14 +4620,14 @@
       </p:sp>
       <p:sp>
         <p:nvSpPr>
-          <p:cNvPr id="14" name="Shape 12"/>
-          <p:cNvSpPr/>
-          <p:nvPr/>
-        </p:nvSpPr>
-        <p:spPr>
-          <a:xfrm>
-            <a:off x="6096305" y="2432304"/>
-            <a:ext cx="0" cy="777240"/>
+          <p:cNvPr id="27" name="Shape 25"/>
+          <p:cNvSpPr/>
+          <p:nvPr/>
+        </p:nvSpPr>
+        <p:spPr>
+          <a:xfrm>
+            <a:off x="7056425" y="2377440"/>
+            <a:ext cx="2663647" cy="1417320"/>
           </a:xfrm>
           <a:prstGeom prst="line">
             <a:avLst/>
@@ -4216,37 +4643,14 @@
       </p:sp>
       <p:sp>
         <p:nvSpPr>
-          <p:cNvPr id="15" name="Shape 13"/>
-          <p:cNvSpPr/>
-          <p:nvPr/>
-        </p:nvSpPr>
-        <p:spPr>
-          <a:xfrm>
-            <a:off x="7285025" y="2432304"/>
-            <a:ext cx="2435047" cy="777240"/>
-          </a:xfrm>
-          <a:prstGeom prst="line">
-            <a:avLst/>
-          </a:prstGeom>
-          <a:noFill/>
-          <a:ln w="25400">
-            <a:solidFill>
-              <a:srgbClr val="2F6FED"/>
-            </a:solidFill>
-            <a:prstDash val="solid"/>
-          </a:ln>
-        </p:spPr>
-      </p:sp>
-      <p:sp>
-        <p:nvSpPr>
-          <p:cNvPr id="16" name="Shape 14"/>
-          <p:cNvSpPr/>
-          <p:nvPr/>
-        </p:nvSpPr>
-        <p:spPr>
-          <a:xfrm>
-            <a:off x="4541825" y="3209544"/>
-            <a:ext cx="3108960" cy="502920"/>
+          <p:cNvPr id="28" name="Shape 26"/>
+          <p:cNvSpPr/>
+          <p:nvPr/>
+        </p:nvSpPr>
+        <p:spPr>
+          <a:xfrm>
+            <a:off x="4770425" y="3794760"/>
+            <a:ext cx="2651760" cy="502920"/>
           </a:xfrm>
           <a:prstGeom prst="roundRect">
             <a:avLst>
@@ -4266,14 +4670,14 @@
       </p:sp>
       <p:sp>
         <p:nvSpPr>
-          <p:cNvPr id="17" name="Text 15"/>
-          <p:cNvSpPr/>
-          <p:nvPr/>
-        </p:nvSpPr>
-        <p:spPr>
-          <a:xfrm>
-            <a:off x="4541825" y="3209544"/>
-            <a:ext cx="3108960" cy="502920"/>
+          <p:cNvPr id="29" name="Text 27"/>
+          <p:cNvSpPr/>
+          <p:nvPr/>
+        </p:nvSpPr>
+        <p:spPr>
+          <a:xfrm>
+            <a:off x="4770425" y="3794760"/>
+            <a:ext cx="2651760" cy="502920"/>
           </a:xfrm>
           <a:prstGeom prst="rect">
             <a:avLst/>
@@ -4305,331 +4709,18 @@
       </p:sp>
       <p:sp>
         <p:nvSpPr>
-          <p:cNvPr id="18" name="Shape 16"/>
-          <p:cNvSpPr/>
-          <p:nvPr/>
-        </p:nvSpPr>
-        <p:spPr>
-          <a:xfrm>
-            <a:off x="6096305" y="3712464"/>
-            <a:ext cx="0" cy="137160"/>
-          </a:xfrm>
-          <a:prstGeom prst="line">
-            <a:avLst/>
-          </a:prstGeom>
-          <a:noFill/>
-          <a:ln w="19050">
-            <a:solidFill>
-              <a:srgbClr val="8891A0"/>
-            </a:solidFill>
-            <a:prstDash val="solid"/>
-          </a:ln>
-        </p:spPr>
-      </p:sp>
-      <p:sp>
-        <p:nvSpPr>
-          <p:cNvPr id="19" name="Shape 17"/>
-          <p:cNvSpPr/>
-          <p:nvPr/>
-        </p:nvSpPr>
-        <p:spPr>
-          <a:xfrm>
-            <a:off x="1737360" y="3849624"/>
-            <a:ext cx="8716975" cy="0"/>
-          </a:xfrm>
-          <a:prstGeom prst="line">
-            <a:avLst/>
-          </a:prstGeom>
-          <a:noFill/>
-          <a:ln w="19050">
-            <a:solidFill>
-              <a:srgbClr val="8891A0"/>
-            </a:solidFill>
-            <a:prstDash val="solid"/>
-          </a:ln>
-        </p:spPr>
-      </p:sp>
-      <p:sp>
-        <p:nvSpPr>
-          <p:cNvPr id="20" name="Shape 18"/>
-          <p:cNvSpPr/>
-          <p:nvPr/>
-        </p:nvSpPr>
-        <p:spPr>
-          <a:xfrm>
-            <a:off x="1737360" y="3849624"/>
-            <a:ext cx="0" cy="137160"/>
-          </a:xfrm>
-          <a:prstGeom prst="line">
-            <a:avLst/>
-          </a:prstGeom>
-          <a:noFill/>
-          <a:ln w="19050">
-            <a:solidFill>
-              <a:srgbClr val="8891A0"/>
-            </a:solidFill>
-            <a:prstDash val="solid"/>
-          </a:ln>
-        </p:spPr>
-      </p:sp>
-      <p:sp>
-        <p:nvSpPr>
-          <p:cNvPr id="21" name="Shape 19"/>
-          <p:cNvSpPr/>
-          <p:nvPr/>
-        </p:nvSpPr>
-        <p:spPr>
-          <a:xfrm>
-            <a:off x="6096305" y="3849624"/>
-            <a:ext cx="0" cy="137160"/>
-          </a:xfrm>
-          <a:prstGeom prst="line">
-            <a:avLst/>
-          </a:prstGeom>
-          <a:noFill/>
-          <a:ln w="19050">
-            <a:solidFill>
-              <a:srgbClr val="8891A0"/>
-            </a:solidFill>
-            <a:prstDash val="solid"/>
-          </a:ln>
-        </p:spPr>
-      </p:sp>
-      <p:sp>
-        <p:nvSpPr>
-          <p:cNvPr id="22" name="Shape 20"/>
-          <p:cNvSpPr/>
-          <p:nvPr/>
-        </p:nvSpPr>
-        <p:spPr>
-          <a:xfrm>
-            <a:off x="10454335" y="3849624"/>
-            <a:ext cx="0" cy="137160"/>
-          </a:xfrm>
-          <a:prstGeom prst="line">
-            <a:avLst/>
-          </a:prstGeom>
-          <a:noFill/>
-          <a:ln w="19050">
-            <a:solidFill>
-              <a:srgbClr val="8891A0"/>
-            </a:solidFill>
-            <a:prstDash val="solid"/>
-          </a:ln>
-        </p:spPr>
-      </p:sp>
-      <p:sp>
-        <p:nvSpPr>
-          <p:cNvPr id="23" name="Shape 21"/>
-          <p:cNvSpPr/>
-          <p:nvPr/>
-        </p:nvSpPr>
-        <p:spPr>
-          <a:xfrm>
-            <a:off x="822960" y="3986784"/>
-            <a:ext cx="1828800" cy="475488"/>
+          <p:cNvPr id="30" name="Shape 28"/>
+          <p:cNvSpPr/>
+          <p:nvPr/>
+        </p:nvSpPr>
+        <p:spPr>
+          <a:xfrm>
+            <a:off x="548640" y="4407408"/>
+            <a:ext cx="11094415" cy="502920"/>
           </a:xfrm>
           <a:prstGeom prst="roundRect">
             <a:avLst>
-              <a:gd name="adj" fmla="val 15385"/>
-            </a:avLst>
-          </a:prstGeom>
-          <a:solidFill>
-            <a:srgbClr val="E4ECFD"/>
-          </a:solidFill>
-          <a:ln w="19050">
-            <a:solidFill>
-              <a:srgbClr val="2F6FED"/>
-            </a:solidFill>
-            <a:prstDash val="solid"/>
-          </a:ln>
-        </p:spPr>
-      </p:sp>
-      <p:sp>
-        <p:nvSpPr>
-          <p:cNvPr id="24" name="Text 22"/>
-          <p:cNvSpPr/>
-          <p:nvPr/>
-        </p:nvSpPr>
-        <p:spPr>
-          <a:xfrm>
-            <a:off x="822960" y="3986784"/>
-            <a:ext cx="1828800" cy="475488"/>
-          </a:xfrm>
-          <a:prstGeom prst="rect">
-            <a:avLst/>
-          </a:prstGeom>
-          <a:noFill/>
-          <a:ln/>
-        </p:spPr>
-        <p:txBody>
-          <a:bodyPr wrap="square" lIns="0" tIns="0" rIns="0" bIns="0" rtlCol="0" anchor="ctr"/>
-          <a:lstStyle/>
-          <a:p>
-            <a:pPr algn="ctr" indent="0" marL="0">
-              <a:buNone/>
-            </a:pPr>
-            <a:r>
-              <a:rPr lang="en-US" sz="1200" b="1" dirty="0">
-                <a:solidFill>
-                  <a:srgbClr val="1E4FB8"/>
-                </a:solidFill>
-                <a:latin typeface="Calibri" pitchFamily="34" charset="0"/>
-                <a:ea typeface="Calibri" pitchFamily="34" charset="-122"/>
-                <a:cs typeface="Calibri" pitchFamily="34" charset="-120"/>
-              </a:rPr>
-              <a:t>Отпускные</a:t>
-            </a:r>
-            <a:endParaRPr lang="en-US" sz="1200" dirty="0"/>
-          </a:p>
-        </p:txBody>
-      </p:sp>
-      <p:sp>
-        <p:nvSpPr>
-          <p:cNvPr id="25" name="Shape 23"/>
-          <p:cNvSpPr/>
-          <p:nvPr/>
-        </p:nvSpPr>
-        <p:spPr>
-          <a:xfrm>
-            <a:off x="5181905" y="3986784"/>
-            <a:ext cx="1828800" cy="475488"/>
-          </a:xfrm>
-          <a:prstGeom prst="roundRect">
-            <a:avLst>
-              <a:gd name="adj" fmla="val 15385"/>
-            </a:avLst>
-          </a:prstGeom>
-          <a:solidFill>
-            <a:srgbClr val="E4ECFD"/>
-          </a:solidFill>
-          <a:ln w="19050">
-            <a:solidFill>
-              <a:srgbClr val="2F6FED"/>
-            </a:solidFill>
-            <a:prstDash val="solid"/>
-          </a:ln>
-        </p:spPr>
-      </p:sp>
-      <p:sp>
-        <p:nvSpPr>
-          <p:cNvPr id="26" name="Text 24"/>
-          <p:cNvSpPr/>
-          <p:nvPr/>
-        </p:nvSpPr>
-        <p:spPr>
-          <a:xfrm>
-            <a:off x="5181905" y="3986784"/>
-            <a:ext cx="1828800" cy="475488"/>
-          </a:xfrm>
-          <a:prstGeom prst="rect">
-            <a:avLst/>
-          </a:prstGeom>
-          <a:noFill/>
-          <a:ln/>
-        </p:spPr>
-        <p:txBody>
-          <a:bodyPr wrap="square" lIns="0" tIns="0" rIns="0" bIns="0" rtlCol="0" anchor="ctr"/>
-          <a:lstStyle/>
-          <a:p>
-            <a:pPr algn="ctr" indent="0" marL="0">
-              <a:buNone/>
-            </a:pPr>
-            <a:r>
-              <a:rPr lang="en-US" sz="1200" b="1" dirty="0">
-                <a:solidFill>
-                  <a:srgbClr val="1E4FB8"/>
-                </a:solidFill>
-                <a:latin typeface="Calibri" pitchFamily="34" charset="0"/>
-                <a:ea typeface="Calibri" pitchFamily="34" charset="-122"/>
-                <a:cs typeface="Calibri" pitchFamily="34" charset="-120"/>
-              </a:rPr>
-              <a:t>Больничные</a:t>
-            </a:r>
-            <a:endParaRPr lang="en-US" sz="1200" dirty="0"/>
-          </a:p>
-        </p:txBody>
-      </p:sp>
-      <p:sp>
-        <p:nvSpPr>
-          <p:cNvPr id="27" name="Shape 25"/>
-          <p:cNvSpPr/>
-          <p:nvPr/>
-        </p:nvSpPr>
-        <p:spPr>
-          <a:xfrm>
-            <a:off x="9539935" y="3986784"/>
-            <a:ext cx="1828800" cy="475488"/>
-          </a:xfrm>
-          <a:prstGeom prst="roundRect">
-            <a:avLst>
-              <a:gd name="adj" fmla="val 15385"/>
-            </a:avLst>
-          </a:prstGeom>
-          <a:solidFill>
-            <a:srgbClr val="FBEED9"/>
-          </a:solidFill>
-          <a:ln w="19050">
-            <a:solidFill>
-              <a:srgbClr val="E8A33D"/>
-            </a:solidFill>
-            <a:prstDash val="solid"/>
-          </a:ln>
-        </p:spPr>
-      </p:sp>
-      <p:sp>
-        <p:nvSpPr>
-          <p:cNvPr id="28" name="Text 26"/>
-          <p:cNvSpPr/>
-          <p:nvPr/>
-        </p:nvSpPr>
-        <p:spPr>
-          <a:xfrm>
-            <a:off x="9539935" y="3986784"/>
-            <a:ext cx="1828800" cy="475488"/>
-          </a:xfrm>
-          <a:prstGeom prst="rect">
-            <a:avLst/>
-          </a:prstGeom>
-          <a:noFill/>
-          <a:ln/>
-        </p:spPr>
-        <p:txBody>
-          <a:bodyPr wrap="square" lIns="0" tIns="0" rIns="0" bIns="0" rtlCol="0" anchor="ctr"/>
-          <a:lstStyle/>
-          <a:p>
-            <a:pPr algn="ctr" indent="0" marL="0">
-              <a:buNone/>
-            </a:pPr>
-            <a:r>
-              <a:rPr lang="en-US" sz="1200" b="1" dirty="0">
-                <a:solidFill>
-                  <a:srgbClr val="B87A1E"/>
-                </a:solidFill>
-                <a:latin typeface="Calibri" pitchFamily="34" charset="0"/>
-                <a:ea typeface="Calibri" pitchFamily="34" charset="-122"/>
-                <a:cs typeface="Calibri" pitchFamily="34" charset="-120"/>
-              </a:rPr>
-              <a:t>Оклады</a:t>
-            </a:r>
-            <a:endParaRPr lang="en-US" sz="1200" dirty="0"/>
-          </a:p>
-        </p:txBody>
-      </p:sp>
-      <p:sp>
-        <p:nvSpPr>
-          <p:cNvPr id="29" name="Shape 27"/>
-          <p:cNvSpPr/>
-          <p:nvPr/>
-        </p:nvSpPr>
-        <p:spPr>
-          <a:xfrm>
-            <a:off x="548640" y="4590288"/>
-            <a:ext cx="11094415" cy="347472"/>
-          </a:xfrm>
-          <a:prstGeom prst="roundRect">
-            <a:avLst>
-              <a:gd name="adj" fmla="val 23684"/>
+              <a:gd name="adj" fmla="val 16364"/>
             </a:avLst>
           </a:prstGeom>
           <a:solidFill>
@@ -4645,14 +4736,14 @@
       </p:sp>
       <p:sp>
         <p:nvSpPr>
-          <p:cNvPr id="30" name="Text 28"/>
-          <p:cNvSpPr/>
-          <p:nvPr/>
-        </p:nvSpPr>
-        <p:spPr>
-          <a:xfrm>
-            <a:off x="777240" y="4590288"/>
-            <a:ext cx="10637215" cy="347472"/>
+          <p:cNvPr id="31" name="Text 29"/>
+          <p:cNvSpPr/>
+          <p:nvPr/>
+        </p:nvSpPr>
+        <p:spPr>
+          <a:xfrm>
+            <a:off x="777240" y="4407408"/>
+            <a:ext cx="10637215" cy="502920"/>
           </a:xfrm>
           <a:prstGeom prst="rect">
             <a:avLst/>
@@ -4666,12 +4757,12 @@
           <a:p>
             <a:pPr algn="ctr" indent="0" marL="0">
               <a:lnSpc>
-                <a:spcPct val="110000"/>
+                <a:spcPct val="118000"/>
               </a:lnSpc>
               <a:buNone/>
             </a:pPr>
             <a:r>
-              <a:rPr lang="en-US" sz="1100" b="1" dirty="0">
+              <a:rPr lang="en-US" sz="1080" b="1" dirty="0">
                 <a:solidFill>
                   <a:srgbClr val="1B1E27"/>
                 </a:solidFill>
@@ -4679,26 +4770,43 @@
                 <a:ea typeface="Calibri" pitchFamily="34" charset="-122"/>
                 <a:cs typeface="Calibri" pitchFamily="34" charset="-120"/>
               </a:rPr>
-              <a:t>У узла — три родителя, по одному в каждом дереве. Правило «вниз» не нарушено ни в одном из трёх доменов — оно действует независимо и полностью в каждом, как на предыдущем слайде.</a:t>
-            </a:r>
-            <a:endParaRPr lang="en-US" sz="1100" dirty="0"/>
-          </a:p>
-        </p:txBody>
-      </p:sp>
-      <p:sp>
-        <p:nvSpPr>
-          <p:cNvPr id="31" name="Shape 29"/>
-          <p:cNvSpPr/>
-          <p:nvPr/>
-        </p:nvSpPr>
-        <p:spPr>
-          <a:xfrm>
-            <a:off x="548640" y="5029200"/>
-            <a:ext cx="11094415" cy="1097280"/>
+              <a:t>У «Список сотрудников» — четыре родителя (Больничные, Отпускные, Маркетинг, Логистика), но сам он — лист: потомков нет. </a:t>
+            </a:r>
+            <a:pPr algn="ctr" indent="0" marL="0">
+              <a:lnSpc>
+                <a:spcPct val="118000"/>
+              </a:lnSpc>
+              <a:buNone/>
+            </a:pPr>
+            <a:r>
+              <a:rPr lang="en-US" sz="1080" dirty="0">
+                <a:solidFill>
+                  <a:srgbClr val="5B6472"/>
+                </a:solidFill>
+                <a:latin typeface="Calibri" pitchFamily="34" charset="0"/>
+                <a:ea typeface="Calibri" pitchFamily="34" charset="-122"/>
+                <a:cs typeface="Calibri" pitchFamily="34" charset="-120"/>
+              </a:rPr>
+              <a:t>Напоминание: узел на этой и предыдущей схеме = он сам плюс все его потомки — поэтому «Оклады» на предыдущем слайде значит не только оклады, а всю ветку под ним.</a:t>
+            </a:r>
+            <a:endParaRPr lang="en-US" sz="1080" dirty="0"/>
+          </a:p>
+        </p:txBody>
+      </p:sp>
+      <p:sp>
+        <p:nvSpPr>
+          <p:cNvPr id="32" name="Shape 30"/>
+          <p:cNvSpPr/>
+          <p:nvPr/>
+        </p:nvSpPr>
+        <p:spPr>
+          <a:xfrm>
+            <a:off x="548640" y="5001768"/>
+            <a:ext cx="11094415" cy="1188720"/>
           </a:xfrm>
           <a:prstGeom prst="roundRect">
             <a:avLst>
-              <a:gd name="adj" fmla="val 7500"/>
+              <a:gd name="adj" fmla="val 6923"/>
             </a:avLst>
           </a:prstGeom>
           <a:solidFill>
@@ -4714,13 +4822,13 @@
       </p:sp>
       <p:sp>
         <p:nvSpPr>
-          <p:cNvPr id="32" name="Shape 30"/>
-          <p:cNvSpPr/>
-          <p:nvPr/>
-        </p:nvSpPr>
-        <p:spPr>
-          <a:xfrm>
-            <a:off x="777240" y="5303520"/>
+          <p:cNvPr id="33" name="Shape 31"/>
+          <p:cNvSpPr/>
+          <p:nvPr/>
+        </p:nvSpPr>
+        <p:spPr>
+          <a:xfrm>
+            <a:off x="777240" y="5321808"/>
             <a:ext cx="548640" cy="548640"/>
           </a:xfrm>
           <a:prstGeom prst="ellipse">
@@ -4734,7 +4842,7 @@
       </p:sp>
       <p:pic>
         <p:nvPicPr>
-          <p:cNvPr id="33" name="Image 0" descr="preencoded.png">    </p:cNvPr>
+          <p:cNvPr id="34" name="Image 0" descr="preencoded.png">    </p:cNvPr>
           <p:cNvPicPr>
             <a:picLocks noChangeAspect="1"/>
           </p:cNvPicPr>
@@ -4748,7 +4856,7 @@
         </p:blipFill>
         <p:spPr>
           <a:xfrm>
-            <a:off x="908914" y="5435194"/>
+            <a:off x="908914" y="5453482"/>
             <a:ext cx="285293" cy="285293"/>
           </a:xfrm>
           <a:prstGeom prst="rect">
@@ -4758,14 +4866,14 @@
       </p:pic>
       <p:sp>
         <p:nvSpPr>
-          <p:cNvPr id="34" name="Text 31"/>
-          <p:cNvSpPr/>
-          <p:nvPr/>
-        </p:nvSpPr>
-        <p:spPr>
-          <a:xfrm>
-            <a:off x="1463040" y="5157216"/>
-            <a:ext cx="9905695" cy="841248"/>
+          <p:cNvPr id="35" name="Text 32"/>
+          <p:cNvSpPr/>
+          <p:nvPr/>
+        </p:nvSpPr>
+        <p:spPr>
+          <a:xfrm>
+            <a:off x="1463040" y="5111496"/>
+            <a:ext cx="9905695" cy="969264"/>
           </a:xfrm>
           <a:prstGeom prst="rect">
             <a:avLst/>
@@ -4779,12 +4887,12 @@
           <a:p>
             <a:pPr indent="0" marL="0">
               <a:lnSpc>
-                <a:spcPct val="122000"/>
+                <a:spcPct val="120000"/>
               </a:lnSpc>
               <a:buNone/>
             </a:pPr>
             <a:r>
-              <a:rPr lang="en-US" sz="1050" b="1" dirty="0">
+              <a:rPr lang="en-US" sz="1000" b="1" dirty="0">
                 <a:solidFill>
                   <a:srgbClr val="B87A1E"/>
                 </a:solidFill>
@@ -4792,16 +4900,16 @@
                 <a:ea typeface="Calibri" pitchFamily="34" charset="-122"/>
                 <a:cs typeface="Calibri" pitchFamily="34" charset="-120"/>
               </a:rPr>
-              <a:t>Открытый вопрос для совместной проработки: </a:t>
+              <a:t>Открытые вопросы к разработчику. </a:t>
             </a:r>
             <a:pPr indent="0" marL="0">
               <a:lnSpc>
-                <a:spcPct val="122000"/>
+                <a:spcPct val="120000"/>
               </a:lnSpc>
               <a:buNone/>
             </a:pPr>
             <a:r>
-              <a:rPr lang="en-US" sz="1050" dirty="0">
+              <a:rPr lang="en-US" sz="1000" b="1" dirty="0">
                 <a:solidFill>
                   <a:srgbClr val="1B1E27"/>
                 </a:solidFill>
@@ -4809,16 +4917,16 @@
                 <a:ea typeface="Calibri" pitchFamily="34" charset="-122"/>
                 <a:cs typeface="Calibri" pitchFamily="34" charset="-120"/>
               </a:rPr>
-              <a:t>если «Список сотрудников» — один общий узел, персона на корне «Маркетинг» обычным нисходящим наследованием доходит до него — но видит ли она весь список целиком, или только часть, относящуюся к своему отделу? Дерево само по себе на этот вопрос не отвечает — это тот же класс вопроса, что и «2a» (гранулярность </a:t>
+              <a:t>(1) Направление обхода: </a:t>
             </a:r>
             <a:pPr indent="0" marL="0">
               <a:lnSpc>
-                <a:spcPct val="122000"/>
+                <a:spcPct val="120000"/>
               </a:lnSpc>
               <a:buNone/>
             </a:pPr>
             <a:r>
-              <a:rPr lang="en-US" sz="1050" i="1" dirty="0">
+              <a:rPr lang="en-US" sz="1000" dirty="0">
                 <a:solidFill>
                   <a:srgbClr val="1B1E27"/>
                 </a:solidFill>
@@ -4826,16 +4934,16 @@
                 <a:ea typeface="Calibri" pitchFamily="34" charset="-122"/>
                 <a:cs typeface="Calibri" pitchFamily="34" charset="-120"/>
               </a:rPr>
-              <a:t>внутри</a:t>
+              <a:t>для узла с несколькими родителями видимость должна обходиться строго вниз от точки привязки, а родительские рёбра при проверке доступа не использоваться — независимо от числа родителей у узла. Это нужно подтвердить как гарантию реализации, а не как наше предположение. </a:t>
             </a:r>
             <a:pPr indent="0" marL="0">
               <a:lnSpc>
-                <a:spcPct val="122000"/>
+                <a:spcPct val="120000"/>
               </a:lnSpc>
               <a:buNone/>
             </a:pPr>
             <a:r>
-              <a:rPr lang="en-US" sz="1050" dirty="0">
+              <a:rPr lang="en-US" sz="1000" b="1" dirty="0">
                 <a:solidFill>
                   <a:srgbClr val="1B1E27"/>
                 </a:solidFill>
@@ -4843,15 +4951,32 @@
                 <a:ea typeface="Calibri" pitchFamily="34" charset="-122"/>
                 <a:cs typeface="Calibri" pitchFamily="34" charset="-120"/>
               </a:rPr>
-              <a:t> одной коллекции), рассмотренный раньше. Предложение дерева от этого не меняется — вопрос стоит решить вместе с разработчиком.</a:t>
-            </a:r>
-            <a:endParaRPr lang="en-US" sz="1050" dirty="0"/>
-          </a:p>
-        </p:txBody>
-      </p:sp>
-      <p:sp>
-        <p:nvSpPr>
-          <p:cNvPr id="35" name="Text 32"/>
+              <a:t>(2) Гранулярность списка: </a:t>
+            </a:r>
+            <a:pPr indent="0" marL="0">
+              <a:lnSpc>
+                <a:spcPct val="120000"/>
+              </a:lnSpc>
+              <a:buNone/>
+            </a:pPr>
+            <a:r>
+              <a:rPr lang="en-US" sz="1000" dirty="0">
+                <a:solidFill>
+                  <a:srgbClr val="1B1E27"/>
+                </a:solidFill>
+                <a:latin typeface="Calibri" pitchFamily="34" charset="0"/>
+                <a:ea typeface="Calibri" pitchFamily="34" charset="-122"/>
+                <a:cs typeface="Calibri" pitchFamily="34" charset="-120"/>
+              </a:rPr>
+              <a:t>персона на корне «Маркетинг» обычным нисходящим наследованием доходит до «Список сотрудников» — видит ли она список целиком или только свой отдел? Тот же класс вопроса, что и «2a» ранее, остаётся открытым — в отличие от риска увидеть «Оклады» через этот узел: он закрыт структурно, поскольку «Список сотрудников» — лист.</a:t>
+            </a:r>
+            <a:endParaRPr lang="en-US" sz="1000" dirty="0"/>
+          </a:p>
+        </p:txBody>
+      </p:sp>
+      <p:sp>
+        <p:nvSpPr>
+          <p:cNvPr id="36" name="Text 33"/>
           <p:cNvSpPr/>
           <p:nvPr/>
         </p:nvSpPr>
@@ -4890,7 +5015,7 @@
       </p:sp>
       <p:sp>
         <p:nvSpPr>
-          <p:cNvPr id="36" name="Text 33"/>
+          <p:cNvPr id="37" name="Text 34"/>
           <p:cNvSpPr/>
           <p:nvPr/>
         </p:nvSpPr>
@@ -6217,7 +6342,7 @@
                 <a:ea typeface="Calibri" pitchFamily="34" charset="-122"/>
                 <a:cs typeface="Calibri" pitchFamily="34" charset="-120"/>
               </a:rPr>
-              <a:t>Кадры / Список сотрудников / Отпускные</a:t>
+              <a:t>Кадры / Оклады / Больничные</a:t>
             </a:r>
             <a:endParaRPr lang="en-US" sz="950" dirty="0"/>
           </a:p>
@@ -6278,7 +6403,7 @@
                 <a:ea typeface="Calibri" pitchFamily="34" charset="-122"/>
                 <a:cs typeface="Calibri" pitchFamily="34" charset="-120"/>
               </a:rPr>
-              <a:t>Кадры / Список сотрудников / Больничные</a:t>
+              <a:t>Кадры / Оклады / Отпускные</a:t>
             </a:r>
             <a:endParaRPr lang="en-US" sz="950" dirty="0"/>
           </a:p>
@@ -6337,7 +6462,7 @@
                 <a:ea typeface="Calibri" pitchFamily="34" charset="-122"/>
                 <a:cs typeface="Calibri" pitchFamily="34" charset="-120"/>
               </a:rPr>
-              <a:t>отпускные и больничные по всей компании — оба узла, к которым привязана</a:t>
+              <a:t>«Больничные», «Отпускные» и общий лист «Список сотрудников» — через оба узла привязки</a:t>
             </a:r>
             <a:endParaRPr lang="en-US" sz="1150" dirty="0"/>
           </a:p>
@@ -6396,7 +6521,7 @@
                 <a:ea typeface="Calibri" pitchFamily="34" charset="-122"/>
                 <a:cs typeface="Calibri" pitchFamily="34" charset="-120"/>
               </a:rPr>
-              <a:t>привязана сразу к двум соседним узлам — явная множественная привязка, а не «переключение» между ролями. «Оклады» не видит: это не входит в обычные обязанности кадровика</a:t>
+              <a:t>привязана сразу к двум узлам-сиблингам — явная множественная привязка, а не «переключение» между ролями. «Оклады» не видит: это их общий родитель, стоит выше обоих, а видимость вверх не течёт</a:t>
             </a:r>
             <a:endParaRPr lang="en-US" sz="1150" dirty="0"/>
           </a:p>
@@ -6633,7 +6758,7 @@
                 <a:ea typeface="Calibri" pitchFamily="34" charset="-122"/>
                 <a:cs typeface="Calibri" pitchFamily="34" charset="-120"/>
               </a:rPr>
-              <a:t>через свой домен обычным нисходящим наследованием доходит до «Список сотрудников» и всех его потомков — включая «Оклады»</a:t>
+              <a:t>только «Список сотрудников» — прямым ребром своего домена; узел лист, потомков за ним нет</a:t>
             </a:r>
             <a:endParaRPr lang="en-US" sz="1150" dirty="0"/>
           </a:p>
@@ -6675,7 +6800,7 @@
                 <a:ea typeface="Calibri" pitchFamily="34" charset="-122"/>
                 <a:cs typeface="Calibri" pitchFamily="34" charset="-120"/>
               </a:rPr>
-              <a:t>Открытый вопрос: </a:t>
+              <a:t>Явно не видит: </a:t>
             </a:r>
             <a:pPr indent="0" marL="0">
               <a:lnSpc>
@@ -6692,7 +6817,7 @@
                 <a:ea typeface="Calibri" pitchFamily="34" charset="-122"/>
                 <a:cs typeface="Calibri" pitchFamily="34" charset="-120"/>
               </a:rPr>
-              <a:t>весь список целиком или только свой отдел? Дерево само по себе не отвечает — тот же вопрос, что и «2a» на предыдущем слайде</a:t>
+              <a:t>«Оклады», «Больничные», «Отпускные» — они существуют только внутри «Кадры» и недостижимы со стороны «Маркетинг». Открыто: весь список или только свой отдел — тот же вопрос, что и «2a»</a:t>
             </a:r>
             <a:endParaRPr lang="en-US" sz="1150" dirty="0"/>
           </a:p>
@@ -6929,7 +7054,7 @@
                 <a:ea typeface="Calibri" pitchFamily="34" charset="-122"/>
                 <a:cs typeface="Calibri" pitchFamily="34" charset="-120"/>
               </a:rPr>
-              <a:t>весь домен целиком — «Список сотрудников», «Отпускные», «Больничные» и «Оклады»</a:t>
+              <a:t>весь домен целиком — «Оклады», «Больничные», «Отпускные» и «Список сотрудников»</a:t>
             </a:r>
             <a:endParaRPr lang="en-US" sz="1150" dirty="0"/>
           </a:p>

--- a/docs/presentations/case-17-lokalny-chat-i-ierarhiya-katalogov.pptx
+++ b/docs/presentations/case-17-lokalny-chat-i-ierarhiya-katalogov.pptx
@@ -695,7 +695,7 @@
           <a:p>
             <a:r>
               <a:rPr lang="en-US" dirty="0"/>
-              <a:t>Полностью пересобранный слайд под новую форму: раньше общий узел «Список сотрудников» сам был хабом с тремя детьми, теперь он — лист, и это ключевое исправление по итогам ревью. Три независимых домена верхнего уровня — «Кадры», «Маркетинг», «Логистика» (канонические примеры платформы: «Логистика», «Персонал», «Продажи») — сходятся в одну и ту же точку четырьмя путями: «Кадры» доходит до неё через свою пару сиблингов «Больничные»/«Отпускные» (узел «Оклады», который стоит выше них на предыдущем слайде, здесь сознательно не перерисован — пометка рядом с доменным блоком отсылает к слайду 10); «Маркетинг» и «Логистика» — прямым ребром от своего корня. Итого у «Список сотрудников» четыре родителя, но сам он — лист без единого потомка: это и есть структурное исправление против прежней версии, где через общий хаб зарплатные данные утекали в другие домены. Обе вещи, которые независимый ревью просил сделать явными, есть на слайде: (1) легенда-напоминание в общем баре — узел на схеме означает узел плюс все его потомки, иначе «Оклады» на предыдущем слайде легко прочитать как «только сами оклады»; (2) новый открытый вопрос к разработчику о направлении обхода — что для узла с несколькими родителями видимость гарантированно обходится только вниз от точки привязки, а родительские рёбра при проверке доступа никогда не используются, вне зависимости от числа родителей; это нужно подтвердить как реальную гарантию реализации, а не молча предполагать. Старый открытый вопрос про «Маркетинг» — весь список или только свой отдел — сохранён дословно по сути (тот же класс вопроса, что и «2a»), но явно объявлено, что раньше сопутствовавший ему риск увидеть «Оклады» через общий хаб теперь закрыт структурно, потому что общий узел — лист.</a:t>
+              <a:t>Полностью пересобранный слайд под новую форму: раньше общий узел «Список сотрудников» сам был хабом с тремя детьми, теперь он — лист, и это ключевое исправление по итогам ревью. Три независимых домена верхнего уровня — «Кадры», «Маркетинг», «Логистика» (канонические примеры платформы: «Логистика», «Персонал», «Продажи») — сходятся в одну и ту же точку четырьмя путями: «Кадры» доходит до неё через «Оклады» (тот же узел и тот же стиль отрисовки, что на слайде 10 — здесь он тоже нарисован, не только упомянут) и дальше через пару его сиблингов «Больничные»/«Отпускные»; «Маркетинг» и «Логистика» — прямым ребром от своего корня. Итого у «Список сотрудников» четыре родителя, но сам он — лист без единого потомка: это и есть структурное исправление против прежней версии, где через общий хаб зарплатные данные утекали в другие домены. Линии «Маркетинг» и «Логистика» специально разведены по внешним краям слайда (каждая идёт вертикально вниз мимо всей ветки «Кадры», затем одним поворотом входит в общий узел сбоку на высоте его середины) — это устраняет прежнее перекрестие по центру слайда, из-за которого было неясно, какая линия к какому домену относится; после добавления «Оклады» в центральную колонку такой прямой диагональный путь стал бы пересекать её ещё сильнее, поэтому геометрия впадения полностью заменена на угловую в обход. Обе вещи, которые независимый ревью просил сделать явными, есть на слайде: (1) легенда-напоминание в общем баре — узел на схеме означает узел плюс все его потомки; (2) открытый вопрос к разработчику о направлении обхода — что для узла с несколькими родителями видимость гарантированно обходится только вниз от точки привязки, а родительские рёбра при проверке доступа никогда не используются, вне зависимости от числа родителей; это нужно подтвердить как реальную гарантию реализации, а не молча предполагать. Старый открытый вопрос про «Маркетинг» — весь список или только свой отдел — сохранён дословно по сути (тот же класс вопроса, что и «2a»), но явно объявлено, что раньше сопутствовавший ему риск увидеть «Оклады» через общий хаб теперь закрыт структурно, потому что общий узел — лист.</a:t>
             </a:r>
             <a:endParaRPr lang="en-US" dirty="0"/>
           </a:p>
@@ -3964,7 +3964,7 @@
                 <a:ea typeface="Calibri" pitchFamily="34" charset="-122"/>
                 <a:cs typeface="Calibri" pitchFamily="34" charset="-120"/>
               </a:rPr>
-              <a:t>Каталог не обязан быть в одном дереве. «Список сотрудников» нужен трём доменам сразу — «Кадры» (через «Больничные»/«Отпускные»), «Маркетинг» и «Логистика» (прямым ребром от корня) — и сам является листом.</a:t>
+              <a:t>Каталог не обязан быть в одном дереве. «Список сотрудников» нужен трём доменам сразу — «Кадры» (через «Оклады» → «Больничные»/«Отпускные»), «Маркетинг» и «Логистика» (прямым ребром от корня) — и сам является листом.</a:t>
             </a:r>
             <a:endParaRPr lang="en-US" sz="1250" dirty="0"/>
           </a:p>
@@ -4203,8 +4203,8 @@
         </p:nvSpPr>
         <p:spPr>
           <a:xfrm>
-            <a:off x="7257593" y="2029968"/>
-            <a:ext cx="1417320" cy="329184"/>
+            <a:off x="10863072" y="2029968"/>
+            <a:ext cx="779983" cy="329184"/>
           </a:xfrm>
           <a:prstGeom prst="rect">
             <a:avLst/>
@@ -4231,7 +4231,7 @@
                 <a:ea typeface="Calibri" pitchFamily="34" charset="-122"/>
                 <a:cs typeface="Calibri" pitchFamily="34" charset="-120"/>
               </a:rPr>
-              <a:t>«Оклады» — выше, см. слайд 10</a:t>
+              <a:t>не всё дерево показано</a:t>
             </a:r>
             <a:endParaRPr lang="en-US" sz="800" dirty="0"/>
           </a:p>
@@ -4239,56 +4239,14 @@
       </p:sp>
       <p:sp>
         <p:nvSpPr>
-          <p:cNvPr id="13" name="Text 11"/>
-          <p:cNvSpPr/>
-          <p:nvPr/>
-        </p:nvSpPr>
-        <p:spPr>
-          <a:xfrm>
-            <a:off x="10863072" y="2029968"/>
-            <a:ext cx="779983" cy="329184"/>
-          </a:xfrm>
-          <a:prstGeom prst="rect">
-            <a:avLst/>
-          </a:prstGeom>
-          <a:noFill/>
-          <a:ln/>
-        </p:spPr>
-        <p:txBody>
-          <a:bodyPr wrap="square" lIns="0" tIns="0" rIns="0" bIns="0" rtlCol="0" anchor="ctr"/>
-          <a:lstStyle/>
-          <a:p>
-            <a:pPr algn="l" indent="0" marL="0">
-              <a:lnSpc>
-                <a:spcPct val="100000"/>
-              </a:lnSpc>
-              <a:buNone/>
-            </a:pPr>
-            <a:r>
-              <a:rPr lang="en-US" sz="800" i="1" dirty="0">
-                <a:solidFill>
-                  <a:srgbClr val="5B6472"/>
-                </a:solidFill>
-                <a:latin typeface="Calibri" pitchFamily="34" charset="0"/>
-                <a:ea typeface="Calibri" pitchFamily="34" charset="-122"/>
-                <a:cs typeface="Calibri" pitchFamily="34" charset="-120"/>
-              </a:rPr>
-              <a:t>не всё дерево показано</a:t>
-            </a:r>
-            <a:endParaRPr lang="en-US" sz="800" dirty="0"/>
-          </a:p>
-        </p:txBody>
-      </p:sp>
-      <p:sp>
-        <p:nvSpPr>
-          <p:cNvPr id="14" name="Shape 12"/>
+          <p:cNvPr id="13" name="Shape 11"/>
           <p:cNvSpPr/>
           <p:nvPr/>
         </p:nvSpPr>
         <p:spPr>
           <a:xfrm>
             <a:off x="6096305" y="2377440"/>
-            <a:ext cx="0" cy="182880"/>
+            <a:ext cx="0" cy="274320"/>
           </a:xfrm>
           <a:prstGeom prst="line">
             <a:avLst/>
@@ -4304,14 +4262,80 @@
       </p:sp>
       <p:sp>
         <p:nvSpPr>
-          <p:cNvPr id="15" name="Shape 13"/>
-          <p:cNvSpPr/>
-          <p:nvPr/>
-        </p:nvSpPr>
-        <p:spPr>
-          <a:xfrm>
-            <a:off x="5227625" y="2560320"/>
-            <a:ext cx="1737360" cy="0"/>
+          <p:cNvPr id="14" name="Shape 12"/>
+          <p:cNvSpPr/>
+          <p:nvPr/>
+        </p:nvSpPr>
+        <p:spPr>
+          <a:xfrm>
+            <a:off x="5181905" y="2651760"/>
+            <a:ext cx="1828800" cy="365760"/>
+          </a:xfrm>
+          <a:prstGeom prst="roundRect">
+            <a:avLst>
+              <a:gd name="adj" fmla="val 20000"/>
+            </a:avLst>
+          </a:prstGeom>
+          <a:solidFill>
+            <a:srgbClr val="FBEED9"/>
+          </a:solidFill>
+          <a:ln w="19050">
+            <a:solidFill>
+              <a:srgbClr val="E8A33D"/>
+            </a:solidFill>
+            <a:prstDash val="solid"/>
+          </a:ln>
+        </p:spPr>
+      </p:sp>
+      <p:sp>
+        <p:nvSpPr>
+          <p:cNvPr id="15" name="Text 13"/>
+          <p:cNvSpPr/>
+          <p:nvPr/>
+        </p:nvSpPr>
+        <p:spPr>
+          <a:xfrm>
+            <a:off x="5181905" y="2651760"/>
+            <a:ext cx="1828800" cy="365760"/>
+          </a:xfrm>
+          <a:prstGeom prst="rect">
+            <a:avLst/>
+          </a:prstGeom>
+          <a:noFill/>
+          <a:ln/>
+        </p:spPr>
+        <p:txBody>
+          <a:bodyPr wrap="square" lIns="0" tIns="0" rIns="0" bIns="0" rtlCol="0" anchor="ctr"/>
+          <a:lstStyle/>
+          <a:p>
+            <a:pPr algn="ctr" indent="0" marL="0">
+              <a:buNone/>
+            </a:pPr>
+            <a:r>
+              <a:rPr lang="en-US" sz="1300" b="1" dirty="0">
+                <a:solidFill>
+                  <a:srgbClr val="B87A1E"/>
+                </a:solidFill>
+                <a:latin typeface="Calibri" pitchFamily="34" charset="0"/>
+                <a:ea typeface="Calibri" pitchFamily="34" charset="-122"/>
+                <a:cs typeface="Calibri" pitchFamily="34" charset="-120"/>
+              </a:rPr>
+              <a:t>Оклады</a:t>
+            </a:r>
+            <a:endParaRPr lang="en-US" sz="1300" dirty="0"/>
+          </a:p>
+        </p:txBody>
+      </p:sp>
+      <p:sp>
+        <p:nvSpPr>
+          <p:cNvPr id="16" name="Shape 14"/>
+          <p:cNvSpPr/>
+          <p:nvPr/>
+        </p:nvSpPr>
+        <p:spPr>
+          <a:xfrm>
+            <a:off x="6096305" y="3017520"/>
+            <a:ext cx="0" cy="137160"/>
           </a:xfrm>
           <a:prstGeom prst="line">
             <a:avLst/>
@@ -4327,14 +4351,14 @@
       </p:sp>
       <p:sp>
         <p:nvSpPr>
-          <p:cNvPr id="16" name="Shape 14"/>
-          <p:cNvSpPr/>
-          <p:nvPr/>
-        </p:nvSpPr>
-        <p:spPr>
-          <a:xfrm>
-            <a:off x="5227625" y="2560320"/>
-            <a:ext cx="0" cy="182880"/>
+          <p:cNvPr id="17" name="Shape 15"/>
+          <p:cNvSpPr/>
+          <p:nvPr/>
+        </p:nvSpPr>
+        <p:spPr>
+          <a:xfrm>
+            <a:off x="5227625" y="3154680"/>
+            <a:ext cx="1737360" cy="0"/>
           </a:xfrm>
           <a:prstGeom prst="line">
             <a:avLst/>
@@ -4350,14 +4374,14 @@
       </p:sp>
       <p:sp>
         <p:nvSpPr>
-          <p:cNvPr id="17" name="Shape 15"/>
-          <p:cNvSpPr/>
-          <p:nvPr/>
-        </p:nvSpPr>
-        <p:spPr>
-          <a:xfrm>
-            <a:off x="6964985" y="2560320"/>
-            <a:ext cx="0" cy="182880"/>
+          <p:cNvPr id="18" name="Shape 16"/>
+          <p:cNvSpPr/>
+          <p:nvPr/>
+        </p:nvSpPr>
+        <p:spPr>
+          <a:xfrm>
+            <a:off x="5227625" y="3154680"/>
+            <a:ext cx="0" cy="137160"/>
           </a:xfrm>
           <a:prstGeom prst="line">
             <a:avLst/>
@@ -4373,18 +4397,41 @@
       </p:sp>
       <p:sp>
         <p:nvSpPr>
-          <p:cNvPr id="18" name="Shape 16"/>
-          <p:cNvSpPr/>
-          <p:nvPr/>
-        </p:nvSpPr>
-        <p:spPr>
-          <a:xfrm>
-            <a:off x="4404665" y="2743200"/>
-            <a:ext cx="1645920" cy="420624"/>
+          <p:cNvPr id="19" name="Shape 17"/>
+          <p:cNvSpPr/>
+          <p:nvPr/>
+        </p:nvSpPr>
+        <p:spPr>
+          <a:xfrm>
+            <a:off x="6964985" y="3154680"/>
+            <a:ext cx="0" cy="137160"/>
+          </a:xfrm>
+          <a:prstGeom prst="line">
+            <a:avLst/>
+          </a:prstGeom>
+          <a:noFill/>
+          <a:ln w="19050">
+            <a:solidFill>
+              <a:srgbClr val="8891A0"/>
+            </a:solidFill>
+            <a:prstDash val="solid"/>
+          </a:ln>
+        </p:spPr>
+      </p:sp>
+      <p:sp>
+        <p:nvSpPr>
+          <p:cNvPr id="20" name="Shape 18"/>
+          <p:cNvSpPr/>
+          <p:nvPr/>
+        </p:nvSpPr>
+        <p:spPr>
+          <a:xfrm>
+            <a:off x="4404665" y="3291840"/>
+            <a:ext cx="1645920" cy="384048"/>
           </a:xfrm>
           <a:prstGeom prst="roundRect">
             <a:avLst>
-              <a:gd name="adj" fmla="val 17391"/>
+              <a:gd name="adj" fmla="val 19048"/>
             </a:avLst>
           </a:prstGeom>
           <a:solidFill>
@@ -4400,14 +4447,14 @@
       </p:sp>
       <p:sp>
         <p:nvSpPr>
-          <p:cNvPr id="19" name="Text 17"/>
-          <p:cNvSpPr/>
-          <p:nvPr/>
-        </p:nvSpPr>
-        <p:spPr>
-          <a:xfrm>
-            <a:off x="4404665" y="2743200"/>
-            <a:ext cx="1645920" cy="420624"/>
+          <p:cNvPr id="21" name="Text 19"/>
+          <p:cNvSpPr/>
+          <p:nvPr/>
+        </p:nvSpPr>
+        <p:spPr>
+          <a:xfrm>
+            <a:off x="4404665" y="3291840"/>
+            <a:ext cx="1645920" cy="384048"/>
           </a:xfrm>
           <a:prstGeom prst="rect">
             <a:avLst/>
@@ -4439,18 +4486,18 @@
       </p:sp>
       <p:sp>
         <p:nvSpPr>
-          <p:cNvPr id="20" name="Shape 18"/>
-          <p:cNvSpPr/>
-          <p:nvPr/>
-        </p:nvSpPr>
-        <p:spPr>
-          <a:xfrm>
-            <a:off x="6142025" y="2743200"/>
-            <a:ext cx="1645920" cy="420624"/>
+          <p:cNvPr id="22" name="Shape 20"/>
+          <p:cNvSpPr/>
+          <p:nvPr/>
+        </p:nvSpPr>
+        <p:spPr>
+          <a:xfrm>
+            <a:off x="6142025" y="3291840"/>
+            <a:ext cx="1645920" cy="384048"/>
           </a:xfrm>
           <a:prstGeom prst="roundRect">
             <a:avLst>
-              <a:gd name="adj" fmla="val 17391"/>
+              <a:gd name="adj" fmla="val 19048"/>
             </a:avLst>
           </a:prstGeom>
           <a:solidFill>
@@ -4466,14 +4513,14 @@
       </p:sp>
       <p:sp>
         <p:nvSpPr>
-          <p:cNvPr id="21" name="Text 19"/>
-          <p:cNvSpPr/>
-          <p:nvPr/>
-        </p:nvSpPr>
-        <p:spPr>
-          <a:xfrm>
-            <a:off x="6142025" y="2743200"/>
-            <a:ext cx="1645920" cy="420624"/>
+          <p:cNvPr id="23" name="Text 21"/>
+          <p:cNvSpPr/>
+          <p:nvPr/>
+        </p:nvSpPr>
+        <p:spPr>
+          <a:xfrm>
+            <a:off x="6142025" y="3291840"/>
+            <a:ext cx="1645920" cy="384048"/>
           </a:xfrm>
           <a:prstGeom prst="rect">
             <a:avLst/>
@@ -4505,14 +4552,14 @@
       </p:sp>
       <p:sp>
         <p:nvSpPr>
-          <p:cNvPr id="22" name="Shape 20"/>
-          <p:cNvSpPr/>
-          <p:nvPr/>
-        </p:nvSpPr>
-        <p:spPr>
-          <a:xfrm>
-            <a:off x="5227625" y="3163824"/>
-            <a:ext cx="0" cy="315468"/>
+          <p:cNvPr id="24" name="Shape 22"/>
+          <p:cNvSpPr/>
+          <p:nvPr/>
+        </p:nvSpPr>
+        <p:spPr>
+          <a:xfrm>
+            <a:off x="5227625" y="3675888"/>
+            <a:ext cx="0" cy="137160"/>
           </a:xfrm>
           <a:prstGeom prst="line">
             <a:avLst/>
@@ -4528,14 +4575,14 @@
       </p:sp>
       <p:sp>
         <p:nvSpPr>
-          <p:cNvPr id="23" name="Shape 21"/>
-          <p:cNvSpPr/>
-          <p:nvPr/>
-        </p:nvSpPr>
-        <p:spPr>
-          <a:xfrm>
-            <a:off x="6964985" y="3163824"/>
-            <a:ext cx="0" cy="315468"/>
+          <p:cNvPr id="25" name="Shape 23"/>
+          <p:cNvSpPr/>
+          <p:nvPr/>
+        </p:nvSpPr>
+        <p:spPr>
+          <a:xfrm>
+            <a:off x="6964985" y="3675888"/>
+            <a:ext cx="0" cy="137160"/>
           </a:xfrm>
           <a:prstGeom prst="line">
             <a:avLst/>
@@ -4551,13 +4598,13 @@
       </p:sp>
       <p:sp>
         <p:nvSpPr>
-          <p:cNvPr id="24" name="Shape 22"/>
-          <p:cNvSpPr/>
-          <p:nvPr/>
-        </p:nvSpPr>
-        <p:spPr>
-          <a:xfrm>
-            <a:off x="5227625" y="3479292"/>
+          <p:cNvPr id="26" name="Shape 24"/>
+          <p:cNvSpPr/>
+          <p:nvPr/>
+        </p:nvSpPr>
+        <p:spPr>
+          <a:xfrm>
+            <a:off x="5227625" y="3813048"/>
             <a:ext cx="1737360" cy="0"/>
           </a:xfrm>
           <a:prstGeom prst="line">
@@ -4574,14 +4621,14 @@
       </p:sp>
       <p:sp>
         <p:nvSpPr>
-          <p:cNvPr id="25" name="Shape 23"/>
-          <p:cNvSpPr/>
-          <p:nvPr/>
-        </p:nvSpPr>
-        <p:spPr>
-          <a:xfrm>
-            <a:off x="6096305" y="3479292"/>
-            <a:ext cx="0" cy="315468"/>
+          <p:cNvPr id="27" name="Shape 25"/>
+          <p:cNvSpPr/>
+          <p:nvPr/>
+        </p:nvSpPr>
+        <p:spPr>
+          <a:xfrm>
+            <a:off x="6096305" y="3813048"/>
+            <a:ext cx="0" cy="137160"/>
           </a:xfrm>
           <a:prstGeom prst="line">
             <a:avLst/>
@@ -4597,14 +4644,14 @@
       </p:sp>
       <p:sp>
         <p:nvSpPr>
-          <p:cNvPr id="26" name="Shape 24"/>
+          <p:cNvPr id="28" name="Shape 26"/>
           <p:cNvSpPr/>
           <p:nvPr/>
         </p:nvSpPr>
         <p:spPr>
           <a:xfrm>
             <a:off x="2468880" y="2377440"/>
-            <a:ext cx="2667305" cy="1417320"/>
+            <a:ext cx="0" cy="1801368"/>
           </a:xfrm>
           <a:prstGeom prst="line">
             <a:avLst/>
@@ -4620,14 +4667,14 @@
       </p:sp>
       <p:sp>
         <p:nvSpPr>
-          <p:cNvPr id="27" name="Shape 25"/>
-          <p:cNvSpPr/>
-          <p:nvPr/>
-        </p:nvSpPr>
-        <p:spPr>
-          <a:xfrm>
-            <a:off x="7056425" y="2377440"/>
-            <a:ext cx="2663647" cy="1417320"/>
+          <p:cNvPr id="29" name="Shape 27"/>
+          <p:cNvSpPr/>
+          <p:nvPr/>
+        </p:nvSpPr>
+        <p:spPr>
+          <a:xfrm>
+            <a:off x="2468880" y="4178808"/>
+            <a:ext cx="2301545" cy="0"/>
           </a:xfrm>
           <a:prstGeom prst="line">
             <a:avLst/>
@@ -4643,18 +4690,64 @@
       </p:sp>
       <p:sp>
         <p:nvSpPr>
-          <p:cNvPr id="28" name="Shape 26"/>
-          <p:cNvSpPr/>
-          <p:nvPr/>
-        </p:nvSpPr>
-        <p:spPr>
-          <a:xfrm>
-            <a:off x="4770425" y="3794760"/>
-            <a:ext cx="2651760" cy="502920"/>
+          <p:cNvPr id="30" name="Shape 28"/>
+          <p:cNvSpPr/>
+          <p:nvPr/>
+        </p:nvSpPr>
+        <p:spPr>
+          <a:xfrm>
+            <a:off x="9720072" y="2377440"/>
+            <a:ext cx="0" cy="1801368"/>
+          </a:xfrm>
+          <a:prstGeom prst="line">
+            <a:avLst/>
+          </a:prstGeom>
+          <a:noFill/>
+          <a:ln w="25400">
+            <a:solidFill>
+              <a:srgbClr val="2F6FED"/>
+            </a:solidFill>
+            <a:prstDash val="solid"/>
+          </a:ln>
+        </p:spPr>
+      </p:sp>
+      <p:sp>
+        <p:nvSpPr>
+          <p:cNvPr id="31" name="Shape 29"/>
+          <p:cNvSpPr/>
+          <p:nvPr/>
+        </p:nvSpPr>
+        <p:spPr>
+          <a:xfrm>
+            <a:off x="7422185" y="4178808"/>
+            <a:ext cx="2297887" cy="0"/>
+          </a:xfrm>
+          <a:prstGeom prst="line">
+            <a:avLst/>
+          </a:prstGeom>
+          <a:noFill/>
+          <a:ln w="25400">
+            <a:solidFill>
+              <a:srgbClr val="2F6FED"/>
+            </a:solidFill>
+            <a:prstDash val="solid"/>
+          </a:ln>
+        </p:spPr>
+      </p:sp>
+      <p:sp>
+        <p:nvSpPr>
+          <p:cNvPr id="32" name="Shape 30"/>
+          <p:cNvSpPr/>
+          <p:nvPr/>
+        </p:nvSpPr>
+        <p:spPr>
+          <a:xfrm>
+            <a:off x="4770425" y="3950208"/>
+            <a:ext cx="2651760" cy="457200"/>
           </a:xfrm>
           <a:prstGeom prst="roundRect">
             <a:avLst>
-              <a:gd name="adj" fmla="val 16364"/>
+              <a:gd name="adj" fmla="val 18000"/>
             </a:avLst>
           </a:prstGeom>
           <a:solidFill>
@@ -4670,14 +4763,14 @@
       </p:sp>
       <p:sp>
         <p:nvSpPr>
-          <p:cNvPr id="29" name="Text 27"/>
-          <p:cNvSpPr/>
-          <p:nvPr/>
-        </p:nvSpPr>
-        <p:spPr>
-          <a:xfrm>
-            <a:off x="4770425" y="3794760"/>
-            <a:ext cx="2651760" cy="502920"/>
+          <p:cNvPr id="33" name="Text 31"/>
+          <p:cNvSpPr/>
+          <p:nvPr/>
+        </p:nvSpPr>
+        <p:spPr>
+          <a:xfrm>
+            <a:off x="4770425" y="3950208"/>
+            <a:ext cx="2651760" cy="457200"/>
           </a:xfrm>
           <a:prstGeom prst="rect">
             <a:avLst/>
@@ -4709,18 +4802,18 @@
       </p:sp>
       <p:sp>
         <p:nvSpPr>
-          <p:cNvPr id="30" name="Shape 28"/>
-          <p:cNvSpPr/>
-          <p:nvPr/>
-        </p:nvSpPr>
-        <p:spPr>
-          <a:xfrm>
-            <a:off x="548640" y="4407408"/>
-            <a:ext cx="11094415" cy="502920"/>
+          <p:cNvPr id="34" name="Shape 32"/>
+          <p:cNvSpPr/>
+          <p:nvPr/>
+        </p:nvSpPr>
+        <p:spPr>
+          <a:xfrm>
+            <a:off x="548640" y="4517136"/>
+            <a:ext cx="11094415" cy="457200"/>
           </a:xfrm>
           <a:prstGeom prst="roundRect">
             <a:avLst>
-              <a:gd name="adj" fmla="val 16364"/>
+              <a:gd name="adj" fmla="val 18000"/>
             </a:avLst>
           </a:prstGeom>
           <a:solidFill>
@@ -4736,14 +4829,14 @@
       </p:sp>
       <p:sp>
         <p:nvSpPr>
-          <p:cNvPr id="31" name="Text 29"/>
-          <p:cNvSpPr/>
-          <p:nvPr/>
-        </p:nvSpPr>
-        <p:spPr>
-          <a:xfrm>
-            <a:off x="777240" y="4407408"/>
-            <a:ext cx="10637215" cy="502920"/>
+          <p:cNvPr id="35" name="Text 33"/>
+          <p:cNvSpPr/>
+          <p:nvPr/>
+        </p:nvSpPr>
+        <p:spPr>
+          <a:xfrm>
+            <a:off x="777240" y="4517136"/>
+            <a:ext cx="10637215" cy="457200"/>
           </a:xfrm>
           <a:prstGeom prst="rect">
             <a:avLst/>
@@ -4795,18 +4888,18 @@
       </p:sp>
       <p:sp>
         <p:nvSpPr>
-          <p:cNvPr id="32" name="Shape 30"/>
-          <p:cNvSpPr/>
-          <p:nvPr/>
-        </p:nvSpPr>
-        <p:spPr>
-          <a:xfrm>
-            <a:off x="548640" y="5001768"/>
-            <a:ext cx="11094415" cy="1188720"/>
+          <p:cNvPr id="36" name="Shape 34"/>
+          <p:cNvSpPr/>
+          <p:nvPr/>
+        </p:nvSpPr>
+        <p:spPr>
+          <a:xfrm>
+            <a:off x="548640" y="5065776"/>
+            <a:ext cx="11094415" cy="1143000"/>
           </a:xfrm>
           <a:prstGeom prst="roundRect">
             <a:avLst>
-              <a:gd name="adj" fmla="val 6923"/>
+              <a:gd name="adj" fmla="val 7200"/>
             </a:avLst>
           </a:prstGeom>
           <a:solidFill>
@@ -4822,13 +4915,13 @@
       </p:sp>
       <p:sp>
         <p:nvSpPr>
-          <p:cNvPr id="33" name="Shape 31"/>
-          <p:cNvSpPr/>
-          <p:nvPr/>
-        </p:nvSpPr>
-        <p:spPr>
-          <a:xfrm>
-            <a:off x="777240" y="5321808"/>
+          <p:cNvPr id="37" name="Shape 35"/>
+          <p:cNvSpPr/>
+          <p:nvPr/>
+        </p:nvSpPr>
+        <p:spPr>
+          <a:xfrm>
+            <a:off x="777240" y="5362956"/>
             <a:ext cx="548640" cy="548640"/>
           </a:xfrm>
           <a:prstGeom prst="ellipse">
@@ -4842,7 +4935,7 @@
       </p:sp>
       <p:pic>
         <p:nvPicPr>
-          <p:cNvPr id="34" name="Image 0" descr="preencoded.png">    </p:cNvPr>
+          <p:cNvPr id="38" name="Image 0" descr="preencoded.png">    </p:cNvPr>
           <p:cNvPicPr>
             <a:picLocks noChangeAspect="1"/>
           </p:cNvPicPr>
@@ -4856,7 +4949,7 @@
         </p:blipFill>
         <p:spPr>
           <a:xfrm>
-            <a:off x="908914" y="5453482"/>
+            <a:off x="908914" y="5494630"/>
             <a:ext cx="285293" cy="285293"/>
           </a:xfrm>
           <a:prstGeom prst="rect">
@@ -4866,14 +4959,14 @@
       </p:pic>
       <p:sp>
         <p:nvSpPr>
-          <p:cNvPr id="35" name="Text 32"/>
-          <p:cNvSpPr/>
-          <p:nvPr/>
-        </p:nvSpPr>
-        <p:spPr>
-          <a:xfrm>
-            <a:off x="1463040" y="5111496"/>
-            <a:ext cx="9905695" cy="969264"/>
+          <p:cNvPr id="39" name="Text 36"/>
+          <p:cNvSpPr/>
+          <p:nvPr/>
+        </p:nvSpPr>
+        <p:spPr>
+          <a:xfrm>
+            <a:off x="1463040" y="5175504"/>
+            <a:ext cx="9905695" cy="923544"/>
           </a:xfrm>
           <a:prstGeom prst="rect">
             <a:avLst/>
@@ -4976,7 +5069,7 @@
       </p:sp>
       <p:sp>
         <p:nvSpPr>
-          <p:cNvPr id="36" name="Text 33"/>
+          <p:cNvPr id="40" name="Text 37"/>
           <p:cNvSpPr/>
           <p:nvPr/>
         </p:nvSpPr>
@@ -5015,7 +5108,7 @@
       </p:sp>
       <p:sp>
         <p:nvSpPr>
-          <p:cNvPr id="37" name="Text 34"/>
+          <p:cNvPr id="41" name="Text 38"/>
           <p:cNvSpPr/>
           <p:nvPr/>
         </p:nvSpPr>
@@ -6342,7 +6435,7 @@
                 <a:ea typeface="Calibri" pitchFamily="34" charset="-122"/>
                 <a:cs typeface="Calibri" pitchFamily="34" charset="-120"/>
               </a:rPr>
-              <a:t>Кадры / Оклады / Больничные</a:t>
+              <a:t>Кадры / Больничные</a:t>
             </a:r>
             <a:endParaRPr lang="en-US" sz="950" dirty="0"/>
           </a:p>
@@ -6403,7 +6496,7 @@
                 <a:ea typeface="Calibri" pitchFamily="34" charset="-122"/>
                 <a:cs typeface="Calibri" pitchFamily="34" charset="-120"/>
               </a:rPr>
-              <a:t>Кадры / Оклады / Отпускные</a:t>
+              <a:t>Кадры / Отпускные</a:t>
             </a:r>
             <a:endParaRPr lang="en-US" sz="950" dirty="0"/>
           </a:p>
